--- a/exports/pptx/lessons/middle-module-09-subtraction-nikhilam/day-04-power-of-ten.pptx
+++ b/exports/pptx/lessons/middle-module-09-subtraction-nikhilam/day-04-power-of-ten.pptx
@@ -5011,8 +5011,8 @@
         </p:nvSpPr>
         <p:spPr>
           <a:xfrm>
-            <a:off x="634901" y="4750445"/>
-            <a:ext cx="8102798" cy="525661"/>
+            <a:off x="406301" y="3046214"/>
+            <a:ext cx="8498026" cy="213271"/>
           </a:xfrm>
           <a:prstGeom prst="rect">
             <a:avLst/>
@@ -5024,51 +5024,13 @@
           <a:bodyPr wrap="square" lIns="0" tIns="0" rIns="0" bIns="0" rtlCol="0" anchor="t"/>
           <a:lstStyle/>
           <a:p>
-            <a:pPr algn="l" marL="342900" indent="-342900">
-              <a:lnSpc>
-                <a:spcPts val="1620"/>
-              </a:lnSpc>
-              <a:spcAft>
-                <a:spcPts val="300"/>
-              </a:spcAft>
-              <a:buSzPct val="100000"/>
-              <a:buChar char="•"/>
-            </a:pPr>
-            <a:r>
-              <a:rPr lang="en-US" sz="1200" b="1" dirty="0">
-                <a:solidFill>
-                  <a:srgbClr val="1C2833"/>
-                </a:solidFill>
-                <a:latin typeface="Arial" pitchFamily="34" charset="0"/>
-                <a:ea typeface="Arial" pitchFamily="34" charset="-122"/>
-                <a:cs typeface="Arial" pitchFamily="34" charset="-120"/>
-              </a:rPr>
-              <a:t>The padding rule.</a:t>
-            </a:r>
-            <a:pPr algn="l" indent="0" marL="0">
-              <a:lnSpc>
-                <a:spcPts val="1620"/>
-              </a:lnSpc>
-              <a:spcAft>
-                <a:spcPts val="300"/>
-              </a:spcAft>
-              <a:buNone/>
-            </a:pPr>
-            <a:r>
-              <a:rPr lang="en-US" sz="1200" dirty="0">
-                <a:solidFill>
-                  <a:srgbClr val="1C2833"/>
-                </a:solidFill>
-                <a:latin typeface="Arial" pitchFamily="34" charset="0"/>
-                <a:ea typeface="Arial" pitchFamily="34" charset="-122"/>
-                <a:cs typeface="Arial" pitchFamily="34" charset="-120"/>
-              </a:rPr>
-              <a:t> </a:t>
-            </a:r>
-            <a:pPr algn="l" indent="0" marL="0">
-              <a:lnSpc>
-                <a:spcPts val="1620"/>
-              </a:lnSpc>
+            <a:pPr algn="l" indent="0" marL="0">
+              <a:lnSpc>
+                <a:spcPts val="1680"/>
+              </a:lnSpc>
+              <a:spcBef>
+                <a:spcPts val="300"/>
+              </a:spcBef>
               <a:spcAft>
                 <a:spcPts val="300"/>
               </a:spcAft>
@@ -5083,87 +5045,7 @@
                 <a:ea typeface="Arial" pitchFamily="34" charset="-122"/>
                 <a:cs typeface="Arial" pitchFamily="34" charset="-120"/>
               </a:rPr>
-              <a:t>"If A has fewer digits than the base 10ⁿ, pad A with leading zeros. 89 in </a:t>
-            </a:r>
-            <a:pPr algn="l" indent="0" marL="0">
-              <a:lnSpc>
-                <a:spcPts val="1620"/>
-              </a:lnSpc>
-              <a:spcAft>
-                <a:spcPts val="300"/>
-              </a:spcAft>
-              <a:buNone/>
-            </a:pPr>
-            <a:r>
-              <a:rPr lang="en-US" sz="1200" i="1" dirty="0">
-                <a:solidFill>
-                  <a:srgbClr val="1C2833"/>
-                </a:solidFill>
-                <a:latin typeface="Arial" pitchFamily="34" charset="0"/>
-                <a:ea typeface="Arial" pitchFamily="34" charset="-122"/>
-                <a:cs typeface="Arial" pitchFamily="34" charset="-120"/>
-              </a:rPr>
-              <a:t>10000 − 89</a:t>
-            </a:r>
-            <a:pPr algn="l" indent="0" marL="0">
-              <a:lnSpc>
-                <a:spcPts val="1620"/>
-              </a:lnSpc>
-              <a:spcAft>
-                <a:spcPts val="300"/>
-              </a:spcAft>
-              <a:buNone/>
-            </a:pPr>
-            <a:r>
-              <a:rPr lang="en-US" sz="1200" i="1" dirty="0">
-                <a:solidFill>
-                  <a:srgbClr val="1C2833"/>
-                </a:solidFill>
-                <a:latin typeface="Arial" pitchFamily="34" charset="0"/>
-                <a:ea typeface="Arial" pitchFamily="34" charset="-122"/>
-                <a:cs typeface="Arial" pitchFamily="34" charset="-120"/>
-              </a:rPr>
-              <a:t> becomes </a:t>
-            </a:r>
-            <a:pPr algn="l" indent="0" marL="0">
-              <a:lnSpc>
-                <a:spcPts val="1620"/>
-              </a:lnSpc>
-              <a:spcAft>
-                <a:spcPts val="300"/>
-              </a:spcAft>
-              <a:buNone/>
-            </a:pPr>
-            <a:r>
-              <a:rPr lang="en-US" sz="1200" i="1" dirty="0">
-                <a:solidFill>
-                  <a:srgbClr val="1C2833"/>
-                </a:solidFill>
-                <a:latin typeface="Arial" pitchFamily="34" charset="0"/>
-                <a:ea typeface="Arial" pitchFamily="34" charset="-122"/>
-                <a:cs typeface="Arial" pitchFamily="34" charset="-120"/>
-              </a:rPr>
-              <a:t>0089</a:t>
-            </a:r>
-            <a:pPr algn="l" indent="0" marL="0">
-              <a:lnSpc>
-                <a:spcPts val="1620"/>
-              </a:lnSpc>
-              <a:spcAft>
-                <a:spcPts val="300"/>
-              </a:spcAft>
-              <a:buNone/>
-            </a:pPr>
-            <a:r>
-              <a:rPr lang="en-US" sz="1200" i="1" dirty="0">
-                <a:solidFill>
-                  <a:srgbClr val="1C2833"/>
-                </a:solidFill>
-                <a:latin typeface="Arial" pitchFamily="34" charset="0"/>
-                <a:ea typeface="Arial" pitchFamily="34" charset="-122"/>
-                <a:cs typeface="Arial" pitchFamily="34" charset="-120"/>
-              </a:rPr>
-              <a:t>. The Nikhilam rule needs as many digits as the base has zeros."</a:t>
+              <a:t>Each row: Problem · Working · Answer.</a:t>
             </a:r>
             <a:endParaRPr lang="en-US" sz="1200" dirty="0"/>
           </a:p>
@@ -5177,7 +5059,535 @@
         </p:nvSpPr>
         <p:spPr>
           <a:xfrm>
-            <a:off x="406301" y="5441156"/>
+            <a:off x="634901" y="3348335"/>
+            <a:ext cx="8102798" cy="1257002"/>
+          </a:xfrm>
+          <a:prstGeom prst="rect">
+            <a:avLst/>
+          </a:prstGeom>
+          <a:noFill/>
+          <a:ln/>
+        </p:spPr>
+        <p:txBody>
+          <a:bodyPr wrap="square" lIns="0" tIns="0" rIns="0" bIns="0" rtlCol="0" anchor="t"/>
+          <a:lstStyle/>
+          <a:p>
+            <a:pPr algn="l" marL="342900" indent="-342900">
+              <a:lnSpc>
+                <a:spcPts val="1620"/>
+              </a:lnSpc>
+              <a:spcAft>
+                <a:spcPts val="300"/>
+              </a:spcAft>
+              <a:buSzPct val="100000"/>
+              <a:buChar char="•"/>
+            </a:pPr>
+            <a:r>
+              <a:rPr lang="en-US" sz="1200" b="1" dirty="0">
+                <a:solidFill>
+                  <a:srgbClr val="1C2833"/>
+                </a:solidFill>
+                <a:latin typeface="Arial" pitchFamily="34" charset="0"/>
+                <a:ea typeface="Arial" pitchFamily="34" charset="-122"/>
+                <a:cs typeface="Arial" pitchFamily="34" charset="-120"/>
+              </a:rPr>
+              <a:t>1000 − 567</a:t>
+            </a:r>
+            <a:pPr algn="l" indent="0" marL="0">
+              <a:lnSpc>
+                <a:spcPts val="1620"/>
+              </a:lnSpc>
+              <a:spcAft>
+                <a:spcPts val="300"/>
+              </a:spcAft>
+              <a:buNone/>
+            </a:pPr>
+            <a:r>
+              <a:rPr lang="en-US" sz="1200" dirty="0">
+                <a:solidFill>
+                  <a:srgbClr val="1C2833"/>
+                </a:solidFill>
+                <a:latin typeface="Arial" pitchFamily="34" charset="0"/>
+                <a:ea typeface="Arial" pitchFamily="34" charset="-122"/>
+                <a:cs typeface="Arial" pitchFamily="34" charset="-120"/>
+              </a:rPr>
+              <a:t> — 9-5, 9-6, 10-7 = 4, 3, 3 · </a:t>
+            </a:r>
+            <a:pPr algn="l" indent="0" marL="0">
+              <a:lnSpc>
+                <a:spcPts val="1620"/>
+              </a:lnSpc>
+              <a:spcAft>
+                <a:spcPts val="300"/>
+              </a:spcAft>
+              <a:buNone/>
+            </a:pPr>
+            <a:r>
+              <a:rPr lang="en-US" sz="1200" b="1" dirty="0">
+                <a:solidFill>
+                  <a:srgbClr val="1C2833"/>
+                </a:solidFill>
+                <a:latin typeface="Arial" pitchFamily="34" charset="0"/>
+                <a:ea typeface="Arial" pitchFamily="34" charset="-122"/>
+                <a:cs typeface="Arial" pitchFamily="34" charset="-120"/>
+              </a:rPr>
+              <a:t>433</a:t>
+            </a:r>
+            <a:endParaRPr lang="en-US" sz="1200" dirty="0"/>
+          </a:p>
+          <a:p>
+            <a:pPr algn="l" marL="342900" indent="-342900">
+              <a:lnSpc>
+                <a:spcPts val="1620"/>
+              </a:lnSpc>
+              <a:spcAft>
+                <a:spcPts val="300"/>
+              </a:spcAft>
+              <a:buSzPct val="100000"/>
+              <a:buChar char="•"/>
+            </a:pPr>
+            <a:r>
+              <a:rPr lang="en-US" sz="1200" b="1" dirty="0">
+                <a:solidFill>
+                  <a:srgbClr val="1C2833"/>
+                </a:solidFill>
+                <a:latin typeface="Arial" pitchFamily="34" charset="0"/>
+                <a:ea typeface="Arial" pitchFamily="34" charset="-122"/>
+                <a:cs typeface="Arial" pitchFamily="34" charset="-120"/>
+              </a:rPr>
+              <a:t>1000 − 248</a:t>
+            </a:r>
+            <a:pPr algn="l" indent="0" marL="0">
+              <a:lnSpc>
+                <a:spcPts val="1620"/>
+              </a:lnSpc>
+              <a:spcAft>
+                <a:spcPts val="300"/>
+              </a:spcAft>
+              <a:buNone/>
+            </a:pPr>
+            <a:r>
+              <a:rPr lang="en-US" sz="1200" dirty="0">
+                <a:solidFill>
+                  <a:srgbClr val="1C2833"/>
+                </a:solidFill>
+                <a:latin typeface="Arial" pitchFamily="34" charset="0"/>
+                <a:ea typeface="Arial" pitchFamily="34" charset="-122"/>
+                <a:cs typeface="Arial" pitchFamily="34" charset="-120"/>
+              </a:rPr>
+              <a:t> — 9-2, 9-4, 10-8 = 7, 5, 2 · </a:t>
+            </a:r>
+            <a:pPr algn="l" indent="0" marL="0">
+              <a:lnSpc>
+                <a:spcPts val="1620"/>
+              </a:lnSpc>
+              <a:spcAft>
+                <a:spcPts val="300"/>
+              </a:spcAft>
+              <a:buNone/>
+            </a:pPr>
+            <a:r>
+              <a:rPr lang="en-US" sz="1200" b="1" dirty="0">
+                <a:solidFill>
+                  <a:srgbClr val="1C2833"/>
+                </a:solidFill>
+                <a:latin typeface="Arial" pitchFamily="34" charset="0"/>
+                <a:ea typeface="Arial" pitchFamily="34" charset="-122"/>
+                <a:cs typeface="Arial" pitchFamily="34" charset="-120"/>
+              </a:rPr>
+              <a:t>752</a:t>
+            </a:r>
+            <a:endParaRPr lang="en-US" sz="1200" dirty="0"/>
+          </a:p>
+          <a:p>
+            <a:pPr algn="l" marL="342900" indent="-342900">
+              <a:lnSpc>
+                <a:spcPts val="1620"/>
+              </a:lnSpc>
+              <a:spcAft>
+                <a:spcPts val="300"/>
+              </a:spcAft>
+              <a:buSzPct val="100000"/>
+              <a:buChar char="•"/>
+            </a:pPr>
+            <a:r>
+              <a:rPr lang="en-US" sz="1200" b="1" dirty="0">
+                <a:solidFill>
+                  <a:srgbClr val="1C2833"/>
+                </a:solidFill>
+                <a:latin typeface="Arial" pitchFamily="34" charset="0"/>
+                <a:ea typeface="Arial" pitchFamily="34" charset="-122"/>
+                <a:cs typeface="Arial" pitchFamily="34" charset="-120"/>
+              </a:rPr>
+              <a:t>10 000 − 4567</a:t>
+            </a:r>
+            <a:pPr algn="l" indent="0" marL="0">
+              <a:lnSpc>
+                <a:spcPts val="1620"/>
+              </a:lnSpc>
+              <a:spcAft>
+                <a:spcPts val="300"/>
+              </a:spcAft>
+              <a:buNone/>
+            </a:pPr>
+            <a:r>
+              <a:rPr lang="en-US" sz="1200" dirty="0">
+                <a:solidFill>
+                  <a:srgbClr val="1C2833"/>
+                </a:solidFill>
+                <a:latin typeface="Arial" pitchFamily="34" charset="0"/>
+                <a:ea typeface="Arial" pitchFamily="34" charset="-122"/>
+                <a:cs typeface="Arial" pitchFamily="34" charset="-120"/>
+              </a:rPr>
+              <a:t> — 9-4, 9-5, 9-6, 10-7 = 5, 4, 3, 3 · </a:t>
+            </a:r>
+            <a:pPr algn="l" indent="0" marL="0">
+              <a:lnSpc>
+                <a:spcPts val="1620"/>
+              </a:lnSpc>
+              <a:spcAft>
+                <a:spcPts val="300"/>
+              </a:spcAft>
+              <a:buNone/>
+            </a:pPr>
+            <a:r>
+              <a:rPr lang="en-US" sz="1200" b="1" dirty="0">
+                <a:solidFill>
+                  <a:srgbClr val="1C2833"/>
+                </a:solidFill>
+                <a:latin typeface="Arial" pitchFamily="34" charset="0"/>
+                <a:ea typeface="Arial" pitchFamily="34" charset="-122"/>
+                <a:cs typeface="Arial" pitchFamily="34" charset="-120"/>
+              </a:rPr>
+              <a:t>5433</a:t>
+            </a:r>
+            <a:endParaRPr lang="en-US" sz="1200" dirty="0"/>
+          </a:p>
+          <a:p>
+            <a:pPr algn="l" marL="342900" indent="-342900">
+              <a:lnSpc>
+                <a:spcPts val="1620"/>
+              </a:lnSpc>
+              <a:spcAft>
+                <a:spcPts val="300"/>
+              </a:spcAft>
+              <a:buSzPct val="100000"/>
+              <a:buChar char="•"/>
+            </a:pPr>
+            <a:r>
+              <a:rPr lang="en-US" sz="1200" b="1" dirty="0">
+                <a:solidFill>
+                  <a:srgbClr val="1C2833"/>
+                </a:solidFill>
+                <a:latin typeface="Arial" pitchFamily="34" charset="0"/>
+                <a:ea typeface="Arial" pitchFamily="34" charset="-122"/>
+                <a:cs typeface="Arial" pitchFamily="34" charset="-120"/>
+              </a:rPr>
+              <a:t>10 000 − 89</a:t>
+            </a:r>
+            <a:pPr algn="l" indent="0" marL="0">
+              <a:lnSpc>
+                <a:spcPts val="1620"/>
+              </a:lnSpc>
+              <a:spcAft>
+                <a:spcPts val="300"/>
+              </a:spcAft>
+              <a:buNone/>
+            </a:pPr>
+            <a:r>
+              <a:rPr lang="en-US" sz="1200" dirty="0">
+                <a:solidFill>
+                  <a:srgbClr val="1C2833"/>
+                </a:solidFill>
+                <a:latin typeface="Arial" pitchFamily="34" charset="0"/>
+                <a:ea typeface="Arial" pitchFamily="34" charset="-122"/>
+                <a:cs typeface="Arial" pitchFamily="34" charset="-120"/>
+              </a:rPr>
+              <a:t> — 9-0, 9-0, 9-8, 10-9 = 9, 9, 1, 1 · </a:t>
+            </a:r>
+            <a:pPr algn="l" indent="0" marL="0">
+              <a:lnSpc>
+                <a:spcPts val="1620"/>
+              </a:lnSpc>
+              <a:spcAft>
+                <a:spcPts val="300"/>
+              </a:spcAft>
+              <a:buNone/>
+            </a:pPr>
+            <a:r>
+              <a:rPr lang="en-US" sz="1200" b="1" dirty="0">
+                <a:solidFill>
+                  <a:srgbClr val="1C2833"/>
+                </a:solidFill>
+                <a:latin typeface="Arial" pitchFamily="34" charset="0"/>
+                <a:ea typeface="Arial" pitchFamily="34" charset="-122"/>
+                <a:cs typeface="Arial" pitchFamily="34" charset="-120"/>
+              </a:rPr>
+              <a:t>9911</a:t>
+            </a:r>
+            <a:pPr algn="l" indent="0" marL="0">
+              <a:lnSpc>
+                <a:spcPts val="1620"/>
+              </a:lnSpc>
+              <a:spcAft>
+                <a:spcPts val="300"/>
+              </a:spcAft>
+              <a:buNone/>
+            </a:pPr>
+            <a:r>
+              <a:rPr lang="en-US" sz="1200" dirty="0">
+                <a:solidFill>
+                  <a:srgbClr val="1C2833"/>
+                </a:solidFill>
+                <a:latin typeface="Arial" pitchFamily="34" charset="0"/>
+                <a:ea typeface="Arial" pitchFamily="34" charset="-122"/>
+                <a:cs typeface="Arial" pitchFamily="34" charset="-120"/>
+              </a:rPr>
+              <a:t> (pad 89 → 0089)</a:t>
+            </a:r>
+            <a:endParaRPr lang="en-US" sz="1200" dirty="0"/>
+          </a:p>
+          <a:p>
+            <a:pPr algn="l" marL="342900" indent="-342900">
+              <a:lnSpc>
+                <a:spcPts val="1620"/>
+              </a:lnSpc>
+              <a:spcAft>
+                <a:spcPts val="300"/>
+              </a:spcAft>
+              <a:buSzPct val="100000"/>
+              <a:buChar char="•"/>
+            </a:pPr>
+            <a:r>
+              <a:rPr lang="en-US" sz="1200" b="1" dirty="0">
+                <a:solidFill>
+                  <a:srgbClr val="1C2833"/>
+                </a:solidFill>
+                <a:latin typeface="Arial" pitchFamily="34" charset="0"/>
+                <a:ea typeface="Arial" pitchFamily="34" charset="-122"/>
+                <a:cs typeface="Arial" pitchFamily="34" charset="-120"/>
+              </a:rPr>
+              <a:t>100 000 − 23 456</a:t>
+            </a:r>
+            <a:pPr algn="l" indent="0" marL="0">
+              <a:lnSpc>
+                <a:spcPts val="1620"/>
+              </a:lnSpc>
+              <a:spcAft>
+                <a:spcPts val="300"/>
+              </a:spcAft>
+              <a:buNone/>
+            </a:pPr>
+            <a:r>
+              <a:rPr lang="en-US" sz="1200" dirty="0">
+                <a:solidFill>
+                  <a:srgbClr val="1C2833"/>
+                </a:solidFill>
+                <a:latin typeface="Arial" pitchFamily="34" charset="0"/>
+                <a:ea typeface="Arial" pitchFamily="34" charset="-122"/>
+                <a:cs typeface="Arial" pitchFamily="34" charset="-120"/>
+              </a:rPr>
+              <a:t> — 9-2, 9-3, 9-4, 9-5, 10-6 = 7, 6, 5, 4, 4 · </a:t>
+            </a:r>
+            <a:pPr algn="l" indent="0" marL="0">
+              <a:lnSpc>
+                <a:spcPts val="1620"/>
+              </a:lnSpc>
+              <a:spcAft>
+                <a:spcPts val="300"/>
+              </a:spcAft>
+              <a:buNone/>
+            </a:pPr>
+            <a:r>
+              <a:rPr lang="en-US" sz="1200" b="1" dirty="0">
+                <a:solidFill>
+                  <a:srgbClr val="1C2833"/>
+                </a:solidFill>
+                <a:latin typeface="Arial" pitchFamily="34" charset="0"/>
+                <a:ea typeface="Arial" pitchFamily="34" charset="-122"/>
+                <a:cs typeface="Arial" pitchFamily="34" charset="-120"/>
+              </a:rPr>
+              <a:t>76 544</a:t>
+            </a:r>
+            <a:endParaRPr lang="en-US" sz="1200" dirty="0"/>
+          </a:p>
+        </p:txBody>
+      </p:sp>
+      <p:sp>
+        <p:nvSpPr>
+          <p:cNvPr id="13" name="Text 11"/>
+          <p:cNvSpPr/>
+          <p:nvPr/>
+        </p:nvSpPr>
+        <p:spPr>
+          <a:xfrm>
+            <a:off x="634901" y="4706838"/>
+            <a:ext cx="8102798" cy="525661"/>
+          </a:xfrm>
+          <a:prstGeom prst="rect">
+            <a:avLst/>
+          </a:prstGeom>
+          <a:noFill/>
+          <a:ln/>
+        </p:spPr>
+        <p:txBody>
+          <a:bodyPr wrap="square" lIns="0" tIns="0" rIns="0" bIns="0" rtlCol="0" anchor="t"/>
+          <a:lstStyle/>
+          <a:p>
+            <a:pPr algn="l" marL="342900" indent="-342900">
+              <a:lnSpc>
+                <a:spcPts val="1620"/>
+              </a:lnSpc>
+              <a:spcAft>
+                <a:spcPts val="300"/>
+              </a:spcAft>
+              <a:buSzPct val="100000"/>
+              <a:buChar char="•"/>
+            </a:pPr>
+            <a:r>
+              <a:rPr lang="en-US" sz="1200" b="1" dirty="0">
+                <a:solidFill>
+                  <a:srgbClr val="1C2833"/>
+                </a:solidFill>
+                <a:latin typeface="Arial" pitchFamily="34" charset="0"/>
+                <a:ea typeface="Arial" pitchFamily="34" charset="-122"/>
+                <a:cs typeface="Arial" pitchFamily="34" charset="-120"/>
+              </a:rPr>
+              <a:t>The padding rule.</a:t>
+            </a:r>
+            <a:pPr algn="l" indent="0" marL="0">
+              <a:lnSpc>
+                <a:spcPts val="1620"/>
+              </a:lnSpc>
+              <a:spcAft>
+                <a:spcPts val="300"/>
+              </a:spcAft>
+              <a:buNone/>
+            </a:pPr>
+            <a:r>
+              <a:rPr lang="en-US" sz="1200" dirty="0">
+                <a:solidFill>
+                  <a:srgbClr val="1C2833"/>
+                </a:solidFill>
+                <a:latin typeface="Arial" pitchFamily="34" charset="0"/>
+                <a:ea typeface="Arial" pitchFamily="34" charset="-122"/>
+                <a:cs typeface="Arial" pitchFamily="34" charset="-120"/>
+              </a:rPr>
+              <a:t> </a:t>
+            </a:r>
+            <a:pPr algn="l" indent="0" marL="0">
+              <a:lnSpc>
+                <a:spcPts val="1620"/>
+              </a:lnSpc>
+              <a:spcAft>
+                <a:spcPts val="300"/>
+              </a:spcAft>
+              <a:buNone/>
+            </a:pPr>
+            <a:r>
+              <a:rPr lang="en-US" sz="1200" i="1" dirty="0">
+                <a:solidFill>
+                  <a:srgbClr val="1C2833"/>
+                </a:solidFill>
+                <a:latin typeface="Arial" pitchFamily="34" charset="0"/>
+                <a:ea typeface="Arial" pitchFamily="34" charset="-122"/>
+                <a:cs typeface="Arial" pitchFamily="34" charset="-120"/>
+              </a:rPr>
+              <a:t>"If A has fewer digits than the base 10ⁿ, pad A with leading zeros. 89 in </a:t>
+            </a:r>
+            <a:pPr algn="l" indent="0" marL="0">
+              <a:lnSpc>
+                <a:spcPts val="1620"/>
+              </a:lnSpc>
+              <a:spcAft>
+                <a:spcPts val="300"/>
+              </a:spcAft>
+              <a:buNone/>
+            </a:pPr>
+            <a:r>
+              <a:rPr lang="en-US" sz="1200" i="1" dirty="0">
+                <a:solidFill>
+                  <a:srgbClr val="1C2833"/>
+                </a:solidFill>
+                <a:latin typeface="Arial" pitchFamily="34" charset="0"/>
+                <a:ea typeface="Arial" pitchFamily="34" charset="-122"/>
+                <a:cs typeface="Arial" pitchFamily="34" charset="-120"/>
+              </a:rPr>
+              <a:t>10000 − 89</a:t>
+            </a:r>
+            <a:pPr algn="l" indent="0" marL="0">
+              <a:lnSpc>
+                <a:spcPts val="1620"/>
+              </a:lnSpc>
+              <a:spcAft>
+                <a:spcPts val="300"/>
+              </a:spcAft>
+              <a:buNone/>
+            </a:pPr>
+            <a:r>
+              <a:rPr lang="en-US" sz="1200" i="1" dirty="0">
+                <a:solidFill>
+                  <a:srgbClr val="1C2833"/>
+                </a:solidFill>
+                <a:latin typeface="Arial" pitchFamily="34" charset="0"/>
+                <a:ea typeface="Arial" pitchFamily="34" charset="-122"/>
+                <a:cs typeface="Arial" pitchFamily="34" charset="-120"/>
+              </a:rPr>
+              <a:t> becomes </a:t>
+            </a:r>
+            <a:pPr algn="l" indent="0" marL="0">
+              <a:lnSpc>
+                <a:spcPts val="1620"/>
+              </a:lnSpc>
+              <a:spcAft>
+                <a:spcPts val="300"/>
+              </a:spcAft>
+              <a:buNone/>
+            </a:pPr>
+            <a:r>
+              <a:rPr lang="en-US" sz="1200" i="1" dirty="0">
+                <a:solidFill>
+                  <a:srgbClr val="1C2833"/>
+                </a:solidFill>
+                <a:latin typeface="Arial" pitchFamily="34" charset="0"/>
+                <a:ea typeface="Arial" pitchFamily="34" charset="-122"/>
+                <a:cs typeface="Arial" pitchFamily="34" charset="-120"/>
+              </a:rPr>
+              <a:t>0089</a:t>
+            </a:r>
+            <a:pPr algn="l" indent="0" marL="0">
+              <a:lnSpc>
+                <a:spcPts val="1620"/>
+              </a:lnSpc>
+              <a:spcAft>
+                <a:spcPts val="300"/>
+              </a:spcAft>
+              <a:buNone/>
+            </a:pPr>
+            <a:r>
+              <a:rPr lang="en-US" sz="1200" i="1" dirty="0">
+                <a:solidFill>
+                  <a:srgbClr val="1C2833"/>
+                </a:solidFill>
+                <a:latin typeface="Arial" pitchFamily="34" charset="0"/>
+                <a:ea typeface="Arial" pitchFamily="34" charset="-122"/>
+                <a:cs typeface="Arial" pitchFamily="34" charset="-120"/>
+              </a:rPr>
+              <a:t>. The Nikhilam rule needs as many digits as the base has zeros."</a:t>
+            </a:r>
+            <a:endParaRPr lang="en-US" sz="1200" dirty="0"/>
+          </a:p>
+        </p:txBody>
+      </p:sp>
+      <p:sp>
+        <p:nvSpPr>
+          <p:cNvPr id="14" name="Text 12"/>
+          <p:cNvSpPr/>
+          <p:nvPr/>
+        </p:nvSpPr>
+        <p:spPr>
+          <a:xfrm>
+            <a:off x="406301" y="5397550"/>
             <a:ext cx="8498026" cy="213271"/>
           </a:xfrm>
           <a:prstGeom prst="rect">

--- a/exports/pptx/lessons/middle-module-09-subtraction-nikhilam/day-04-power-of-ten.pptx
+++ b/exports/pptx/lessons/middle-module-09-subtraction-nikhilam/day-04-power-of-ten.pptx
@@ -18,9 +18,13 @@
     <p:sldId id="266" r:id="rId12"/>
     <p:sldId id="267" r:id="rId13"/>
     <p:sldId id="268" r:id="rId14"/>
+    <p:sldId id="269" r:id="rId15"/>
+    <p:sldId id="270" r:id="rId16"/>
+    <p:sldId id="271" r:id="rId17"/>
+    <p:sldId id="272" r:id="rId18"/>
   </p:sldIdLst>
   <p:notesMasterIdLst>
-    <p:notesMasterId r:id="rId15"/>
+    <p:notesMasterId r:id="rId19"/>
   </p:notesMasterIdLst>
   <p:sldSz cx="9144000" cy="5143500"/>
   <p:notesSz cx="5143500" cy="9144000"/>
@@ -890,6 +894,358 @@
             <a:fld id="{F7021451-1387-4CA6-816F-3879F97B5CBC}" type="slidenum">
               <a:rPr lang="en-US"/>
               <a:t>13</a:t>
+            </a:fld>
+            <a:endParaRPr lang="en-US"/>
+          </a:p>
+        </p:txBody>
+      </p:sp>
+    </p:spTree>
+    <p:extLst>
+      <p:ext uri="{BB962C8B-B14F-4D97-AF65-F5344CB8AC3E}">
+        <p14:creationId xmlns:p14="http://schemas.microsoft.com/office/powerpoint/2010/main" val="1024086991"/>
+      </p:ext>
+    </p:extLst>
+  </p:cSld>
+  <p:clrMapOvr>
+    <a:masterClrMapping/>
+  </p:clrMapOvr>
+</p:notes>
+</file>
+
+<file path=ppt/notesSlides/notesSlide14.xml><?xml version="1.0" encoding="utf-8"?>
+<p:notes xmlns:a="http://schemas.openxmlformats.org/drawingml/2006/main" xmlns:r="http://schemas.openxmlformats.org/officeDocument/2006/relationships" xmlns:p="http://schemas.openxmlformats.org/presentationml/2006/main">
+  <p:cSld>
+    <p:spTree>
+      <p:nvGrpSpPr>
+        <p:cNvPr id="1" name=""/>
+        <p:cNvGrpSpPr/>
+        <p:nvPr/>
+      </p:nvGrpSpPr>
+      <p:grpSpPr>
+        <a:xfrm>
+          <a:off x="0" y="0"/>
+          <a:ext cx="0" cy="0"/>
+          <a:chOff x="0" y="0"/>
+          <a:chExt cx="0" cy="0"/>
+        </a:xfrm>
+      </p:grpSpPr>
+      <p:sp>
+        <p:nvSpPr>
+          <p:cNvPr id="2" name="Slide Image Placeholder 1"/>
+          <p:cNvSpPr>
+            <a:spLocks noGrp="1" noRot="1" noChangeAspect="1"/>
+          </p:cNvSpPr>
+          <p:nvPr>
+            <p:ph type="sldImg"/>
+          </p:nvPr>
+        </p:nvSpPr>
+        <p:spPr/>
+      </p:sp>
+      <p:sp>
+        <p:nvSpPr>
+          <p:cNvPr id="3" name="Notes Placeholder 2"/>
+          <p:cNvSpPr>
+            <a:spLocks noGrp="1"/>
+          </p:cNvSpPr>
+          <p:nvPr>
+            <p:ph type="body" idx="1"/>
+          </p:nvPr>
+        </p:nvSpPr>
+        <p:spPr/>
+        <p:txBody>
+          <a:bodyPr/>
+          <a:lstStyle/>
+          <a:p>
+            <a:r>
+              <a:rPr lang="en-US" dirty="0"/>
+              <a:t/>
+            </a:r>
+            <a:endParaRPr lang="en-US" dirty="0"/>
+          </a:p>
+        </p:txBody>
+      </p:sp>
+      <p:sp>
+        <p:nvSpPr>
+          <p:cNvPr id="4" name="Slide Number Placeholder 3"/>
+          <p:cNvSpPr>
+            <a:spLocks noGrp="1"/>
+          </p:cNvSpPr>
+          <p:nvPr>
+            <p:ph type="sldNum" sz="quarter" idx="10"/>
+          </p:nvPr>
+        </p:nvSpPr>
+        <p:spPr/>
+        <p:txBody>
+          <a:bodyPr/>
+          <a:lstStyle/>
+          <a:p>
+            <a:fld id="{F7021451-1387-4CA6-816F-3879F97B5CBC}" type="slidenum">
+              <a:rPr lang="en-US"/>
+              <a:t>14</a:t>
+            </a:fld>
+            <a:endParaRPr lang="en-US"/>
+          </a:p>
+        </p:txBody>
+      </p:sp>
+    </p:spTree>
+    <p:extLst>
+      <p:ext uri="{BB962C8B-B14F-4D97-AF65-F5344CB8AC3E}">
+        <p14:creationId xmlns:p14="http://schemas.microsoft.com/office/powerpoint/2010/main" val="1024086991"/>
+      </p:ext>
+    </p:extLst>
+  </p:cSld>
+  <p:clrMapOvr>
+    <a:masterClrMapping/>
+  </p:clrMapOvr>
+</p:notes>
+</file>
+
+<file path=ppt/notesSlides/notesSlide15.xml><?xml version="1.0" encoding="utf-8"?>
+<p:notes xmlns:a="http://schemas.openxmlformats.org/drawingml/2006/main" xmlns:r="http://schemas.openxmlformats.org/officeDocument/2006/relationships" xmlns:p="http://schemas.openxmlformats.org/presentationml/2006/main">
+  <p:cSld>
+    <p:spTree>
+      <p:nvGrpSpPr>
+        <p:cNvPr id="1" name=""/>
+        <p:cNvGrpSpPr/>
+        <p:nvPr/>
+      </p:nvGrpSpPr>
+      <p:grpSpPr>
+        <a:xfrm>
+          <a:off x="0" y="0"/>
+          <a:ext cx="0" cy="0"/>
+          <a:chOff x="0" y="0"/>
+          <a:chExt cx="0" cy="0"/>
+        </a:xfrm>
+      </p:grpSpPr>
+      <p:sp>
+        <p:nvSpPr>
+          <p:cNvPr id="2" name="Slide Image Placeholder 1"/>
+          <p:cNvSpPr>
+            <a:spLocks noGrp="1" noRot="1" noChangeAspect="1"/>
+          </p:cNvSpPr>
+          <p:nvPr>
+            <p:ph type="sldImg"/>
+          </p:nvPr>
+        </p:nvSpPr>
+        <p:spPr/>
+      </p:sp>
+      <p:sp>
+        <p:nvSpPr>
+          <p:cNvPr id="3" name="Notes Placeholder 2"/>
+          <p:cNvSpPr>
+            <a:spLocks noGrp="1"/>
+          </p:cNvSpPr>
+          <p:nvPr>
+            <p:ph type="body" idx="1"/>
+          </p:nvPr>
+        </p:nvSpPr>
+        <p:spPr/>
+        <p:txBody>
+          <a:bodyPr/>
+          <a:lstStyle/>
+          <a:p>
+            <a:r>
+              <a:rPr lang="en-US" dirty="0"/>
+              <a:t/>
+            </a:r>
+            <a:endParaRPr lang="en-US" dirty="0"/>
+          </a:p>
+        </p:txBody>
+      </p:sp>
+      <p:sp>
+        <p:nvSpPr>
+          <p:cNvPr id="4" name="Slide Number Placeholder 3"/>
+          <p:cNvSpPr>
+            <a:spLocks noGrp="1"/>
+          </p:cNvSpPr>
+          <p:nvPr>
+            <p:ph type="sldNum" sz="quarter" idx="10"/>
+          </p:nvPr>
+        </p:nvSpPr>
+        <p:spPr/>
+        <p:txBody>
+          <a:bodyPr/>
+          <a:lstStyle/>
+          <a:p>
+            <a:fld id="{F7021451-1387-4CA6-816F-3879F97B5CBC}" type="slidenum">
+              <a:rPr lang="en-US"/>
+              <a:t>15</a:t>
+            </a:fld>
+            <a:endParaRPr lang="en-US"/>
+          </a:p>
+        </p:txBody>
+      </p:sp>
+    </p:spTree>
+    <p:extLst>
+      <p:ext uri="{BB962C8B-B14F-4D97-AF65-F5344CB8AC3E}">
+        <p14:creationId xmlns:p14="http://schemas.microsoft.com/office/powerpoint/2010/main" val="1024086991"/>
+      </p:ext>
+    </p:extLst>
+  </p:cSld>
+  <p:clrMapOvr>
+    <a:masterClrMapping/>
+  </p:clrMapOvr>
+</p:notes>
+</file>
+
+<file path=ppt/notesSlides/notesSlide16.xml><?xml version="1.0" encoding="utf-8"?>
+<p:notes xmlns:a="http://schemas.openxmlformats.org/drawingml/2006/main" xmlns:r="http://schemas.openxmlformats.org/officeDocument/2006/relationships" xmlns:p="http://schemas.openxmlformats.org/presentationml/2006/main">
+  <p:cSld>
+    <p:spTree>
+      <p:nvGrpSpPr>
+        <p:cNvPr id="1" name=""/>
+        <p:cNvGrpSpPr/>
+        <p:nvPr/>
+      </p:nvGrpSpPr>
+      <p:grpSpPr>
+        <a:xfrm>
+          <a:off x="0" y="0"/>
+          <a:ext cx="0" cy="0"/>
+          <a:chOff x="0" y="0"/>
+          <a:chExt cx="0" cy="0"/>
+        </a:xfrm>
+      </p:grpSpPr>
+      <p:sp>
+        <p:nvSpPr>
+          <p:cNvPr id="2" name="Slide Image Placeholder 1"/>
+          <p:cNvSpPr>
+            <a:spLocks noGrp="1" noRot="1" noChangeAspect="1"/>
+          </p:cNvSpPr>
+          <p:nvPr>
+            <p:ph type="sldImg"/>
+          </p:nvPr>
+        </p:nvSpPr>
+        <p:spPr/>
+      </p:sp>
+      <p:sp>
+        <p:nvSpPr>
+          <p:cNvPr id="3" name="Notes Placeholder 2"/>
+          <p:cNvSpPr>
+            <a:spLocks noGrp="1"/>
+          </p:cNvSpPr>
+          <p:nvPr>
+            <p:ph type="body" idx="1"/>
+          </p:nvPr>
+        </p:nvSpPr>
+        <p:spPr/>
+        <p:txBody>
+          <a:bodyPr/>
+          <a:lstStyle/>
+          <a:p>
+            <a:r>
+              <a:rPr lang="en-US" dirty="0"/>
+              <a:t/>
+            </a:r>
+            <a:endParaRPr lang="en-US" dirty="0"/>
+          </a:p>
+        </p:txBody>
+      </p:sp>
+      <p:sp>
+        <p:nvSpPr>
+          <p:cNvPr id="4" name="Slide Number Placeholder 3"/>
+          <p:cNvSpPr>
+            <a:spLocks noGrp="1"/>
+          </p:cNvSpPr>
+          <p:nvPr>
+            <p:ph type="sldNum" sz="quarter" idx="10"/>
+          </p:nvPr>
+        </p:nvSpPr>
+        <p:spPr/>
+        <p:txBody>
+          <a:bodyPr/>
+          <a:lstStyle/>
+          <a:p>
+            <a:fld id="{F7021451-1387-4CA6-816F-3879F97B5CBC}" type="slidenum">
+              <a:rPr lang="en-US"/>
+              <a:t>16</a:t>
+            </a:fld>
+            <a:endParaRPr lang="en-US"/>
+          </a:p>
+        </p:txBody>
+      </p:sp>
+    </p:spTree>
+    <p:extLst>
+      <p:ext uri="{BB962C8B-B14F-4D97-AF65-F5344CB8AC3E}">
+        <p14:creationId xmlns:p14="http://schemas.microsoft.com/office/powerpoint/2010/main" val="1024086991"/>
+      </p:ext>
+    </p:extLst>
+  </p:cSld>
+  <p:clrMapOvr>
+    <a:masterClrMapping/>
+  </p:clrMapOvr>
+</p:notes>
+</file>
+
+<file path=ppt/notesSlides/notesSlide17.xml><?xml version="1.0" encoding="utf-8"?>
+<p:notes xmlns:a="http://schemas.openxmlformats.org/drawingml/2006/main" xmlns:r="http://schemas.openxmlformats.org/officeDocument/2006/relationships" xmlns:p="http://schemas.openxmlformats.org/presentationml/2006/main">
+  <p:cSld>
+    <p:spTree>
+      <p:nvGrpSpPr>
+        <p:cNvPr id="1" name=""/>
+        <p:cNvGrpSpPr/>
+        <p:nvPr/>
+      </p:nvGrpSpPr>
+      <p:grpSpPr>
+        <a:xfrm>
+          <a:off x="0" y="0"/>
+          <a:ext cx="0" cy="0"/>
+          <a:chOff x="0" y="0"/>
+          <a:chExt cx="0" cy="0"/>
+        </a:xfrm>
+      </p:grpSpPr>
+      <p:sp>
+        <p:nvSpPr>
+          <p:cNvPr id="2" name="Slide Image Placeholder 1"/>
+          <p:cNvSpPr>
+            <a:spLocks noGrp="1" noRot="1" noChangeAspect="1"/>
+          </p:cNvSpPr>
+          <p:nvPr>
+            <p:ph type="sldImg"/>
+          </p:nvPr>
+        </p:nvSpPr>
+        <p:spPr/>
+      </p:sp>
+      <p:sp>
+        <p:nvSpPr>
+          <p:cNvPr id="3" name="Notes Placeholder 2"/>
+          <p:cNvSpPr>
+            <a:spLocks noGrp="1"/>
+          </p:cNvSpPr>
+          <p:nvPr>
+            <p:ph type="body" idx="1"/>
+          </p:nvPr>
+        </p:nvSpPr>
+        <p:spPr/>
+        <p:txBody>
+          <a:bodyPr/>
+          <a:lstStyle/>
+          <a:p>
+            <a:r>
+              <a:rPr lang="en-US" dirty="0"/>
+              <a:t/>
+            </a:r>
+            <a:endParaRPr lang="en-US" dirty="0"/>
+          </a:p>
+        </p:txBody>
+      </p:sp>
+      <p:sp>
+        <p:nvSpPr>
+          <p:cNvPr id="4" name="Slide Number Placeholder 3"/>
+          <p:cNvSpPr>
+            <a:spLocks noGrp="1"/>
+          </p:cNvSpPr>
+          <p:nvPr>
+            <p:ph type="sldNum" sz="quarter" idx="10"/>
+          </p:nvPr>
+        </p:nvSpPr>
+        <p:spPr/>
+        <p:txBody>
+          <a:bodyPr/>
+          <a:lstStyle/>
+          <a:p>
+            <a:fld id="{F7021451-1387-4CA6-816F-3879F97B5CBC}" type="slidenum">
+              <a:rPr lang="en-US"/>
+              <a:t>17</a:t>
             </a:fld>
             <a:endParaRPr lang="en-US"/>
           </a:p>
@@ -2189,148 +2545,6 @@
         </p:nvSpPr>
         <p:spPr>
           <a:xfrm>
-            <a:off x="406301" y="1223963"/>
-            <a:ext cx="8498026" cy="274290"/>
-          </a:xfrm>
-          <a:prstGeom prst="rect">
-            <a:avLst/>
-          </a:prstGeom>
-          <a:noFill/>
-          <a:ln/>
-        </p:spPr>
-        <p:txBody>
-          <a:bodyPr wrap="square" lIns="0" tIns="0" rIns="0" bIns="0" rtlCol="0" anchor="t"/>
-          <a:lstStyle/>
-          <a:p>
-            <a:pPr algn="l" indent="0" marL="0">
-              <a:lnSpc>
-                <a:spcPts val="2160"/>
-              </a:lnSpc>
-              <a:spcBef>
-                <a:spcPts val="600"/>
-              </a:spcBef>
-              <a:spcAft>
-                <a:spcPts val="800"/>
-              </a:spcAft>
-              <a:buNone/>
-            </a:pPr>
-            <a:r>
-              <a:rPr lang="en-US" sz="1800" b="1" dirty="0">
-                <a:solidFill>
-                  <a:srgbClr val="FE4447"/>
-                </a:solidFill>
-                <a:latin typeface="Georgia" pitchFamily="34" charset="0"/>
-                <a:ea typeface="Georgia" pitchFamily="34" charset="-122"/>
-                <a:cs typeface="Georgia" pitchFamily="34" charset="-120"/>
-              </a:rPr>
-              <a:t>Learning objective</a:t>
-            </a:r>
-            <a:endParaRPr lang="en-US" sz="1800" dirty="0"/>
-          </a:p>
-        </p:txBody>
-      </p:sp>
-      <p:sp>
-        <p:nvSpPr>
-          <p:cNvPr id="6" name="Text 4"/>
-          <p:cNvSpPr/>
-          <p:nvPr/>
-        </p:nvSpPr>
-        <p:spPr>
-          <a:xfrm>
-            <a:off x="406301" y="1637854"/>
-            <a:ext cx="8498026" cy="436066"/>
-          </a:xfrm>
-          <a:prstGeom prst="rect">
-            <a:avLst/>
-          </a:prstGeom>
-          <a:noFill/>
-          <a:ln/>
-        </p:spPr>
-        <p:txBody>
-          <a:bodyPr wrap="square" lIns="0" tIns="0" rIns="0" bIns="0" rtlCol="0" anchor="t"/>
-          <a:lstStyle/>
-          <a:p>
-            <a:pPr algn="l" indent="0" marL="0">
-              <a:lnSpc>
-                <a:spcPts val="1680"/>
-              </a:lnSpc>
-              <a:spcBef>
-                <a:spcPts val="300"/>
-              </a:spcBef>
-              <a:spcAft>
-                <a:spcPts val="300"/>
-              </a:spcAft>
-              <a:buNone/>
-            </a:pPr>
-            <a:r>
-              <a:rPr lang="en-US" sz="1200" dirty="0">
-                <a:solidFill>
-                  <a:srgbClr val="1C2833"/>
-                </a:solidFill>
-                <a:latin typeface="Arial" pitchFamily="34" charset="0"/>
-                <a:ea typeface="Arial" pitchFamily="34" charset="-122"/>
-                <a:cs typeface="Arial" pitchFamily="34" charset="-120"/>
-              </a:rPr>
-              <a:t>By the end of this lesson, students will compute subtractions of the form </a:t>
-            </a:r>
-            <a:pPr algn="l" indent="0" marL="0">
-              <a:lnSpc>
-                <a:spcPts val="1680"/>
-              </a:lnSpc>
-              <a:spcBef>
-                <a:spcPts val="300"/>
-              </a:spcBef>
-              <a:spcAft>
-                <a:spcPts val="300"/>
-              </a:spcAft>
-              <a:buNone/>
-            </a:pPr>
-            <a:r>
-              <a:rPr lang="en-US" sz="1200" dirty="0">
-                <a:solidFill>
-                  <a:srgbClr val="1C2833"/>
-                </a:solidFill>
-                <a:latin typeface="Arial" pitchFamily="34" charset="0"/>
-                <a:ea typeface="Arial" pitchFamily="34" charset="-122"/>
-                <a:cs typeface="Arial" pitchFamily="34" charset="-120"/>
-              </a:rPr>
-              <a:t>10ⁿ − A</a:t>
-            </a:r>
-            <a:pPr algn="l" indent="0" marL="0">
-              <a:lnSpc>
-                <a:spcPts val="1680"/>
-              </a:lnSpc>
-              <a:spcBef>
-                <a:spcPts val="300"/>
-              </a:spcBef>
-              <a:spcAft>
-                <a:spcPts val="300"/>
-              </a:spcAft>
-              <a:buNone/>
-            </a:pPr>
-            <a:r>
-              <a:rPr lang="en-US" sz="1200" dirty="0">
-                <a:solidFill>
-                  <a:srgbClr val="1C2833"/>
-                </a:solidFill>
-                <a:latin typeface="Arial" pitchFamily="34" charset="0"/>
-                <a:ea typeface="Arial" pitchFamily="34" charset="-122"/>
-                <a:cs typeface="Arial" pitchFamily="34" charset="-120"/>
-              </a:rPr>
-              <a:t> (e.g. 1000 − 567, 10 000 − 4783) directly by reading off the complement of A, with no written borrow.</a:t>
-            </a:r>
-            <a:endParaRPr lang="en-US" sz="1200" dirty="0"/>
-          </a:p>
-        </p:txBody>
-      </p:sp>
-      <p:sp>
-        <p:nvSpPr>
-          <p:cNvPr id="7" name="Text 5"/>
-          <p:cNvSpPr/>
-          <p:nvPr/>
-        </p:nvSpPr>
-        <p:spPr>
-          <a:xfrm>
             <a:off x="406301" y="4434929"/>
             <a:ext cx="8498026" cy="213271"/>
           </a:xfrm>
@@ -2475,7 +2689,7 @@
                 <a:ea typeface="Georgia" pitchFamily="34" charset="-122"/>
                 <a:cs typeface="Georgia" pitchFamily="34" charset="-120"/>
               </a:rPr>
-              <a:t>Homework</a:t>
+              <a:t>Core (10 min) — The shift from "complement" to "subtraction" (cont.)</a:t>
             </a:r>
             <a:endParaRPr lang="en-US" sz="1800" dirty="0"/>
           </a:p>
@@ -2489,8 +2703,8 @@
         </p:nvSpPr>
         <p:spPr>
           <a:xfrm>
-            <a:off x="406301" y="870942"/>
-            <a:ext cx="8498026" cy="426541"/>
+            <a:off x="634901" y="883593"/>
+            <a:ext cx="8102798" cy="525661"/>
           </a:xfrm>
           <a:prstGeom prst="rect">
             <a:avLst/>
@@ -2502,13 +2716,31 @@
           <a:bodyPr wrap="square" lIns="0" tIns="0" rIns="0" bIns="0" rtlCol="0" anchor="t"/>
           <a:lstStyle/>
           <a:p>
-            <a:pPr algn="l" indent="0" marL="0">
-              <a:lnSpc>
-                <a:spcPts val="1680"/>
-              </a:lnSpc>
-              <a:spcBef>
-                <a:spcPts val="300"/>
-              </a:spcBef>
+            <a:pPr algn="l" marL="342900" indent="-342900">
+              <a:lnSpc>
+                <a:spcPts val="1620"/>
+              </a:lnSpc>
+              <a:spcAft>
+                <a:spcPts val="300"/>
+              </a:spcAft>
+              <a:buSzPct val="100000"/>
+              <a:buChar char="•"/>
+            </a:pPr>
+            <a:r>
+              <a:rPr lang="en-US" sz="1200" b="1" dirty="0">
+                <a:solidFill>
+                  <a:srgbClr val="1C2833"/>
+                </a:solidFill>
+                <a:latin typeface="Arial" pitchFamily="34" charset="0"/>
+                <a:ea typeface="Arial" pitchFamily="34" charset="-122"/>
+                <a:cs typeface="Arial" pitchFamily="34" charset="-120"/>
+              </a:rPr>
+              <a:t>The padding rule.</a:t>
+            </a:r>
+            <a:pPr algn="l" indent="0" marL="0">
+              <a:lnSpc>
+                <a:spcPts val="1620"/>
+              </a:lnSpc>
               <a:spcAft>
                 <a:spcPts val="300"/>
               </a:spcAft>
@@ -2523,15 +2755,12 @@
                 <a:ea typeface="Arial" pitchFamily="34" charset="-122"/>
                 <a:cs typeface="Arial" pitchFamily="34" charset="-120"/>
               </a:rPr>
-              <a:t>– 12 problems on the back of today's worksheet. Time yourself. Try to finish all 12 in under 4 minutes. – One reflection sentence: </a:t>
-            </a:r>
-            <a:pPr algn="l" indent="0" marL="0">
-              <a:lnSpc>
-                <a:spcPts val="1680"/>
-              </a:lnSpc>
-              <a:spcBef>
-                <a:spcPts val="300"/>
-              </a:spcBef>
+              <a:t> </a:t>
+            </a:r>
+            <a:pPr algn="l" indent="0" marL="0">
+              <a:lnSpc>
+                <a:spcPts val="1620"/>
+              </a:lnSpc>
               <a:spcAft>
                 <a:spcPts val="300"/>
               </a:spcAft>
@@ -2546,7 +2775,87 @@
                 <a:ea typeface="Arial" pitchFamily="34" charset="-122"/>
                 <a:cs typeface="Arial" pitchFamily="34" charset="-120"/>
               </a:rPr>
-              <a:t>"How did the Nikhilam method feel today compared to Day 1?"</a:t>
+              <a:t>"If A has fewer digits than the base 10ⁿ, pad A with leading zeros. 89 in </a:t>
+            </a:r>
+            <a:pPr algn="l" indent="0" marL="0">
+              <a:lnSpc>
+                <a:spcPts val="1620"/>
+              </a:lnSpc>
+              <a:spcAft>
+                <a:spcPts val="300"/>
+              </a:spcAft>
+              <a:buNone/>
+            </a:pPr>
+            <a:r>
+              <a:rPr lang="en-US" sz="1200" i="1" dirty="0">
+                <a:solidFill>
+                  <a:srgbClr val="1C2833"/>
+                </a:solidFill>
+                <a:latin typeface="Arial" pitchFamily="34" charset="0"/>
+                <a:ea typeface="Arial" pitchFamily="34" charset="-122"/>
+                <a:cs typeface="Arial" pitchFamily="34" charset="-120"/>
+              </a:rPr>
+              <a:t>10000 − 89</a:t>
+            </a:r>
+            <a:pPr algn="l" indent="0" marL="0">
+              <a:lnSpc>
+                <a:spcPts val="1620"/>
+              </a:lnSpc>
+              <a:spcAft>
+                <a:spcPts val="300"/>
+              </a:spcAft>
+              <a:buNone/>
+            </a:pPr>
+            <a:r>
+              <a:rPr lang="en-US" sz="1200" i="1" dirty="0">
+                <a:solidFill>
+                  <a:srgbClr val="1C2833"/>
+                </a:solidFill>
+                <a:latin typeface="Arial" pitchFamily="34" charset="0"/>
+                <a:ea typeface="Arial" pitchFamily="34" charset="-122"/>
+                <a:cs typeface="Arial" pitchFamily="34" charset="-120"/>
+              </a:rPr>
+              <a:t> becomes </a:t>
+            </a:r>
+            <a:pPr algn="l" indent="0" marL="0">
+              <a:lnSpc>
+                <a:spcPts val="1620"/>
+              </a:lnSpc>
+              <a:spcAft>
+                <a:spcPts val="300"/>
+              </a:spcAft>
+              <a:buNone/>
+            </a:pPr>
+            <a:r>
+              <a:rPr lang="en-US" sz="1200" i="1" dirty="0">
+                <a:solidFill>
+                  <a:srgbClr val="1C2833"/>
+                </a:solidFill>
+                <a:latin typeface="Arial" pitchFamily="34" charset="0"/>
+                <a:ea typeface="Arial" pitchFamily="34" charset="-122"/>
+                <a:cs typeface="Arial" pitchFamily="34" charset="-120"/>
+              </a:rPr>
+              <a:t>0089</a:t>
+            </a:r>
+            <a:pPr algn="l" indent="0" marL="0">
+              <a:lnSpc>
+                <a:spcPts val="1620"/>
+              </a:lnSpc>
+              <a:spcAft>
+                <a:spcPts val="300"/>
+              </a:spcAft>
+              <a:buNone/>
+            </a:pPr>
+            <a:r>
+              <a:rPr lang="en-US" sz="1200" i="1" dirty="0">
+                <a:solidFill>
+                  <a:srgbClr val="1C2833"/>
+                </a:solidFill>
+                <a:latin typeface="Arial" pitchFamily="34" charset="0"/>
+                <a:ea typeface="Arial" pitchFamily="34" charset="-122"/>
+                <a:cs typeface="Arial" pitchFamily="34" charset="-120"/>
+              </a:rPr>
+              <a:t>. The Nikhilam rule needs as many digits as the base has zeros."</a:t>
             </a:r>
             <a:endParaRPr lang="en-US" sz="1200" dirty="0"/>
           </a:p>
@@ -2704,7 +3013,7 @@
                 <a:ea typeface="Georgia" pitchFamily="34" charset="-122"/>
                 <a:cs typeface="Georgia" pitchFamily="34" charset="-120"/>
               </a:rPr>
-              <a:t>Differentiation</a:t>
+              <a:t>Activity (20 min) — Complement Drill (timed pairs)</a:t>
             </a:r>
             <a:endParaRPr lang="en-US" sz="1800" dirty="0"/>
           </a:p>
@@ -2718,8 +3027,8 @@
         </p:nvSpPr>
         <p:spPr>
           <a:xfrm>
-            <a:off x="634901" y="883593"/>
-            <a:ext cx="8102798" cy="544711"/>
+            <a:off x="406301" y="870942"/>
+            <a:ext cx="8498026" cy="222796"/>
           </a:xfrm>
           <a:prstGeom prst="rect">
             <a:avLst/>
@@ -2731,6 +3040,100 @@
           <a:bodyPr wrap="square" lIns="0" tIns="0" rIns="0" bIns="0" rtlCol="0" anchor="t"/>
           <a:lstStyle/>
           <a:p>
+            <a:pPr algn="l" indent="0" marL="0">
+              <a:lnSpc>
+                <a:spcPts val="1680"/>
+              </a:lnSpc>
+              <a:spcBef>
+                <a:spcPts val="300"/>
+              </a:spcBef>
+              <a:spcAft>
+                <a:spcPts val="300"/>
+              </a:spcAft>
+              <a:buNone/>
+            </a:pPr>
+            <a:r>
+              <a:rPr lang="en-US" sz="1200" dirty="0">
+                <a:solidFill>
+                  <a:srgbClr val="1C2833"/>
+                </a:solidFill>
+                <a:latin typeface="Arial" pitchFamily="34" charset="0"/>
+                <a:ea typeface="Arial" pitchFamily="34" charset="-122"/>
+                <a:cs typeface="Arial" pitchFamily="34" charset="-120"/>
+              </a:rPr>
+              <a:t>See </a:t>
+            </a:r>
+            <a:pPr algn="l" indent="0" marL="0">
+              <a:lnSpc>
+                <a:spcPts val="1680"/>
+              </a:lnSpc>
+              <a:spcBef>
+                <a:spcPts val="300"/>
+              </a:spcBef>
+              <a:spcAft>
+                <a:spcPts val="300"/>
+              </a:spcAft>
+              <a:buNone/>
+            </a:pPr>
+            <a:r>
+              <a:rPr lang="en-US" sz="1200" dirty="0">
+                <a:solidFill>
+                  <a:srgbClr val="1C2833"/>
+                </a:solidFill>
+                <a:latin typeface="Arial" pitchFamily="34" charset="0"/>
+                <a:ea typeface="Arial" pitchFamily="34" charset="-122"/>
+                <a:cs typeface="Arial" pitchFamily="34" charset="-120"/>
+              </a:rPr>
+              <a:t>activities/activity-01-complement-drill.md</a:t>
+            </a:r>
+            <a:pPr algn="l" indent="0" marL="0">
+              <a:lnSpc>
+                <a:spcPts val="1680"/>
+              </a:lnSpc>
+              <a:spcBef>
+                <a:spcPts val="300"/>
+              </a:spcBef>
+              <a:spcAft>
+                <a:spcPts val="300"/>
+              </a:spcAft>
+              <a:buNone/>
+            </a:pPr>
+            <a:r>
+              <a:rPr lang="en-US" sz="1200" dirty="0">
+                <a:solidFill>
+                  <a:srgbClr val="1C2833"/>
+                </a:solidFill>
+                <a:latin typeface="Arial" pitchFamily="34" charset="0"/>
+                <a:ea typeface="Arial" pitchFamily="34" charset="-122"/>
+                <a:cs typeface="Arial" pitchFamily="34" charset="-120"/>
+              </a:rPr>
+              <a:t>.</a:t>
+            </a:r>
+            <a:endParaRPr lang="en-US" sz="1200" dirty="0"/>
+          </a:p>
+        </p:txBody>
+      </p:sp>
+      <p:sp>
+        <p:nvSpPr>
+          <p:cNvPr id="5" name="Text 3"/>
+          <p:cNvSpPr/>
+          <p:nvPr/>
+        </p:nvSpPr>
+        <p:spPr>
+          <a:xfrm>
+            <a:off x="634901" y="1182588"/>
+            <a:ext cx="8102798" cy="544711"/>
+          </a:xfrm>
+          <a:prstGeom prst="rect">
+            <a:avLst/>
+          </a:prstGeom>
+          <a:noFill/>
+          <a:ln/>
+        </p:spPr>
+        <p:txBody>
+          <a:bodyPr wrap="square" lIns="0" tIns="0" rIns="0" bIns="0" rtlCol="0" anchor="t"/>
+          <a:lstStyle/>
+          <a:p>
             <a:pPr algn="l" marL="342900" indent="-342900">
               <a:lnSpc>
                 <a:spcPts val="1620"/>
@@ -2742,15 +3145,15 @@
               <a:buChar char="•"/>
             </a:pPr>
             <a:r>
-              <a:rPr lang="en-US" sz="1200" b="1" dirty="0">
-                <a:solidFill>
-                  <a:srgbClr val="1C2833"/>
-                </a:solidFill>
-                <a:latin typeface="Arial" pitchFamily="34" charset="0"/>
-                <a:ea typeface="Arial" pitchFamily="34" charset="-122"/>
-                <a:cs typeface="Arial" pitchFamily="34" charset="-120"/>
-              </a:rPr>
-              <a:t>Tier up:</a:t>
+              <a:rPr lang="en-US" sz="1200" dirty="0">
+                <a:solidFill>
+                  <a:srgbClr val="1C2833"/>
+                </a:solidFill>
+                <a:latin typeface="Arial" pitchFamily="34" charset="0"/>
+                <a:ea typeface="Arial" pitchFamily="34" charset="-122"/>
+                <a:cs typeface="Arial" pitchFamily="34" charset="-120"/>
+              </a:rPr>
+              <a:t>8 problems on a sheet. Mixed bases: 4 are </a:t>
             </a:r>
             <a:pPr algn="l" indent="0" marL="0">
               <a:lnSpc>
@@ -2770,7 +3173,107 @@
                 <a:ea typeface="Arial" pitchFamily="34" charset="-122"/>
                 <a:cs typeface="Arial" pitchFamily="34" charset="-120"/>
               </a:rPr>
-              <a:t> Mixed-base problems where the base is given symbolically. E.g. let B = 10⁶ = 1 000 000; compute B − 234 567.</a:t>
+              <a:t>1000 − X</a:t>
+            </a:r>
+            <a:pPr algn="l" indent="0" marL="0">
+              <a:lnSpc>
+                <a:spcPts val="1620"/>
+              </a:lnSpc>
+              <a:spcAft>
+                <a:spcPts val="300"/>
+              </a:spcAft>
+              <a:buNone/>
+            </a:pPr>
+            <a:r>
+              <a:rPr lang="en-US" sz="1200" dirty="0">
+                <a:solidFill>
+                  <a:srgbClr val="1C2833"/>
+                </a:solidFill>
+                <a:latin typeface="Arial" pitchFamily="34" charset="0"/>
+                <a:ea typeface="Arial" pitchFamily="34" charset="-122"/>
+                <a:cs typeface="Arial" pitchFamily="34" charset="-120"/>
+              </a:rPr>
+              <a:t>, 3 are </a:t>
+            </a:r>
+            <a:pPr algn="l" indent="0" marL="0">
+              <a:lnSpc>
+                <a:spcPts val="1620"/>
+              </a:lnSpc>
+              <a:spcAft>
+                <a:spcPts val="300"/>
+              </a:spcAft>
+              <a:buNone/>
+            </a:pPr>
+            <a:r>
+              <a:rPr lang="en-US" sz="1200" dirty="0">
+                <a:solidFill>
+                  <a:srgbClr val="1C2833"/>
+                </a:solidFill>
+                <a:latin typeface="Arial" pitchFamily="34" charset="0"/>
+                <a:ea typeface="Arial" pitchFamily="34" charset="-122"/>
+                <a:cs typeface="Arial" pitchFamily="34" charset="-120"/>
+              </a:rPr>
+              <a:t>10 000 − X</a:t>
+            </a:r>
+            <a:pPr algn="l" indent="0" marL="0">
+              <a:lnSpc>
+                <a:spcPts val="1620"/>
+              </a:lnSpc>
+              <a:spcAft>
+                <a:spcPts val="300"/>
+              </a:spcAft>
+              <a:buNone/>
+            </a:pPr>
+            <a:r>
+              <a:rPr lang="en-US" sz="1200" dirty="0">
+                <a:solidFill>
+                  <a:srgbClr val="1C2833"/>
+                </a:solidFill>
+                <a:latin typeface="Arial" pitchFamily="34" charset="0"/>
+                <a:ea typeface="Arial" pitchFamily="34" charset="-122"/>
+                <a:cs typeface="Arial" pitchFamily="34" charset="-120"/>
+              </a:rPr>
+              <a:t>, 1 is </a:t>
+            </a:r>
+            <a:pPr algn="l" indent="0" marL="0">
+              <a:lnSpc>
+                <a:spcPts val="1620"/>
+              </a:lnSpc>
+              <a:spcAft>
+                <a:spcPts val="300"/>
+              </a:spcAft>
+              <a:buNone/>
+            </a:pPr>
+            <a:r>
+              <a:rPr lang="en-US" sz="1200" dirty="0">
+                <a:solidFill>
+                  <a:srgbClr val="1C2833"/>
+                </a:solidFill>
+                <a:latin typeface="Arial" pitchFamily="34" charset="0"/>
+                <a:ea typeface="Arial" pitchFamily="34" charset="-122"/>
+                <a:cs typeface="Arial" pitchFamily="34" charset="-120"/>
+              </a:rPr>
+              <a:t>100 000 − X</a:t>
+            </a:r>
+            <a:pPr algn="l" indent="0" marL="0">
+              <a:lnSpc>
+                <a:spcPts val="1620"/>
+              </a:lnSpc>
+              <a:spcAft>
+                <a:spcPts val="300"/>
+              </a:spcAft>
+              <a:buNone/>
+            </a:pPr>
+            <a:r>
+              <a:rPr lang="en-US" sz="1200" dirty="0">
+                <a:solidFill>
+                  <a:srgbClr val="1C2833"/>
+                </a:solidFill>
+                <a:latin typeface="Arial" pitchFamily="34" charset="0"/>
+                <a:ea typeface="Arial" pitchFamily="34" charset="-122"/>
+                <a:cs typeface="Arial" pitchFamily="34" charset="-120"/>
+              </a:rPr>
+              <a:t>.</a:t>
             </a:r>
             <a:endParaRPr lang="en-US" sz="1200" dirty="0"/>
           </a:p>
@@ -2786,26 +3289,6 @@
               <a:buChar char="•"/>
             </a:pPr>
             <a:r>
-              <a:rPr lang="en-US" sz="1200" b="1" dirty="0">
-                <a:solidFill>
-                  <a:srgbClr val="1C2833"/>
-                </a:solidFill>
-                <a:latin typeface="Arial" pitchFamily="34" charset="0"/>
-                <a:ea typeface="Arial" pitchFamily="34" charset="-122"/>
-                <a:cs typeface="Arial" pitchFamily="34" charset="-120"/>
-              </a:rPr>
-              <a:t>Tier down:</a:t>
-            </a:r>
-            <a:pPr algn="l" indent="0" marL="0">
-              <a:lnSpc>
-                <a:spcPts val="1620"/>
-              </a:lnSpc>
-              <a:spcAft>
-                <a:spcPts val="300"/>
-              </a:spcAft>
-              <a:buNone/>
-            </a:pPr>
-            <a:r>
               <a:rPr lang="en-US" sz="1200" dirty="0">
                 <a:solidFill>
                   <a:srgbClr val="1C2833"/>
@@ -2814,47 +3297,7 @@
                 <a:ea typeface="Arial" pitchFamily="34" charset="-122"/>
                 <a:cs typeface="Arial" pitchFamily="34" charset="-120"/>
               </a:rPr>
-              <a:t> Stick to </a:t>
-            </a:r>
-            <a:pPr algn="l" indent="0" marL="0">
-              <a:lnSpc>
-                <a:spcPts val="1620"/>
-              </a:lnSpc>
-              <a:spcAft>
-                <a:spcPts val="300"/>
-              </a:spcAft>
-              <a:buNone/>
-            </a:pPr>
-            <a:r>
-              <a:rPr lang="en-US" sz="1200" dirty="0">
-                <a:solidFill>
-                  <a:srgbClr val="1C2833"/>
-                </a:solidFill>
-                <a:latin typeface="Arial" pitchFamily="34" charset="0"/>
-                <a:ea typeface="Arial" pitchFamily="34" charset="-122"/>
-                <a:cs typeface="Arial" pitchFamily="34" charset="-120"/>
-              </a:rPr>
-              <a:t>1000 − A</a:t>
-            </a:r>
-            <a:pPr algn="l" indent="0" marL="0">
-              <a:lnSpc>
-                <a:spcPts val="1620"/>
-              </a:lnSpc>
-              <a:spcAft>
-                <a:spcPts val="300"/>
-              </a:spcAft>
-              <a:buNone/>
-            </a:pPr>
-            <a:r>
-              <a:rPr lang="en-US" sz="1200" dirty="0">
-                <a:solidFill>
-                  <a:srgbClr val="1C2833"/>
-                </a:solidFill>
-                <a:latin typeface="Arial" pitchFamily="34" charset="0"/>
-                <a:ea typeface="Arial" pitchFamily="34" charset="-122"/>
-                <a:cs typeface="Arial" pitchFamily="34" charset="-120"/>
-              </a:rPr>
-              <a:t> for the homework. Step up to 10 000 only when the 1000 case is automatic.</a:t>
+              <a:t>Pair self-correction. Time the pair.</a:t>
             </a:r>
             <a:endParaRPr lang="en-US" sz="1200" dirty="0"/>
           </a:p>
@@ -2862,7 +3305,7 @@
       </p:sp>
       <p:sp>
         <p:nvSpPr>
-          <p:cNvPr id="5" name="Text 3"/>
+          <p:cNvPr id="6" name="Text 4"/>
           <p:cNvSpPr/>
           <p:nvPr/>
         </p:nvSpPr>
@@ -3012,7 +3455,7 @@
                 <a:ea typeface="Georgia" pitchFamily="34" charset="-122"/>
                 <a:cs typeface="Georgia" pitchFamily="34" charset="-120"/>
               </a:rPr>
-              <a:t>Teacher notes</a:t>
+              <a:t>Wrap-up (10 min)</a:t>
             </a:r>
             <a:endParaRPr lang="en-US" sz="1800" dirty="0"/>
           </a:p>
@@ -3026,8 +3469,8 @@
         </p:nvSpPr>
         <p:spPr>
           <a:xfrm>
-            <a:off x="406301" y="870942"/>
-            <a:ext cx="8498026" cy="1317724"/>
+            <a:off x="634901" y="883593"/>
+            <a:ext cx="8102798" cy="1405533"/>
           </a:xfrm>
           <a:prstGeom prst="rect">
             <a:avLst/>
@@ -3039,17 +3482,15 @@
           <a:bodyPr wrap="square" lIns="0" tIns="0" rIns="0" bIns="0" rtlCol="0" anchor="t"/>
           <a:lstStyle/>
           <a:p>
-            <a:pPr algn="l" indent="0" marL="0">
-              <a:lnSpc>
-                <a:spcPts val="1680"/>
-              </a:lnSpc>
-              <a:spcBef>
-                <a:spcPts val="300"/>
-              </a:spcBef>
-              <a:spcAft>
-                <a:spcPts val="300"/>
-              </a:spcAft>
-              <a:buNone/>
+            <a:pPr algn="l" marL="342900" indent="-342900">
+              <a:lnSpc>
+                <a:spcPts val="1620"/>
+              </a:lnSpc>
+              <a:spcAft>
+                <a:spcPts val="300"/>
+              </a:spcAft>
+              <a:buSzPct val="100000"/>
+              <a:buChar char="•"/>
             </a:pPr>
             <a:r>
               <a:rPr lang="en-US" sz="1200" dirty="0">
@@ -3060,15 +3501,76 @@
                 <a:ea typeface="Arial" pitchFamily="34" charset="-122"/>
                 <a:cs typeface="Arial" pitchFamily="34" charset="-120"/>
               </a:rPr>
-              <a:t>– This is the day students go "ohh — that's why we learned the complement." Make the connection explicit. The complement IS the answer when subtracting from the base. – A student will inevitably ask: </a:t>
-            </a:r>
-            <a:pPr algn="l" indent="0" marL="0">
-              <a:lnSpc>
-                <a:spcPts val="1680"/>
-              </a:lnSpc>
-              <a:spcBef>
-                <a:spcPts val="300"/>
-              </a:spcBef>
+              <a:t>Compare with standard borrowing: pick one problem (say </a:t>
+            </a:r>
+            <a:pPr algn="l" indent="0" marL="0">
+              <a:lnSpc>
+                <a:spcPts val="1620"/>
+              </a:lnSpc>
+              <a:spcAft>
+                <a:spcPts val="300"/>
+              </a:spcAft>
+              <a:buNone/>
+            </a:pPr>
+            <a:r>
+              <a:rPr lang="en-US" sz="1200" dirty="0">
+                <a:solidFill>
+                  <a:srgbClr val="1C2833"/>
+                </a:solidFill>
+                <a:latin typeface="Arial" pitchFamily="34" charset="0"/>
+                <a:ea typeface="Arial" pitchFamily="34" charset="-122"/>
+                <a:cs typeface="Arial" pitchFamily="34" charset="-120"/>
+              </a:rPr>
+              <a:t>10 000 − 4567</a:t>
+            </a:r>
+            <a:pPr algn="l" indent="0" marL="0">
+              <a:lnSpc>
+                <a:spcPts val="1620"/>
+              </a:lnSpc>
+              <a:spcAft>
+                <a:spcPts val="300"/>
+              </a:spcAft>
+              <a:buNone/>
+            </a:pPr>
+            <a:r>
+              <a:rPr lang="en-US" sz="1200" dirty="0">
+                <a:solidFill>
+                  <a:srgbClr val="1C2833"/>
+                </a:solidFill>
+                <a:latin typeface="Arial" pitchFamily="34" charset="0"/>
+                <a:ea typeface="Arial" pitchFamily="34" charset="-122"/>
+                <a:cs typeface="Arial" pitchFamily="34" charset="-120"/>
+              </a:rPr>
+              <a:t>) and ask half the class to solve by borrowing, half by Nikhilam. Same time limit. See who finishes first.</a:t>
+            </a:r>
+            <a:endParaRPr lang="en-US" sz="1200" dirty="0"/>
+          </a:p>
+          <a:p>
+            <a:pPr algn="l" marL="342900" indent="-342900">
+              <a:lnSpc>
+                <a:spcPts val="1620"/>
+              </a:lnSpc>
+              <a:spcAft>
+                <a:spcPts val="300"/>
+              </a:spcAft>
+              <a:buSzPct val="100000"/>
+              <a:buChar char="•"/>
+            </a:pPr>
+            <a:r>
+              <a:rPr lang="en-US" sz="1200" dirty="0">
+                <a:solidFill>
+                  <a:srgbClr val="1C2833"/>
+                </a:solidFill>
+                <a:latin typeface="Arial" pitchFamily="34" charset="0"/>
+                <a:ea typeface="Arial" pitchFamily="34" charset="-122"/>
+                <a:cs typeface="Arial" pitchFamily="34" charset="-120"/>
+              </a:rPr>
+              <a:t>Discussion: </a:t>
+            </a:r>
+            <a:pPr algn="l" indent="0" marL="0">
+              <a:lnSpc>
+                <a:spcPts val="1620"/>
+              </a:lnSpc>
               <a:spcAft>
                 <a:spcPts val="300"/>
               </a:spcAft>
@@ -3083,15 +3585,56 @@
                 <a:ea typeface="Arial" pitchFamily="34" charset="-122"/>
                 <a:cs typeface="Arial" pitchFamily="34" charset="-120"/>
               </a:rPr>
-              <a:t>"What if the problem is </a:t>
-            </a:r>
-            <a:pPr algn="l" indent="0" marL="0">
-              <a:lnSpc>
-                <a:spcPts val="1680"/>
-              </a:lnSpc>
-              <a:spcBef>
-                <a:spcPts val="300"/>
-              </a:spcBef>
+              <a:t>"When does Nikhilam beat standard borrowing? When does standard borrowing match it?"</a:t>
+            </a:r>
+            <a:pPr algn="l" indent="0" marL="0">
+              <a:lnSpc>
+                <a:spcPts val="1620"/>
+              </a:lnSpc>
+              <a:spcAft>
+                <a:spcPts val="300"/>
+              </a:spcAft>
+              <a:buNone/>
+            </a:pPr>
+            <a:r>
+              <a:rPr lang="en-US" sz="1200" dirty="0">
+                <a:solidFill>
+                  <a:srgbClr val="1C2833"/>
+                </a:solidFill>
+                <a:latin typeface="Arial" pitchFamily="34" charset="0"/>
+                <a:ea typeface="Arial" pitchFamily="34" charset="-122"/>
+                <a:cs typeface="Arial" pitchFamily="34" charset="-120"/>
+              </a:rPr>
+              <a:t> (Answer: Nikhilam dominates when subtracting from a round base; matches roughly when subtracting from a non-round number — that's the Day 8 topic.)</a:t>
+            </a:r>
+            <a:endParaRPr lang="en-US" sz="1200" dirty="0"/>
+          </a:p>
+          <a:p>
+            <a:pPr algn="l" marL="342900" indent="-342900">
+              <a:lnSpc>
+                <a:spcPts val="1620"/>
+              </a:lnSpc>
+              <a:spcAft>
+                <a:spcPts val="300"/>
+              </a:spcAft>
+              <a:buSzPct val="100000"/>
+              <a:buChar char="•"/>
+            </a:pPr>
+            <a:r>
+              <a:rPr lang="en-US" sz="1200" dirty="0">
+                <a:solidFill>
+                  <a:srgbClr val="1C2833"/>
+                </a:solidFill>
+                <a:latin typeface="Arial" pitchFamily="34" charset="0"/>
+                <a:ea typeface="Arial" pitchFamily="34" charset="-122"/>
+                <a:cs typeface="Arial" pitchFamily="34" charset="-120"/>
+              </a:rPr>
+              <a:t>Preview Day 5: </a:t>
+            </a:r>
+            <a:pPr algn="l" indent="0" marL="0">
+              <a:lnSpc>
+                <a:spcPts val="1620"/>
+              </a:lnSpc>
               <a:spcAft>
                 <a:spcPts val="300"/>
               </a:spcAft>
@@ -3106,191 +3649,7 @@
                 <a:ea typeface="Arial" pitchFamily="34" charset="-122"/>
                 <a:cs typeface="Arial" pitchFamily="34" charset="-120"/>
               </a:rPr>
-              <a:t>9999 − 567</a:t>
-            </a:r>
-            <a:pPr algn="l" indent="0" marL="0">
-              <a:lnSpc>
-                <a:spcPts val="1680"/>
-              </a:lnSpc>
-              <a:spcBef>
-                <a:spcPts val="300"/>
-              </a:spcBef>
-              <a:spcAft>
-                <a:spcPts val="300"/>
-              </a:spcAft>
-              <a:buNone/>
-            </a:pPr>
-            <a:r>
-              <a:rPr lang="en-US" sz="1200" i="1" dirty="0">
-                <a:solidFill>
-                  <a:srgbClr val="1C2833"/>
-                </a:solidFill>
-                <a:latin typeface="Arial" pitchFamily="34" charset="0"/>
-                <a:ea typeface="Arial" pitchFamily="34" charset="-122"/>
-                <a:cs typeface="Arial" pitchFamily="34" charset="-120"/>
-              </a:rPr>
-              <a:t>? Does it still work?"</a:t>
-            </a:r>
-            <a:pPr algn="l" indent="0" marL="0">
-              <a:lnSpc>
-                <a:spcPts val="1680"/>
-              </a:lnSpc>
-              <a:spcBef>
-                <a:spcPts val="300"/>
-              </a:spcBef>
-              <a:spcAft>
-                <a:spcPts val="300"/>
-              </a:spcAft>
-              <a:buNone/>
-            </a:pPr>
-            <a:r>
-              <a:rPr lang="en-US" sz="1200" dirty="0">
-                <a:solidFill>
-                  <a:srgbClr val="1C2833"/>
-                </a:solidFill>
-                <a:latin typeface="Arial" pitchFamily="34" charset="0"/>
-                <a:ea typeface="Arial" pitchFamily="34" charset="-122"/>
-                <a:cs typeface="Arial" pitchFamily="34" charset="-120"/>
-              </a:rPr>
-              <a:t> Answer: yes, but without the "last from 10" — the answer is </a:t>
-            </a:r>
-            <a:pPr algn="l" indent="0" marL="0">
-              <a:lnSpc>
-                <a:spcPts val="1680"/>
-              </a:lnSpc>
-              <a:spcBef>
-                <a:spcPts val="300"/>
-              </a:spcBef>
-              <a:spcAft>
-                <a:spcPts val="300"/>
-              </a:spcAft>
-              <a:buNone/>
-            </a:pPr>
-            <a:r>
-              <a:rPr lang="en-US" sz="1200" dirty="0">
-                <a:solidFill>
-                  <a:srgbClr val="1C2833"/>
-                </a:solidFill>
-                <a:latin typeface="Arial" pitchFamily="34" charset="0"/>
-                <a:ea typeface="Arial" pitchFamily="34" charset="-122"/>
-                <a:cs typeface="Arial" pitchFamily="34" charset="-120"/>
-              </a:rPr>
-              <a:t>9999 − 567</a:t>
-            </a:r>
-            <a:pPr algn="l" indent="0" marL="0">
-              <a:lnSpc>
-                <a:spcPts val="1680"/>
-              </a:lnSpc>
-              <a:spcBef>
-                <a:spcPts val="300"/>
-              </a:spcBef>
-              <a:spcAft>
-                <a:spcPts val="300"/>
-              </a:spcAft>
-              <a:buNone/>
-            </a:pPr>
-            <a:r>
-              <a:rPr lang="en-US" sz="1200" dirty="0">
-                <a:solidFill>
-                  <a:srgbClr val="1C2833"/>
-                </a:solidFill>
-                <a:latin typeface="Arial" pitchFamily="34" charset="0"/>
-                <a:ea typeface="Arial" pitchFamily="34" charset="-122"/>
-                <a:cs typeface="Arial" pitchFamily="34" charset="-120"/>
-              </a:rPr>
-              <a:t>, computed digit-wise as 9-5, 9-6, 9-7 = 432. Try it: 567 + 432 = 999. ✓. So </a:t>
-            </a:r>
-            <a:pPr algn="l" indent="0" marL="0">
-              <a:lnSpc>
-                <a:spcPts val="1680"/>
-              </a:lnSpc>
-              <a:spcBef>
-                <a:spcPts val="300"/>
-              </a:spcBef>
-              <a:spcAft>
-                <a:spcPts val="300"/>
-              </a:spcAft>
-              <a:buNone/>
-            </a:pPr>
-            <a:r>
-              <a:rPr lang="en-US" sz="1200" dirty="0">
-                <a:solidFill>
-                  <a:srgbClr val="1C2833"/>
-                </a:solidFill>
-                <a:latin typeface="Arial" pitchFamily="34" charset="0"/>
-                <a:ea typeface="Arial" pitchFamily="34" charset="-122"/>
-                <a:cs typeface="Arial" pitchFamily="34" charset="-120"/>
-              </a:rPr>
-              <a:t>9999 − 567 = 9432</a:t>
-            </a:r>
-            <a:pPr algn="l" indent="0" marL="0">
-              <a:lnSpc>
-                <a:spcPts val="1680"/>
-              </a:lnSpc>
-              <a:spcBef>
-                <a:spcPts val="300"/>
-              </a:spcBef>
-              <a:spcAft>
-                <a:spcPts val="300"/>
-              </a:spcAft>
-              <a:buNone/>
-            </a:pPr>
-            <a:r>
-              <a:rPr lang="en-US" sz="1200" dirty="0">
-                <a:solidFill>
-                  <a:srgbClr val="1C2833"/>
-                </a:solidFill>
-                <a:latin typeface="Arial" pitchFamily="34" charset="0"/>
-                <a:ea typeface="Arial" pitchFamily="34" charset="-122"/>
-                <a:cs typeface="Arial" pitchFamily="34" charset="-120"/>
-              </a:rPr>
-              <a:t>. This is the special case where ALL digits are "from 9" (because there's no "+1" needed when the base is </a:t>
-            </a:r>
-            <a:pPr algn="l" indent="0" marL="0">
-              <a:lnSpc>
-                <a:spcPts val="1680"/>
-              </a:lnSpc>
-              <a:spcBef>
-                <a:spcPts val="300"/>
-              </a:spcBef>
-              <a:spcAft>
-                <a:spcPts val="300"/>
-              </a:spcAft>
-              <a:buNone/>
-            </a:pPr>
-            <a:r>
-              <a:rPr lang="en-US" sz="1200" dirty="0">
-                <a:solidFill>
-                  <a:srgbClr val="1C2833"/>
-                </a:solidFill>
-                <a:latin typeface="Arial" pitchFamily="34" charset="0"/>
-                <a:ea typeface="Arial" pitchFamily="34" charset="-122"/>
-                <a:cs typeface="Arial" pitchFamily="34" charset="-120"/>
-              </a:rPr>
-              <a:t>10ⁿ − 1</a:t>
-            </a:r>
-            <a:pPr algn="l" indent="0" marL="0">
-              <a:lnSpc>
-                <a:spcPts val="1680"/>
-              </a:lnSpc>
-              <a:spcBef>
-                <a:spcPts val="300"/>
-              </a:spcBef>
-              <a:spcAft>
-                <a:spcPts val="300"/>
-              </a:spcAft>
-              <a:buNone/>
-            </a:pPr>
-            <a:r>
-              <a:rPr lang="en-US" sz="1200" dirty="0">
-                <a:solidFill>
-                  <a:srgbClr val="1C2833"/>
-                </a:solidFill>
-                <a:latin typeface="Arial" pitchFamily="34" charset="0"/>
-                <a:ea typeface="Arial" pitchFamily="34" charset="-122"/>
-                <a:cs typeface="Arial" pitchFamily="34" charset="-120"/>
-              </a:rPr>
-              <a:t>). Good for Tier-up. – Avoid letting students treat the method as a black box. Insist they verify at least one of their answers by adding.</a:t>
+              <a:t>"Tomorrow — mid-module retest of the Day 1 baseline. Same problem. Different speed."</a:t>
             </a:r>
             <a:endParaRPr lang="en-US" sz="1200" dirty="0"/>
           </a:p>
@@ -3448,7 +3807,7 @@
                 <a:ea typeface="Georgia" pitchFamily="34" charset="-122"/>
                 <a:cs typeface="Georgia" pitchFamily="34" charset="-120"/>
               </a:rPr>
-              <a:t>Citation(s) used in this lesson</a:t>
+              <a:t>Student-facing content</a:t>
             </a:r>
             <a:endParaRPr lang="en-US" sz="1800" dirty="0"/>
           </a:p>
@@ -3462,8 +3821,61 @@
         </p:nvSpPr>
         <p:spPr>
           <a:xfrm>
-            <a:off x="406301" y="870942"/>
-            <a:ext cx="8498026" cy="213271"/>
+            <a:off x="406301" y="883593"/>
+            <a:ext cx="8331398" cy="2245519"/>
+          </a:xfrm>
+          <a:prstGeom prst="rect">
+            <a:avLst/>
+          </a:prstGeom>
+          <a:solidFill>
+            <a:srgbClr val="F4F8F9"/>
+          </a:solidFill>
+          <a:ln/>
+        </p:spPr>
+        <p:txBody>
+          <a:bodyPr wrap="square" rtlCol="0" anchor="ctr"/>
+          <a:lstStyle/>
+          <a:p>
+            <a:pPr indent="0" marL="0">
+              <a:buNone/>
+            </a:pPr>
+            <a:endParaRPr lang="en-US" dirty="0"/>
+          </a:p>
+        </p:txBody>
+      </p:sp>
+      <p:sp>
+        <p:nvSpPr>
+          <p:cNvPr id="5" name="Shape 3"/>
+          <p:cNvSpPr/>
+          <p:nvPr/>
+        </p:nvSpPr>
+        <p:spPr>
+          <a:xfrm>
+            <a:off x="434876" y="883593"/>
+            <a:ext cx="0" cy="2245519"/>
+          </a:xfrm>
+          <a:prstGeom prst="line">
+            <a:avLst/>
+          </a:prstGeom>
+          <a:noFill/>
+          <a:ln w="57150">
+            <a:solidFill>
+              <a:srgbClr val="FE4447"/>
+            </a:solidFill>
+            <a:prstDash val="solid"/>
+          </a:ln>
+        </p:spPr>
+      </p:sp>
+      <p:sp>
+        <p:nvSpPr>
+          <p:cNvPr id="6" name="Text 4"/>
+          <p:cNvSpPr/>
+          <p:nvPr/>
+        </p:nvSpPr>
+        <p:spPr>
+          <a:xfrm>
+            <a:off x="692051" y="1074093"/>
+            <a:ext cx="7973389" cy="230981"/>
           </a:xfrm>
           <a:prstGeom prst="rect">
             <a:avLst/>
@@ -3477,6 +3889,434 @@
           <a:p>
             <a:pPr algn="l" indent="0" marL="0">
               <a:lnSpc>
+                <a:spcPts val="1820"/>
+              </a:lnSpc>
+              <a:spcBef>
+                <a:spcPts val="300"/>
+              </a:spcBef>
+              <a:spcAft>
+                <a:spcPts val="300"/>
+              </a:spcAft>
+              <a:buNone/>
+            </a:pPr>
+            <a:r>
+              <a:rPr lang="en-US" sz="1300" b="1" i="1" dirty="0">
+                <a:solidFill>
+                  <a:srgbClr val="1C2833"/>
+                </a:solidFill>
+                <a:latin typeface="Georgia" pitchFamily="34" charset="0"/>
+                <a:ea typeface="Georgia" pitchFamily="34" charset="-122"/>
+                <a:cs typeface="Georgia" pitchFamily="34" charset="-120"/>
+              </a:rPr>
+              <a:t>Subtracting from a Power of Ten</a:t>
+            </a:r>
+            <a:endParaRPr lang="en-US" sz="1300" dirty="0"/>
+          </a:p>
+        </p:txBody>
+      </p:sp>
+      <p:sp>
+        <p:nvSpPr>
+          <p:cNvPr id="7" name="Text 5"/>
+          <p:cNvSpPr/>
+          <p:nvPr/>
+        </p:nvSpPr>
+        <p:spPr>
+          <a:xfrm>
+            <a:off x="692051" y="1343174"/>
+            <a:ext cx="7973389" cy="250031"/>
+          </a:xfrm>
+          <a:prstGeom prst="rect">
+            <a:avLst/>
+          </a:prstGeom>
+          <a:noFill/>
+          <a:ln/>
+        </p:spPr>
+        <p:txBody>
+          <a:bodyPr wrap="square" lIns="0" tIns="0" rIns="0" bIns="0" rtlCol="0" anchor="t"/>
+          <a:lstStyle/>
+          <a:p>
+            <a:pPr algn="l" indent="0" marL="0">
+              <a:lnSpc>
+                <a:spcPts val="1820"/>
+              </a:lnSpc>
+              <a:spcBef>
+                <a:spcPts val="300"/>
+              </a:spcBef>
+              <a:spcAft>
+                <a:spcPts val="300"/>
+              </a:spcAft>
+              <a:buNone/>
+            </a:pPr>
+            <a:r>
+              <a:rPr lang="en-US" sz="1300" dirty="0">
+                <a:solidFill>
+                  <a:srgbClr val="1C2833"/>
+                </a:solidFill>
+                <a:latin typeface="Georgia" pitchFamily="34" charset="0"/>
+                <a:ea typeface="Georgia" pitchFamily="34" charset="-122"/>
+                <a:cs typeface="Georgia" pitchFamily="34" charset="-120"/>
+              </a:rPr>
+              <a:t>To compute </a:t>
+            </a:r>
+            <a:pPr algn="l" indent="0" marL="0">
+              <a:lnSpc>
+                <a:spcPts val="1820"/>
+              </a:lnSpc>
+              <a:spcBef>
+                <a:spcPts val="300"/>
+              </a:spcBef>
+              <a:spcAft>
+                <a:spcPts val="300"/>
+              </a:spcAft>
+              <a:buNone/>
+            </a:pPr>
+            <a:r>
+              <a:rPr lang="en-US" sz="1300" i="1" dirty="0">
+                <a:solidFill>
+                  <a:srgbClr val="1C2833"/>
+                </a:solidFill>
+                <a:latin typeface="Georgia" pitchFamily="34" charset="0"/>
+                <a:ea typeface="Georgia" pitchFamily="34" charset="-122"/>
+                <a:cs typeface="Georgia" pitchFamily="34" charset="-120"/>
+              </a:rPr>
+              <a:t>10ⁿ − A</a:t>
+            </a:r>
+            <a:pPr algn="l" indent="0" marL="0">
+              <a:lnSpc>
+                <a:spcPts val="1820"/>
+              </a:lnSpc>
+              <a:spcBef>
+                <a:spcPts val="300"/>
+              </a:spcBef>
+              <a:spcAft>
+                <a:spcPts val="300"/>
+              </a:spcAft>
+              <a:buNone/>
+            </a:pPr>
+            <a:r>
+              <a:rPr lang="en-US" sz="1300" dirty="0">
+                <a:solidFill>
+                  <a:srgbClr val="1C2833"/>
+                </a:solidFill>
+                <a:latin typeface="Georgia" pitchFamily="34" charset="0"/>
+                <a:ea typeface="Georgia" pitchFamily="34" charset="-122"/>
+                <a:cs typeface="Georgia" pitchFamily="34" charset="-120"/>
+              </a:rPr>
+              <a:t>:</a:t>
+            </a:r>
+            <a:endParaRPr lang="en-US" sz="1300" dirty="0"/>
+          </a:p>
+        </p:txBody>
+      </p:sp>
+      <p:sp>
+        <p:nvSpPr>
+          <p:cNvPr id="8" name="Text 6"/>
+          <p:cNvSpPr/>
+          <p:nvPr/>
+        </p:nvSpPr>
+        <p:spPr>
+          <a:xfrm>
+            <a:off x="692051" y="1631305"/>
+            <a:ext cx="7973389" cy="230981"/>
+          </a:xfrm>
+          <a:prstGeom prst="rect">
+            <a:avLst/>
+          </a:prstGeom>
+          <a:noFill/>
+          <a:ln/>
+        </p:spPr>
+        <p:txBody>
+          <a:bodyPr wrap="square" lIns="0" tIns="0" rIns="0" bIns="0" rtlCol="0" anchor="t"/>
+          <a:lstStyle/>
+          <a:p>
+            <a:pPr algn="l" indent="0" marL="0">
+              <a:lnSpc>
+                <a:spcPts val="1820"/>
+              </a:lnSpc>
+              <a:spcBef>
+                <a:spcPts val="300"/>
+              </a:spcBef>
+              <a:spcAft>
+                <a:spcPts val="300"/>
+              </a:spcAft>
+              <a:buNone/>
+            </a:pPr>
+            <a:r>
+              <a:rPr lang="en-US" sz="1300" i="1" dirty="0">
+                <a:solidFill>
+                  <a:srgbClr val="1C2833"/>
+                </a:solidFill>
+                <a:latin typeface="Georgia" pitchFamily="34" charset="0"/>
+                <a:ea typeface="Georgia" pitchFamily="34" charset="-122"/>
+                <a:cs typeface="Georgia" pitchFamily="34" charset="-120"/>
+              </a:rPr>
+              <a:t>Make sure A has exactly n digits (pad with leading zeros if needed).</a:t>
+            </a:r>
+            <a:endParaRPr lang="en-US" sz="1300" dirty="0"/>
+          </a:p>
+        </p:txBody>
+      </p:sp>
+      <p:sp>
+        <p:nvSpPr>
+          <p:cNvPr id="9" name="Text 7"/>
+          <p:cNvSpPr/>
+          <p:nvPr/>
+        </p:nvSpPr>
+        <p:spPr>
+          <a:xfrm>
+            <a:off x="692051" y="1900386"/>
+            <a:ext cx="7973389" cy="230981"/>
+          </a:xfrm>
+          <a:prstGeom prst="rect">
+            <a:avLst/>
+          </a:prstGeom>
+          <a:noFill/>
+          <a:ln/>
+        </p:spPr>
+        <p:txBody>
+          <a:bodyPr wrap="square" lIns="0" tIns="0" rIns="0" bIns="0" rtlCol="0" anchor="t"/>
+          <a:lstStyle/>
+          <a:p>
+            <a:pPr algn="l" indent="0" marL="0">
+              <a:lnSpc>
+                <a:spcPts val="1820"/>
+              </a:lnSpc>
+              <a:spcBef>
+                <a:spcPts val="300"/>
+              </a:spcBef>
+              <a:spcAft>
+                <a:spcPts val="300"/>
+              </a:spcAft>
+              <a:buNone/>
+            </a:pPr>
+            <a:r>
+              <a:rPr lang="en-US" sz="1300" i="1" dirty="0">
+                <a:solidFill>
+                  <a:srgbClr val="1C2833"/>
+                </a:solidFill>
+                <a:latin typeface="Georgia" pitchFamily="34" charset="0"/>
+                <a:ea typeface="Georgia" pitchFamily="34" charset="-122"/>
+                <a:cs typeface="Georgia" pitchFamily="34" charset="-120"/>
+              </a:rPr>
+              <a:t>Apply the Nikhilam rule digit-by-digit: each digit "from 9," last digit "from 10."</a:t>
+            </a:r>
+            <a:endParaRPr lang="en-US" sz="1300" dirty="0"/>
+          </a:p>
+        </p:txBody>
+      </p:sp>
+      <p:sp>
+        <p:nvSpPr>
+          <p:cNvPr id="10" name="Text 8"/>
+          <p:cNvSpPr/>
+          <p:nvPr/>
+        </p:nvSpPr>
+        <p:spPr>
+          <a:xfrm>
+            <a:off x="692051" y="2169468"/>
+            <a:ext cx="7973389" cy="230981"/>
+          </a:xfrm>
+          <a:prstGeom prst="rect">
+            <a:avLst/>
+          </a:prstGeom>
+          <a:noFill/>
+          <a:ln/>
+        </p:spPr>
+        <p:txBody>
+          <a:bodyPr wrap="square" lIns="0" tIns="0" rIns="0" bIns="0" rtlCol="0" anchor="t"/>
+          <a:lstStyle/>
+          <a:p>
+            <a:pPr algn="l" indent="0" marL="0">
+              <a:lnSpc>
+                <a:spcPts val="1820"/>
+              </a:lnSpc>
+              <a:spcBef>
+                <a:spcPts val="300"/>
+              </a:spcBef>
+              <a:spcAft>
+                <a:spcPts val="300"/>
+              </a:spcAft>
+              <a:buNone/>
+            </a:pPr>
+            <a:r>
+              <a:rPr lang="en-US" sz="1300" i="1" dirty="0">
+                <a:solidFill>
+                  <a:srgbClr val="1C2833"/>
+                </a:solidFill>
+                <a:latin typeface="Georgia" pitchFamily="34" charset="0"/>
+                <a:ea typeface="Georgia" pitchFamily="34" charset="-122"/>
+                <a:cs typeface="Georgia" pitchFamily="34" charset="-120"/>
+              </a:rPr>
+              <a:t>Read off the answer.</a:t>
+            </a:r>
+            <a:endParaRPr lang="en-US" sz="1300" dirty="0"/>
+          </a:p>
+        </p:txBody>
+      </p:sp>
+      <p:sp>
+        <p:nvSpPr>
+          <p:cNvPr id="11" name="Text 9"/>
+          <p:cNvSpPr/>
+          <p:nvPr/>
+        </p:nvSpPr>
+        <p:spPr>
+          <a:xfrm>
+            <a:off x="692051" y="2438549"/>
+            <a:ext cx="7973389" cy="230981"/>
+          </a:xfrm>
+          <a:prstGeom prst="rect">
+            <a:avLst/>
+          </a:prstGeom>
+          <a:noFill/>
+          <a:ln/>
+        </p:spPr>
+        <p:txBody>
+          <a:bodyPr wrap="square" lIns="0" tIns="0" rIns="0" bIns="0" rtlCol="0" anchor="t"/>
+          <a:lstStyle/>
+          <a:p>
+            <a:pPr algn="l" indent="0" marL="0">
+              <a:lnSpc>
+                <a:spcPts val="1820"/>
+              </a:lnSpc>
+              <a:spcBef>
+                <a:spcPts val="300"/>
+              </a:spcBef>
+              <a:spcAft>
+                <a:spcPts val="300"/>
+              </a:spcAft>
+              <a:buNone/>
+            </a:pPr>
+            <a:r>
+              <a:rPr lang="en-US" sz="1300" i="1" dirty="0">
+                <a:solidFill>
+                  <a:srgbClr val="1C2833"/>
+                </a:solidFill>
+                <a:latin typeface="Georgia" pitchFamily="34" charset="0"/>
+                <a:ea typeface="Georgia" pitchFamily="34" charset="-122"/>
+                <a:cs typeface="Georgia" pitchFamily="34" charset="-120"/>
+              </a:rPr>
+              <a:t>No borrowing required. Verify by adding: original + answer = base.</a:t>
+            </a:r>
+            <a:endParaRPr lang="en-US" sz="1300" dirty="0"/>
+          </a:p>
+        </p:txBody>
+      </p:sp>
+      <p:sp>
+        <p:nvSpPr>
+          <p:cNvPr id="12" name="Text 10"/>
+          <p:cNvSpPr/>
+          <p:nvPr/>
+        </p:nvSpPr>
+        <p:spPr>
+          <a:xfrm>
+            <a:off x="692051" y="2707630"/>
+            <a:ext cx="7973389" cy="230981"/>
+          </a:xfrm>
+          <a:prstGeom prst="rect">
+            <a:avLst/>
+          </a:prstGeom>
+          <a:noFill/>
+          <a:ln/>
+        </p:spPr>
+        <p:txBody>
+          <a:bodyPr wrap="square" lIns="0" tIns="0" rIns="0" bIns="0" rtlCol="0" anchor="t"/>
+          <a:lstStyle/>
+          <a:p>
+            <a:pPr algn="l" indent="0" marL="0">
+              <a:lnSpc>
+                <a:spcPts val="1820"/>
+              </a:lnSpc>
+              <a:spcBef>
+                <a:spcPts val="300"/>
+              </a:spcBef>
+              <a:spcAft>
+                <a:spcPts val="300"/>
+              </a:spcAft>
+              <a:buNone/>
+            </a:pPr>
+            <a:r>
+              <a:rPr lang="en-US" sz="1300" dirty="0">
+                <a:solidFill>
+                  <a:srgbClr val="1C2833"/>
+                </a:solidFill>
+                <a:latin typeface="Georgia" pitchFamily="34" charset="0"/>
+                <a:ea typeface="Georgia" pitchFamily="34" charset="-122"/>
+                <a:cs typeface="Georgia" pitchFamily="34" charset="-120"/>
+              </a:rPr>
+              <a:t>&gt; Tirthaji's sūtra (1965): </a:t>
+            </a:r>
+            <a:pPr algn="l" indent="0" marL="0">
+              <a:lnSpc>
+                <a:spcPts val="1820"/>
+              </a:lnSpc>
+              <a:spcBef>
+                <a:spcPts val="300"/>
+              </a:spcBef>
+              <a:spcAft>
+                <a:spcPts val="300"/>
+              </a:spcAft>
+              <a:buNone/>
+            </a:pPr>
+            <a:r>
+              <a:rPr lang="en-US" sz="1300" i="1" dirty="0">
+                <a:solidFill>
+                  <a:srgbClr val="1C2833"/>
+                </a:solidFill>
+                <a:latin typeface="Georgia" pitchFamily="34" charset="0"/>
+                <a:ea typeface="Georgia" pitchFamily="34" charset="-122"/>
+                <a:cs typeface="Georgia" pitchFamily="34" charset="-120"/>
+              </a:rPr>
+              <a:t>Nikhilaṁ Navataścaramaṁ Daśataḥ.</a:t>
+            </a:r>
+            <a:pPr algn="l" indent="0" marL="0">
+              <a:lnSpc>
+                <a:spcPts val="1820"/>
+              </a:lnSpc>
+              <a:spcBef>
+                <a:spcPts val="300"/>
+              </a:spcBef>
+              <a:spcAft>
+                <a:spcPts val="300"/>
+              </a:spcAft>
+              <a:buNone/>
+            </a:pPr>
+            <a:r>
+              <a:rPr lang="en-US" sz="1300" dirty="0">
+                <a:solidFill>
+                  <a:srgbClr val="1C2833"/>
+                </a:solidFill>
+                <a:latin typeface="Georgia" pitchFamily="34" charset="0"/>
+                <a:ea typeface="Georgia" pitchFamily="34" charset="-122"/>
+                <a:cs typeface="Georgia" pitchFamily="34" charset="-120"/>
+              </a:rPr>
+              <a:t> Six words; an entire subtraction shortcut.</a:t>
+            </a:r>
+            <a:endParaRPr lang="en-US" sz="1300" dirty="0"/>
+          </a:p>
+        </p:txBody>
+      </p:sp>
+      <p:sp>
+        <p:nvSpPr>
+          <p:cNvPr id="13" name="Text 11"/>
+          <p:cNvSpPr/>
+          <p:nvPr/>
+        </p:nvSpPr>
+        <p:spPr>
+          <a:xfrm>
+            <a:off x="406301" y="4434929"/>
+            <a:ext cx="8498026" cy="213271"/>
+          </a:xfrm>
+          <a:prstGeom prst="rect">
+            <a:avLst/>
+          </a:prstGeom>
+          <a:noFill/>
+          <a:ln/>
+        </p:spPr>
+        <p:txBody>
+          <a:bodyPr wrap="square" lIns="0" tIns="0" rIns="0" bIns="0" rtlCol="0" anchor="t"/>
+          <a:lstStyle/>
+          <a:p>
+            <a:pPr algn="l" indent="0" marL="0">
+              <a:lnSpc>
                 <a:spcPts val="1680"/>
               </a:lnSpc>
               <a:spcBef>
@@ -3496,16 +4336,193 @@
                 <a:ea typeface="Arial" pitchFamily="34" charset="-122"/>
                 <a:cs typeface="Arial" pitchFamily="34" charset="-120"/>
               </a:rPr>
-              <a:t>– Tirthaji, </a:t>
-            </a:r>
-            <a:pPr algn="l" indent="0" marL="0">
-              <a:lnSpc>
-                <a:spcPts val="1680"/>
+              <a:t>Middle ·  · IKS Curriculum</a:t>
+            </a:r>
+            <a:endParaRPr lang="en-US" sz="1200" dirty="0"/>
+          </a:p>
+        </p:txBody>
+      </p:sp>
+    </p:spTree>
+  </p:cSld>
+  <p:clrMapOvr>
+    <a:masterClrMapping/>
+  </p:clrMapOvr>
+</p:sld>
+</file>
+
+<file path=ppt/slides/slide14.xml><?xml version="1.0" encoding="utf-8"?>
+<p:sld xmlns:a="http://schemas.openxmlformats.org/drawingml/2006/main" xmlns:r="http://schemas.openxmlformats.org/officeDocument/2006/relationships" xmlns:p="http://schemas.openxmlformats.org/presentationml/2006/main">
+  <p:cSld name="Slide 14">
+    <p:bg>
+      <p:bgPr>
+        <a:solidFill>
+          <a:srgbClr val="FFFFFF"/>
+        </a:solidFill>
+      </p:bgPr>
+    </p:bg>
+    <p:spTree>
+      <p:nvGrpSpPr>
+        <p:cNvPr id="1" name=""/>
+        <p:cNvGrpSpPr/>
+        <p:nvPr/>
+      </p:nvGrpSpPr>
+      <p:grpSpPr>
+        <a:xfrm>
+          <a:off x="0" y="0"/>
+          <a:ext cx="0" cy="0"/>
+          <a:chOff x="0" y="0"/>
+          <a:chExt cx="0" cy="0"/>
+        </a:xfrm>
+      </p:grpSpPr>
+      <p:sp>
+        <p:nvSpPr>
+          <p:cNvPr id="2" name="Text 0"/>
+          <p:cNvSpPr/>
+          <p:nvPr/>
+        </p:nvSpPr>
+        <p:spPr>
+          <a:xfrm>
+            <a:off x="0" y="0"/>
+            <a:ext cx="9144000" cy="101501"/>
+          </a:xfrm>
+          <a:prstGeom prst="rect">
+            <a:avLst/>
+          </a:prstGeom>
+          <a:solidFill>
+            <a:srgbClr val="277884"/>
+          </a:solidFill>
+          <a:ln/>
+        </p:spPr>
+        <p:txBody>
+          <a:bodyPr wrap="square" rtlCol="0" anchor="ctr"/>
+          <a:lstStyle/>
+          <a:p>
+            <a:pPr indent="0" marL="0">
+              <a:buNone/>
+            </a:pPr>
+            <a:endParaRPr lang="en-US" dirty="0"/>
+          </a:p>
+        </p:txBody>
+      </p:sp>
+      <p:sp>
+        <p:nvSpPr>
+          <p:cNvPr id="3" name="Text 1"/>
+          <p:cNvSpPr/>
+          <p:nvPr/>
+        </p:nvSpPr>
+        <p:spPr>
+          <a:xfrm>
+            <a:off x="406301" y="457051"/>
+            <a:ext cx="8498026" cy="274290"/>
+          </a:xfrm>
+          <a:prstGeom prst="rect">
+            <a:avLst/>
+          </a:prstGeom>
+          <a:noFill/>
+          <a:ln/>
+        </p:spPr>
+        <p:txBody>
+          <a:bodyPr wrap="square" lIns="0" tIns="0" rIns="0" bIns="0" rtlCol="0" anchor="t"/>
+          <a:lstStyle/>
+          <a:p>
+            <a:pPr algn="l" indent="0" marL="0">
+              <a:lnSpc>
+                <a:spcPts val="2160"/>
               </a:lnSpc>
               <a:spcBef>
-                <a:spcPts val="300"/>
+                <a:spcPts val="600"/>
               </a:spcBef>
               <a:spcAft>
+                <a:spcPts val="800"/>
+              </a:spcAft>
+              <a:buNone/>
+            </a:pPr>
+            <a:r>
+              <a:rPr lang="en-US" sz="1800" b="1" dirty="0">
+                <a:solidFill>
+                  <a:srgbClr val="FE4447"/>
+                </a:solidFill>
+                <a:latin typeface="Georgia" pitchFamily="34" charset="0"/>
+                <a:ea typeface="Georgia" pitchFamily="34" charset="-122"/>
+                <a:cs typeface="Georgia" pitchFamily="34" charset="-120"/>
+              </a:rPr>
+              <a:t>Homework</a:t>
+            </a:r>
+            <a:endParaRPr lang="en-US" sz="1800" dirty="0"/>
+          </a:p>
+        </p:txBody>
+      </p:sp>
+      <p:sp>
+        <p:nvSpPr>
+          <p:cNvPr id="4" name="Text 2"/>
+          <p:cNvSpPr/>
+          <p:nvPr/>
+        </p:nvSpPr>
+        <p:spPr>
+          <a:xfrm>
+            <a:off x="634901" y="883593"/>
+            <a:ext cx="8102798" cy="525661"/>
+          </a:xfrm>
+          <a:prstGeom prst="rect">
+            <a:avLst/>
+          </a:prstGeom>
+          <a:noFill/>
+          <a:ln/>
+        </p:spPr>
+        <p:txBody>
+          <a:bodyPr wrap="square" lIns="0" tIns="0" rIns="0" bIns="0" rtlCol="0" anchor="t"/>
+          <a:lstStyle/>
+          <a:p>
+            <a:pPr algn="l" marL="342900" indent="-342900">
+              <a:lnSpc>
+                <a:spcPts val="1620"/>
+              </a:lnSpc>
+              <a:spcAft>
+                <a:spcPts val="300"/>
+              </a:spcAft>
+              <a:buSzPct val="100000"/>
+              <a:buChar char="•"/>
+            </a:pPr>
+            <a:r>
+              <a:rPr lang="en-US" sz="1200" dirty="0">
+                <a:solidFill>
+                  <a:srgbClr val="1C2833"/>
+                </a:solidFill>
+                <a:latin typeface="Arial" pitchFamily="34" charset="0"/>
+                <a:ea typeface="Arial" pitchFamily="34" charset="-122"/>
+                <a:cs typeface="Arial" pitchFamily="34" charset="-120"/>
+              </a:rPr>
+              <a:t>12 problems on the back of today's worksheet. Time yourself. Try to finish all 12 in under 4 minutes.</a:t>
+            </a:r>
+            <a:endParaRPr lang="en-US" sz="1200" dirty="0"/>
+          </a:p>
+          <a:p>
+            <a:pPr algn="l" marL="342900" indent="-342900">
+              <a:lnSpc>
+                <a:spcPts val="1620"/>
+              </a:lnSpc>
+              <a:spcAft>
+                <a:spcPts val="300"/>
+              </a:spcAft>
+              <a:buSzPct val="100000"/>
+              <a:buChar char="•"/>
+            </a:pPr>
+            <a:r>
+              <a:rPr lang="en-US" sz="1200" dirty="0">
+                <a:solidFill>
+                  <a:srgbClr val="1C2833"/>
+                </a:solidFill>
+                <a:latin typeface="Arial" pitchFamily="34" charset="0"/>
+                <a:ea typeface="Arial" pitchFamily="34" charset="-122"/>
+                <a:cs typeface="Arial" pitchFamily="34" charset="-120"/>
+              </a:rPr>
+              <a:t>One reflection sentence: </a:t>
+            </a:r>
+            <a:pPr algn="l" indent="0" marL="0">
+              <a:lnSpc>
+                <a:spcPts val="1620"/>
+              </a:lnSpc>
+              <a:spcAft>
                 <a:spcPts val="300"/>
               </a:spcAft>
               <a:buNone/>
@@ -3519,30 +4536,7 @@
                 <a:ea typeface="Arial" pitchFamily="34" charset="-122"/>
                 <a:cs typeface="Arial" pitchFamily="34" charset="-120"/>
               </a:rPr>
-              <a:t>Vedic Mathematics</a:t>
-            </a:r>
-            <a:pPr algn="l" indent="0" marL="0">
-              <a:lnSpc>
-                <a:spcPts val="1680"/>
-              </a:lnSpc>
-              <a:spcBef>
-                <a:spcPts val="300"/>
-              </a:spcBef>
-              <a:spcAft>
-                <a:spcPts val="300"/>
-              </a:spcAft>
-              <a:buNone/>
-            </a:pPr>
-            <a:r>
-              <a:rPr lang="en-US" sz="1200" dirty="0">
-                <a:solidFill>
-                  <a:srgbClr val="1C2833"/>
-                </a:solidFill>
-                <a:latin typeface="Arial" pitchFamily="34" charset="0"/>
-                <a:ea typeface="Arial" pitchFamily="34" charset="-122"/>
-                <a:cs typeface="Arial" pitchFamily="34" charset="-120"/>
-              </a:rPr>
-              <a:t> (1965), sūtra Nikhilam (#2).</a:t>
+              <a:t>"How did the Nikhilam method feel today compared to Day 1?"</a:t>
             </a:r>
             <a:endParaRPr lang="en-US" sz="1200" dirty="0"/>
           </a:p>
@@ -3556,8 +4550,8 @@
         </p:nvSpPr>
         <p:spPr>
           <a:xfrm>
-            <a:off x="634901" y="1173063"/>
-            <a:ext cx="8102798" cy="281880"/>
+            <a:off x="406301" y="4434929"/>
+            <a:ext cx="8498026" cy="213271"/>
           </a:xfrm>
           <a:prstGeom prst="rect">
             <a:avLst/>
@@ -3569,6 +4563,164 @@
           <a:bodyPr wrap="square" lIns="0" tIns="0" rIns="0" bIns="0" rtlCol="0" anchor="t"/>
           <a:lstStyle/>
           <a:p>
+            <a:pPr algn="l" indent="0" marL="0">
+              <a:lnSpc>
+                <a:spcPts val="1680"/>
+              </a:lnSpc>
+              <a:spcBef>
+                <a:spcPts val="300"/>
+              </a:spcBef>
+              <a:spcAft>
+                <a:spcPts val="300"/>
+              </a:spcAft>
+              <a:buNone/>
+            </a:pPr>
+            <a:r>
+              <a:rPr lang="en-US" sz="1200" dirty="0">
+                <a:solidFill>
+                  <a:srgbClr val="1C2833"/>
+                </a:solidFill>
+                <a:latin typeface="Arial" pitchFamily="34" charset="0"/>
+                <a:ea typeface="Arial" pitchFamily="34" charset="-122"/>
+                <a:cs typeface="Arial" pitchFamily="34" charset="-120"/>
+              </a:rPr>
+              <a:t>Middle ·  · IKS Curriculum</a:t>
+            </a:r>
+            <a:endParaRPr lang="en-US" sz="1200" dirty="0"/>
+          </a:p>
+        </p:txBody>
+      </p:sp>
+    </p:spTree>
+  </p:cSld>
+  <p:clrMapOvr>
+    <a:masterClrMapping/>
+  </p:clrMapOvr>
+</p:sld>
+</file>
+
+<file path=ppt/slides/slide15.xml><?xml version="1.0" encoding="utf-8"?>
+<p:sld xmlns:a="http://schemas.openxmlformats.org/drawingml/2006/main" xmlns:r="http://schemas.openxmlformats.org/officeDocument/2006/relationships" xmlns:p="http://schemas.openxmlformats.org/presentationml/2006/main">
+  <p:cSld name="Slide 15">
+    <p:bg>
+      <p:bgPr>
+        <a:solidFill>
+          <a:srgbClr val="FFFFFF"/>
+        </a:solidFill>
+      </p:bgPr>
+    </p:bg>
+    <p:spTree>
+      <p:nvGrpSpPr>
+        <p:cNvPr id="1" name=""/>
+        <p:cNvGrpSpPr/>
+        <p:nvPr/>
+      </p:nvGrpSpPr>
+      <p:grpSpPr>
+        <a:xfrm>
+          <a:off x="0" y="0"/>
+          <a:ext cx="0" cy="0"/>
+          <a:chOff x="0" y="0"/>
+          <a:chExt cx="0" cy="0"/>
+        </a:xfrm>
+      </p:grpSpPr>
+      <p:sp>
+        <p:nvSpPr>
+          <p:cNvPr id="2" name="Text 0"/>
+          <p:cNvSpPr/>
+          <p:nvPr/>
+        </p:nvSpPr>
+        <p:spPr>
+          <a:xfrm>
+            <a:off x="0" y="0"/>
+            <a:ext cx="9144000" cy="101501"/>
+          </a:xfrm>
+          <a:prstGeom prst="rect">
+            <a:avLst/>
+          </a:prstGeom>
+          <a:solidFill>
+            <a:srgbClr val="277884"/>
+          </a:solidFill>
+          <a:ln/>
+        </p:spPr>
+        <p:txBody>
+          <a:bodyPr wrap="square" rtlCol="0" anchor="ctr"/>
+          <a:lstStyle/>
+          <a:p>
+            <a:pPr indent="0" marL="0">
+              <a:buNone/>
+            </a:pPr>
+            <a:endParaRPr lang="en-US" dirty="0"/>
+          </a:p>
+        </p:txBody>
+      </p:sp>
+      <p:sp>
+        <p:nvSpPr>
+          <p:cNvPr id="3" name="Text 1"/>
+          <p:cNvSpPr/>
+          <p:nvPr/>
+        </p:nvSpPr>
+        <p:spPr>
+          <a:xfrm>
+            <a:off x="406301" y="457051"/>
+            <a:ext cx="8498026" cy="274290"/>
+          </a:xfrm>
+          <a:prstGeom prst="rect">
+            <a:avLst/>
+          </a:prstGeom>
+          <a:noFill/>
+          <a:ln/>
+        </p:spPr>
+        <p:txBody>
+          <a:bodyPr wrap="square" lIns="0" tIns="0" rIns="0" bIns="0" rtlCol="0" anchor="t"/>
+          <a:lstStyle/>
+          <a:p>
+            <a:pPr algn="l" indent="0" marL="0">
+              <a:lnSpc>
+                <a:spcPts val="2160"/>
+              </a:lnSpc>
+              <a:spcBef>
+                <a:spcPts val="600"/>
+              </a:spcBef>
+              <a:spcAft>
+                <a:spcPts val="800"/>
+              </a:spcAft>
+              <a:buNone/>
+            </a:pPr>
+            <a:r>
+              <a:rPr lang="en-US" sz="1800" b="1" dirty="0">
+                <a:solidFill>
+                  <a:srgbClr val="FE4447"/>
+                </a:solidFill>
+                <a:latin typeface="Georgia" pitchFamily="34" charset="0"/>
+                <a:ea typeface="Georgia" pitchFamily="34" charset="-122"/>
+                <a:cs typeface="Georgia" pitchFamily="34" charset="-120"/>
+              </a:rPr>
+              <a:t>Differentiation</a:t>
+            </a:r>
+            <a:endParaRPr lang="en-US" sz="1800" dirty="0"/>
+          </a:p>
+        </p:txBody>
+      </p:sp>
+      <p:sp>
+        <p:nvSpPr>
+          <p:cNvPr id="4" name="Text 2"/>
+          <p:cNvSpPr/>
+          <p:nvPr/>
+        </p:nvSpPr>
+        <p:spPr>
+          <a:xfrm>
+            <a:off x="634901" y="883593"/>
+            <a:ext cx="8102798" cy="544711"/>
+          </a:xfrm>
+          <a:prstGeom prst="rect">
+            <a:avLst/>
+          </a:prstGeom>
+          <a:noFill/>
+          <a:ln/>
+        </p:spPr>
+        <p:txBody>
+          <a:bodyPr wrap="square" lIns="0" tIns="0" rIns="0" bIns="0" rtlCol="0" anchor="t"/>
+          <a:lstStyle/>
+          <a:p>
             <a:pPr algn="l" marL="342900" indent="-342900">
               <a:lnSpc>
                 <a:spcPts val="1620"/>
@@ -3580,6 +4732,358 @@
               <a:buChar char="•"/>
             </a:pPr>
             <a:r>
+              <a:rPr lang="en-US" sz="1200" b="1" dirty="0">
+                <a:solidFill>
+                  <a:srgbClr val="1C2833"/>
+                </a:solidFill>
+                <a:latin typeface="Arial" pitchFamily="34" charset="0"/>
+                <a:ea typeface="Arial" pitchFamily="34" charset="-122"/>
+                <a:cs typeface="Arial" pitchFamily="34" charset="-120"/>
+              </a:rPr>
+              <a:t>Tier up:</a:t>
+            </a:r>
+            <a:pPr algn="l" indent="0" marL="0">
+              <a:lnSpc>
+                <a:spcPts val="1620"/>
+              </a:lnSpc>
+              <a:spcAft>
+                <a:spcPts val="300"/>
+              </a:spcAft>
+              <a:buNone/>
+            </a:pPr>
+            <a:r>
+              <a:rPr lang="en-US" sz="1200" dirty="0">
+                <a:solidFill>
+                  <a:srgbClr val="1C2833"/>
+                </a:solidFill>
+                <a:latin typeface="Arial" pitchFamily="34" charset="0"/>
+                <a:ea typeface="Arial" pitchFamily="34" charset="-122"/>
+                <a:cs typeface="Arial" pitchFamily="34" charset="-120"/>
+              </a:rPr>
+              <a:t> Mixed-base problems where the base is given symbolically. E.g. let B = 10⁶ = 1 000 000; compute B − 234 567.</a:t>
+            </a:r>
+            <a:endParaRPr lang="en-US" sz="1200" dirty="0"/>
+          </a:p>
+          <a:p>
+            <a:pPr algn="l" marL="342900" indent="-342900">
+              <a:lnSpc>
+                <a:spcPts val="1620"/>
+              </a:lnSpc>
+              <a:spcAft>
+                <a:spcPts val="300"/>
+              </a:spcAft>
+              <a:buSzPct val="100000"/>
+              <a:buChar char="•"/>
+            </a:pPr>
+            <a:r>
+              <a:rPr lang="en-US" sz="1200" b="1" dirty="0">
+                <a:solidFill>
+                  <a:srgbClr val="1C2833"/>
+                </a:solidFill>
+                <a:latin typeface="Arial" pitchFamily="34" charset="0"/>
+                <a:ea typeface="Arial" pitchFamily="34" charset="-122"/>
+                <a:cs typeface="Arial" pitchFamily="34" charset="-120"/>
+              </a:rPr>
+              <a:t>Tier down:</a:t>
+            </a:r>
+            <a:pPr algn="l" indent="0" marL="0">
+              <a:lnSpc>
+                <a:spcPts val="1620"/>
+              </a:lnSpc>
+              <a:spcAft>
+                <a:spcPts val="300"/>
+              </a:spcAft>
+              <a:buNone/>
+            </a:pPr>
+            <a:r>
+              <a:rPr lang="en-US" sz="1200" dirty="0">
+                <a:solidFill>
+                  <a:srgbClr val="1C2833"/>
+                </a:solidFill>
+                <a:latin typeface="Arial" pitchFamily="34" charset="0"/>
+                <a:ea typeface="Arial" pitchFamily="34" charset="-122"/>
+                <a:cs typeface="Arial" pitchFamily="34" charset="-120"/>
+              </a:rPr>
+              <a:t> Stick to </a:t>
+            </a:r>
+            <a:pPr algn="l" indent="0" marL="0">
+              <a:lnSpc>
+                <a:spcPts val="1620"/>
+              </a:lnSpc>
+              <a:spcAft>
+                <a:spcPts val="300"/>
+              </a:spcAft>
+              <a:buNone/>
+            </a:pPr>
+            <a:r>
+              <a:rPr lang="en-US" sz="1200" dirty="0">
+                <a:solidFill>
+                  <a:srgbClr val="1C2833"/>
+                </a:solidFill>
+                <a:latin typeface="Arial" pitchFamily="34" charset="0"/>
+                <a:ea typeface="Arial" pitchFamily="34" charset="-122"/>
+                <a:cs typeface="Arial" pitchFamily="34" charset="-120"/>
+              </a:rPr>
+              <a:t>1000 − A</a:t>
+            </a:r>
+            <a:pPr algn="l" indent="0" marL="0">
+              <a:lnSpc>
+                <a:spcPts val="1620"/>
+              </a:lnSpc>
+              <a:spcAft>
+                <a:spcPts val="300"/>
+              </a:spcAft>
+              <a:buNone/>
+            </a:pPr>
+            <a:r>
+              <a:rPr lang="en-US" sz="1200" dirty="0">
+                <a:solidFill>
+                  <a:srgbClr val="1C2833"/>
+                </a:solidFill>
+                <a:latin typeface="Arial" pitchFamily="34" charset="0"/>
+                <a:ea typeface="Arial" pitchFamily="34" charset="-122"/>
+                <a:cs typeface="Arial" pitchFamily="34" charset="-120"/>
+              </a:rPr>
+              <a:t> for the homework. Step up to 10 000 only when the 1000 case is automatic.</a:t>
+            </a:r>
+            <a:endParaRPr lang="en-US" sz="1200" dirty="0"/>
+          </a:p>
+        </p:txBody>
+      </p:sp>
+      <p:sp>
+        <p:nvSpPr>
+          <p:cNvPr id="5" name="Text 3"/>
+          <p:cNvSpPr/>
+          <p:nvPr/>
+        </p:nvSpPr>
+        <p:spPr>
+          <a:xfrm>
+            <a:off x="406301" y="4434929"/>
+            <a:ext cx="8498026" cy="213271"/>
+          </a:xfrm>
+          <a:prstGeom prst="rect">
+            <a:avLst/>
+          </a:prstGeom>
+          <a:noFill/>
+          <a:ln/>
+        </p:spPr>
+        <p:txBody>
+          <a:bodyPr wrap="square" lIns="0" tIns="0" rIns="0" bIns="0" rtlCol="0" anchor="t"/>
+          <a:lstStyle/>
+          <a:p>
+            <a:pPr algn="l" indent="0" marL="0">
+              <a:lnSpc>
+                <a:spcPts val="1680"/>
+              </a:lnSpc>
+              <a:spcBef>
+                <a:spcPts val="300"/>
+              </a:spcBef>
+              <a:spcAft>
+                <a:spcPts val="300"/>
+              </a:spcAft>
+              <a:buNone/>
+            </a:pPr>
+            <a:r>
+              <a:rPr lang="en-US" sz="1200" dirty="0">
+                <a:solidFill>
+                  <a:srgbClr val="1C2833"/>
+                </a:solidFill>
+                <a:latin typeface="Arial" pitchFamily="34" charset="0"/>
+                <a:ea typeface="Arial" pitchFamily="34" charset="-122"/>
+                <a:cs typeface="Arial" pitchFamily="34" charset="-120"/>
+              </a:rPr>
+              <a:t>Middle ·  · IKS Curriculum</a:t>
+            </a:r>
+            <a:endParaRPr lang="en-US" sz="1200" dirty="0"/>
+          </a:p>
+        </p:txBody>
+      </p:sp>
+    </p:spTree>
+  </p:cSld>
+  <p:clrMapOvr>
+    <a:masterClrMapping/>
+  </p:clrMapOvr>
+</p:sld>
+</file>
+
+<file path=ppt/slides/slide16.xml><?xml version="1.0" encoding="utf-8"?>
+<p:sld xmlns:a="http://schemas.openxmlformats.org/drawingml/2006/main" xmlns:r="http://schemas.openxmlformats.org/officeDocument/2006/relationships" xmlns:p="http://schemas.openxmlformats.org/presentationml/2006/main">
+  <p:cSld name="Slide 16">
+    <p:bg>
+      <p:bgPr>
+        <a:solidFill>
+          <a:srgbClr val="FFFFFF"/>
+        </a:solidFill>
+      </p:bgPr>
+    </p:bg>
+    <p:spTree>
+      <p:nvGrpSpPr>
+        <p:cNvPr id="1" name=""/>
+        <p:cNvGrpSpPr/>
+        <p:nvPr/>
+      </p:nvGrpSpPr>
+      <p:grpSpPr>
+        <a:xfrm>
+          <a:off x="0" y="0"/>
+          <a:ext cx="0" cy="0"/>
+          <a:chOff x="0" y="0"/>
+          <a:chExt cx="0" cy="0"/>
+        </a:xfrm>
+      </p:grpSpPr>
+      <p:sp>
+        <p:nvSpPr>
+          <p:cNvPr id="2" name="Text 0"/>
+          <p:cNvSpPr/>
+          <p:nvPr/>
+        </p:nvSpPr>
+        <p:spPr>
+          <a:xfrm>
+            <a:off x="0" y="0"/>
+            <a:ext cx="9144000" cy="101501"/>
+          </a:xfrm>
+          <a:prstGeom prst="rect">
+            <a:avLst/>
+          </a:prstGeom>
+          <a:solidFill>
+            <a:srgbClr val="277884"/>
+          </a:solidFill>
+          <a:ln/>
+        </p:spPr>
+        <p:txBody>
+          <a:bodyPr wrap="square" rtlCol="0" anchor="ctr"/>
+          <a:lstStyle/>
+          <a:p>
+            <a:pPr indent="0" marL="0">
+              <a:buNone/>
+            </a:pPr>
+            <a:endParaRPr lang="en-US" dirty="0"/>
+          </a:p>
+        </p:txBody>
+      </p:sp>
+      <p:sp>
+        <p:nvSpPr>
+          <p:cNvPr id="3" name="Text 1"/>
+          <p:cNvSpPr/>
+          <p:nvPr/>
+        </p:nvSpPr>
+        <p:spPr>
+          <a:xfrm>
+            <a:off x="406301" y="457051"/>
+            <a:ext cx="8498026" cy="274290"/>
+          </a:xfrm>
+          <a:prstGeom prst="rect">
+            <a:avLst/>
+          </a:prstGeom>
+          <a:noFill/>
+          <a:ln/>
+        </p:spPr>
+        <p:txBody>
+          <a:bodyPr wrap="square" lIns="0" tIns="0" rIns="0" bIns="0" rtlCol="0" anchor="t"/>
+          <a:lstStyle/>
+          <a:p>
+            <a:pPr algn="l" indent="0" marL="0">
+              <a:lnSpc>
+                <a:spcPts val="2160"/>
+              </a:lnSpc>
+              <a:spcBef>
+                <a:spcPts val="600"/>
+              </a:spcBef>
+              <a:spcAft>
+                <a:spcPts val="800"/>
+              </a:spcAft>
+              <a:buNone/>
+            </a:pPr>
+            <a:r>
+              <a:rPr lang="en-US" sz="1800" b="1" dirty="0">
+                <a:solidFill>
+                  <a:srgbClr val="FE4447"/>
+                </a:solidFill>
+                <a:latin typeface="Georgia" pitchFamily="34" charset="0"/>
+                <a:ea typeface="Georgia" pitchFamily="34" charset="-122"/>
+                <a:cs typeface="Georgia" pitchFamily="34" charset="-120"/>
+              </a:rPr>
+              <a:t>Teacher notes</a:t>
+            </a:r>
+            <a:endParaRPr lang="en-US" sz="1800" dirty="0"/>
+          </a:p>
+        </p:txBody>
+      </p:sp>
+      <p:sp>
+        <p:nvSpPr>
+          <p:cNvPr id="4" name="Text 2"/>
+          <p:cNvSpPr/>
+          <p:nvPr/>
+        </p:nvSpPr>
+        <p:spPr>
+          <a:xfrm>
+            <a:off x="634901" y="883593"/>
+            <a:ext cx="8102798" cy="1668363"/>
+          </a:xfrm>
+          <a:prstGeom prst="rect">
+            <a:avLst/>
+          </a:prstGeom>
+          <a:noFill/>
+          <a:ln/>
+        </p:spPr>
+        <p:txBody>
+          <a:bodyPr wrap="square" lIns="0" tIns="0" rIns="0" bIns="0" rtlCol="0" anchor="t"/>
+          <a:lstStyle/>
+          <a:p>
+            <a:pPr algn="l" marL="342900" indent="-342900">
+              <a:lnSpc>
+                <a:spcPts val="1620"/>
+              </a:lnSpc>
+              <a:spcAft>
+                <a:spcPts val="300"/>
+              </a:spcAft>
+              <a:buSzPct val="100000"/>
+              <a:buChar char="•"/>
+            </a:pPr>
+            <a:r>
+              <a:rPr lang="en-US" sz="1200" dirty="0">
+                <a:solidFill>
+                  <a:srgbClr val="1C2833"/>
+                </a:solidFill>
+                <a:latin typeface="Arial" pitchFamily="34" charset="0"/>
+                <a:ea typeface="Arial" pitchFamily="34" charset="-122"/>
+                <a:cs typeface="Arial" pitchFamily="34" charset="-120"/>
+              </a:rPr>
+              <a:t>This is the day students go "ohh — that's why we learned the complement." Make the connection explicit. The complement IS the answer when subtracting from the base.</a:t>
+            </a:r>
+            <a:endParaRPr lang="en-US" sz="1200" dirty="0"/>
+          </a:p>
+          <a:p>
+            <a:pPr algn="l" marL="342900" indent="-342900">
+              <a:lnSpc>
+                <a:spcPts val="1620"/>
+              </a:lnSpc>
+              <a:spcAft>
+                <a:spcPts val="300"/>
+              </a:spcAft>
+              <a:buSzPct val="100000"/>
+              <a:buChar char="•"/>
+            </a:pPr>
+            <a:r>
+              <a:rPr lang="en-US" sz="1200" dirty="0">
+                <a:solidFill>
+                  <a:srgbClr val="1C2833"/>
+                </a:solidFill>
+                <a:latin typeface="Arial" pitchFamily="34" charset="0"/>
+                <a:ea typeface="Arial" pitchFamily="34" charset="-122"/>
+                <a:cs typeface="Arial" pitchFamily="34" charset="-120"/>
+              </a:rPr>
+              <a:t>A student will inevitably ask: </a:t>
+            </a:r>
+            <a:pPr algn="l" indent="0" marL="0">
+              <a:lnSpc>
+                <a:spcPts val="1620"/>
+              </a:lnSpc>
+              <a:spcAft>
+                <a:spcPts val="300"/>
+              </a:spcAft>
+              <a:buNone/>
+            </a:pPr>
+            <a:r>
               <a:rPr lang="en-US" sz="1200" i="1" dirty="0">
                 <a:solidFill>
                   <a:srgbClr val="1C2833"/>
@@ -3588,6 +5092,478 @@
                 <a:ea typeface="Arial" pitchFamily="34" charset="-122"/>
                 <a:cs typeface="Arial" pitchFamily="34" charset="-120"/>
               </a:rPr>
+              <a:t>"What if the problem is </a:t>
+            </a:r>
+            <a:pPr algn="l" indent="0" marL="0">
+              <a:lnSpc>
+                <a:spcPts val="1620"/>
+              </a:lnSpc>
+              <a:spcAft>
+                <a:spcPts val="300"/>
+              </a:spcAft>
+              <a:buNone/>
+            </a:pPr>
+            <a:r>
+              <a:rPr lang="en-US" sz="1200" i="1" dirty="0">
+                <a:solidFill>
+                  <a:srgbClr val="1C2833"/>
+                </a:solidFill>
+                <a:latin typeface="Arial" pitchFamily="34" charset="0"/>
+                <a:ea typeface="Arial" pitchFamily="34" charset="-122"/>
+                <a:cs typeface="Arial" pitchFamily="34" charset="-120"/>
+              </a:rPr>
+              <a:t>9999 − 567</a:t>
+            </a:r>
+            <a:pPr algn="l" indent="0" marL="0">
+              <a:lnSpc>
+                <a:spcPts val="1620"/>
+              </a:lnSpc>
+              <a:spcAft>
+                <a:spcPts val="300"/>
+              </a:spcAft>
+              <a:buNone/>
+            </a:pPr>
+            <a:r>
+              <a:rPr lang="en-US" sz="1200" i="1" dirty="0">
+                <a:solidFill>
+                  <a:srgbClr val="1C2833"/>
+                </a:solidFill>
+                <a:latin typeface="Arial" pitchFamily="34" charset="0"/>
+                <a:ea typeface="Arial" pitchFamily="34" charset="-122"/>
+                <a:cs typeface="Arial" pitchFamily="34" charset="-120"/>
+              </a:rPr>
+              <a:t>? Does it still work?"</a:t>
+            </a:r>
+            <a:pPr algn="l" indent="0" marL="0">
+              <a:lnSpc>
+                <a:spcPts val="1620"/>
+              </a:lnSpc>
+              <a:spcAft>
+                <a:spcPts val="300"/>
+              </a:spcAft>
+              <a:buNone/>
+            </a:pPr>
+            <a:r>
+              <a:rPr lang="en-US" sz="1200" dirty="0">
+                <a:solidFill>
+                  <a:srgbClr val="1C2833"/>
+                </a:solidFill>
+                <a:latin typeface="Arial" pitchFamily="34" charset="0"/>
+                <a:ea typeface="Arial" pitchFamily="34" charset="-122"/>
+                <a:cs typeface="Arial" pitchFamily="34" charset="-120"/>
+              </a:rPr>
+              <a:t> Answer: yes, but without the "last from 10" — the answer is </a:t>
+            </a:r>
+            <a:pPr algn="l" indent="0" marL="0">
+              <a:lnSpc>
+                <a:spcPts val="1620"/>
+              </a:lnSpc>
+              <a:spcAft>
+                <a:spcPts val="300"/>
+              </a:spcAft>
+              <a:buNone/>
+            </a:pPr>
+            <a:r>
+              <a:rPr lang="en-US" sz="1200" dirty="0">
+                <a:solidFill>
+                  <a:srgbClr val="1C2833"/>
+                </a:solidFill>
+                <a:latin typeface="Arial" pitchFamily="34" charset="0"/>
+                <a:ea typeface="Arial" pitchFamily="34" charset="-122"/>
+                <a:cs typeface="Arial" pitchFamily="34" charset="-120"/>
+              </a:rPr>
+              <a:t>9999 − 567</a:t>
+            </a:r>
+            <a:pPr algn="l" indent="0" marL="0">
+              <a:lnSpc>
+                <a:spcPts val="1620"/>
+              </a:lnSpc>
+              <a:spcAft>
+                <a:spcPts val="300"/>
+              </a:spcAft>
+              <a:buNone/>
+            </a:pPr>
+            <a:r>
+              <a:rPr lang="en-US" sz="1200" dirty="0">
+                <a:solidFill>
+                  <a:srgbClr val="1C2833"/>
+                </a:solidFill>
+                <a:latin typeface="Arial" pitchFamily="34" charset="0"/>
+                <a:ea typeface="Arial" pitchFamily="34" charset="-122"/>
+                <a:cs typeface="Arial" pitchFamily="34" charset="-120"/>
+              </a:rPr>
+              <a:t>, computed digit-wise as 9-5, 9-6, 9-7 = 432. Try it: 567 + 432 = 999. ✓. So </a:t>
+            </a:r>
+            <a:pPr algn="l" indent="0" marL="0">
+              <a:lnSpc>
+                <a:spcPts val="1620"/>
+              </a:lnSpc>
+              <a:spcAft>
+                <a:spcPts val="300"/>
+              </a:spcAft>
+              <a:buNone/>
+            </a:pPr>
+            <a:r>
+              <a:rPr lang="en-US" sz="1200" dirty="0">
+                <a:solidFill>
+                  <a:srgbClr val="1C2833"/>
+                </a:solidFill>
+                <a:latin typeface="Arial" pitchFamily="34" charset="0"/>
+                <a:ea typeface="Arial" pitchFamily="34" charset="-122"/>
+                <a:cs typeface="Arial" pitchFamily="34" charset="-120"/>
+              </a:rPr>
+              <a:t>9999 − 567 = 9432</a:t>
+            </a:r>
+            <a:pPr algn="l" indent="0" marL="0">
+              <a:lnSpc>
+                <a:spcPts val="1620"/>
+              </a:lnSpc>
+              <a:spcAft>
+                <a:spcPts val="300"/>
+              </a:spcAft>
+              <a:buNone/>
+            </a:pPr>
+            <a:r>
+              <a:rPr lang="en-US" sz="1200" dirty="0">
+                <a:solidFill>
+                  <a:srgbClr val="1C2833"/>
+                </a:solidFill>
+                <a:latin typeface="Arial" pitchFamily="34" charset="0"/>
+                <a:ea typeface="Arial" pitchFamily="34" charset="-122"/>
+                <a:cs typeface="Arial" pitchFamily="34" charset="-120"/>
+              </a:rPr>
+              <a:t>. This is the special case where ALL digits are "from 9" (because there's no "+1" needed when the base is </a:t>
+            </a:r>
+            <a:pPr algn="l" indent="0" marL="0">
+              <a:lnSpc>
+                <a:spcPts val="1620"/>
+              </a:lnSpc>
+              <a:spcAft>
+                <a:spcPts val="300"/>
+              </a:spcAft>
+              <a:buNone/>
+            </a:pPr>
+            <a:r>
+              <a:rPr lang="en-US" sz="1200" dirty="0">
+                <a:solidFill>
+                  <a:srgbClr val="1C2833"/>
+                </a:solidFill>
+                <a:latin typeface="Arial" pitchFamily="34" charset="0"/>
+                <a:ea typeface="Arial" pitchFamily="34" charset="-122"/>
+                <a:cs typeface="Arial" pitchFamily="34" charset="-120"/>
+              </a:rPr>
+              <a:t>10ⁿ − 1</a:t>
+            </a:r>
+            <a:pPr algn="l" indent="0" marL="0">
+              <a:lnSpc>
+                <a:spcPts val="1620"/>
+              </a:lnSpc>
+              <a:spcAft>
+                <a:spcPts val="300"/>
+              </a:spcAft>
+              <a:buNone/>
+            </a:pPr>
+            <a:r>
+              <a:rPr lang="en-US" sz="1200" dirty="0">
+                <a:solidFill>
+                  <a:srgbClr val="1C2833"/>
+                </a:solidFill>
+                <a:latin typeface="Arial" pitchFamily="34" charset="0"/>
+                <a:ea typeface="Arial" pitchFamily="34" charset="-122"/>
+                <a:cs typeface="Arial" pitchFamily="34" charset="-120"/>
+              </a:rPr>
+              <a:t>). Good for Tier-up.</a:t>
+            </a:r>
+            <a:endParaRPr lang="en-US" sz="1200" dirty="0"/>
+          </a:p>
+          <a:p>
+            <a:pPr algn="l" marL="342900" indent="-342900">
+              <a:lnSpc>
+                <a:spcPts val="1620"/>
+              </a:lnSpc>
+              <a:spcAft>
+                <a:spcPts val="300"/>
+              </a:spcAft>
+              <a:buSzPct val="100000"/>
+              <a:buChar char="•"/>
+            </a:pPr>
+            <a:r>
+              <a:rPr lang="en-US" sz="1200" dirty="0">
+                <a:solidFill>
+                  <a:srgbClr val="1C2833"/>
+                </a:solidFill>
+                <a:latin typeface="Arial" pitchFamily="34" charset="0"/>
+                <a:ea typeface="Arial" pitchFamily="34" charset="-122"/>
+                <a:cs typeface="Arial" pitchFamily="34" charset="-120"/>
+              </a:rPr>
+              <a:t>Avoid letting students treat the method as a black box. Insist they verify at least one of their answers by adding.</a:t>
+            </a:r>
+            <a:endParaRPr lang="en-US" sz="1200" dirty="0"/>
+          </a:p>
+        </p:txBody>
+      </p:sp>
+      <p:sp>
+        <p:nvSpPr>
+          <p:cNvPr id="5" name="Text 3"/>
+          <p:cNvSpPr/>
+          <p:nvPr/>
+        </p:nvSpPr>
+        <p:spPr>
+          <a:xfrm>
+            <a:off x="406301" y="4434929"/>
+            <a:ext cx="8498026" cy="213271"/>
+          </a:xfrm>
+          <a:prstGeom prst="rect">
+            <a:avLst/>
+          </a:prstGeom>
+          <a:noFill/>
+          <a:ln/>
+        </p:spPr>
+        <p:txBody>
+          <a:bodyPr wrap="square" lIns="0" tIns="0" rIns="0" bIns="0" rtlCol="0" anchor="t"/>
+          <a:lstStyle/>
+          <a:p>
+            <a:pPr algn="l" indent="0" marL="0">
+              <a:lnSpc>
+                <a:spcPts val="1680"/>
+              </a:lnSpc>
+              <a:spcBef>
+                <a:spcPts val="300"/>
+              </a:spcBef>
+              <a:spcAft>
+                <a:spcPts val="300"/>
+              </a:spcAft>
+              <a:buNone/>
+            </a:pPr>
+            <a:r>
+              <a:rPr lang="en-US" sz="1200" dirty="0">
+                <a:solidFill>
+                  <a:srgbClr val="1C2833"/>
+                </a:solidFill>
+                <a:latin typeface="Arial" pitchFamily="34" charset="0"/>
+                <a:ea typeface="Arial" pitchFamily="34" charset="-122"/>
+                <a:cs typeface="Arial" pitchFamily="34" charset="-120"/>
+              </a:rPr>
+              <a:t>Middle ·  · IKS Curriculum</a:t>
+            </a:r>
+            <a:endParaRPr lang="en-US" sz="1200" dirty="0"/>
+          </a:p>
+        </p:txBody>
+      </p:sp>
+    </p:spTree>
+  </p:cSld>
+  <p:clrMapOvr>
+    <a:masterClrMapping/>
+  </p:clrMapOvr>
+</p:sld>
+</file>
+
+<file path=ppt/slides/slide17.xml><?xml version="1.0" encoding="utf-8"?>
+<p:sld xmlns:a="http://schemas.openxmlformats.org/drawingml/2006/main" xmlns:r="http://schemas.openxmlformats.org/officeDocument/2006/relationships" xmlns:p="http://schemas.openxmlformats.org/presentationml/2006/main">
+  <p:cSld name="Slide 17">
+    <p:bg>
+      <p:bgPr>
+        <a:solidFill>
+          <a:srgbClr val="FFFFFF"/>
+        </a:solidFill>
+      </p:bgPr>
+    </p:bg>
+    <p:spTree>
+      <p:nvGrpSpPr>
+        <p:cNvPr id="1" name=""/>
+        <p:cNvGrpSpPr/>
+        <p:nvPr/>
+      </p:nvGrpSpPr>
+      <p:grpSpPr>
+        <a:xfrm>
+          <a:off x="0" y="0"/>
+          <a:ext cx="0" cy="0"/>
+          <a:chOff x="0" y="0"/>
+          <a:chExt cx="0" cy="0"/>
+        </a:xfrm>
+      </p:grpSpPr>
+      <p:sp>
+        <p:nvSpPr>
+          <p:cNvPr id="2" name="Text 0"/>
+          <p:cNvSpPr/>
+          <p:nvPr/>
+        </p:nvSpPr>
+        <p:spPr>
+          <a:xfrm>
+            <a:off x="0" y="0"/>
+            <a:ext cx="9144000" cy="101501"/>
+          </a:xfrm>
+          <a:prstGeom prst="rect">
+            <a:avLst/>
+          </a:prstGeom>
+          <a:solidFill>
+            <a:srgbClr val="277884"/>
+          </a:solidFill>
+          <a:ln/>
+        </p:spPr>
+        <p:txBody>
+          <a:bodyPr wrap="square" rtlCol="0" anchor="ctr"/>
+          <a:lstStyle/>
+          <a:p>
+            <a:pPr indent="0" marL="0">
+              <a:buNone/>
+            </a:pPr>
+            <a:endParaRPr lang="en-US" dirty="0"/>
+          </a:p>
+        </p:txBody>
+      </p:sp>
+      <p:sp>
+        <p:nvSpPr>
+          <p:cNvPr id="3" name="Text 1"/>
+          <p:cNvSpPr/>
+          <p:nvPr/>
+        </p:nvSpPr>
+        <p:spPr>
+          <a:xfrm>
+            <a:off x="406301" y="457051"/>
+            <a:ext cx="8498026" cy="274290"/>
+          </a:xfrm>
+          <a:prstGeom prst="rect">
+            <a:avLst/>
+          </a:prstGeom>
+          <a:noFill/>
+          <a:ln/>
+        </p:spPr>
+        <p:txBody>
+          <a:bodyPr wrap="square" lIns="0" tIns="0" rIns="0" bIns="0" rtlCol="0" anchor="t"/>
+          <a:lstStyle/>
+          <a:p>
+            <a:pPr algn="l" indent="0" marL="0">
+              <a:lnSpc>
+                <a:spcPts val="2160"/>
+              </a:lnSpc>
+              <a:spcBef>
+                <a:spcPts val="600"/>
+              </a:spcBef>
+              <a:spcAft>
+                <a:spcPts val="800"/>
+              </a:spcAft>
+              <a:buNone/>
+            </a:pPr>
+            <a:r>
+              <a:rPr lang="en-US" sz="1800" b="1" dirty="0">
+                <a:solidFill>
+                  <a:srgbClr val="FE4447"/>
+                </a:solidFill>
+                <a:latin typeface="Georgia" pitchFamily="34" charset="0"/>
+                <a:ea typeface="Georgia" pitchFamily="34" charset="-122"/>
+                <a:cs typeface="Georgia" pitchFamily="34" charset="-120"/>
+              </a:rPr>
+              <a:t>Citation(s) used in this lesson</a:t>
+            </a:r>
+            <a:endParaRPr lang="en-US" sz="1800" dirty="0"/>
+          </a:p>
+        </p:txBody>
+      </p:sp>
+      <p:sp>
+        <p:nvSpPr>
+          <p:cNvPr id="4" name="Text 2"/>
+          <p:cNvSpPr/>
+          <p:nvPr/>
+        </p:nvSpPr>
+        <p:spPr>
+          <a:xfrm>
+            <a:off x="634901" y="883593"/>
+            <a:ext cx="8102798" cy="525661"/>
+          </a:xfrm>
+          <a:prstGeom prst="rect">
+            <a:avLst/>
+          </a:prstGeom>
+          <a:noFill/>
+          <a:ln/>
+        </p:spPr>
+        <p:txBody>
+          <a:bodyPr wrap="square" lIns="0" tIns="0" rIns="0" bIns="0" rtlCol="0" anchor="t"/>
+          <a:lstStyle/>
+          <a:p>
+            <a:pPr algn="l" marL="342900" indent="-342900">
+              <a:lnSpc>
+                <a:spcPts val="1620"/>
+              </a:lnSpc>
+              <a:spcAft>
+                <a:spcPts val="300"/>
+              </a:spcAft>
+              <a:buSzPct val="100000"/>
+              <a:buChar char="•"/>
+            </a:pPr>
+            <a:r>
+              <a:rPr lang="en-US" sz="1200" dirty="0">
+                <a:solidFill>
+                  <a:srgbClr val="1C2833"/>
+                </a:solidFill>
+                <a:latin typeface="Arial" pitchFamily="34" charset="0"/>
+                <a:ea typeface="Arial" pitchFamily="34" charset="-122"/>
+                <a:cs typeface="Arial" pitchFamily="34" charset="-120"/>
+              </a:rPr>
+              <a:t>Tirthaji, </a:t>
+            </a:r>
+            <a:pPr algn="l" indent="0" marL="0">
+              <a:lnSpc>
+                <a:spcPts val="1620"/>
+              </a:lnSpc>
+              <a:spcAft>
+                <a:spcPts val="300"/>
+              </a:spcAft>
+              <a:buNone/>
+            </a:pPr>
+            <a:r>
+              <a:rPr lang="en-US" sz="1200" i="1" dirty="0">
+                <a:solidFill>
+                  <a:srgbClr val="1C2833"/>
+                </a:solidFill>
+                <a:latin typeface="Arial" pitchFamily="34" charset="0"/>
+                <a:ea typeface="Arial" pitchFamily="34" charset="-122"/>
+                <a:cs typeface="Arial" pitchFamily="34" charset="-120"/>
+              </a:rPr>
+              <a:t>Vedic Mathematics</a:t>
+            </a:r>
+            <a:pPr algn="l" indent="0" marL="0">
+              <a:lnSpc>
+                <a:spcPts val="1620"/>
+              </a:lnSpc>
+              <a:spcAft>
+                <a:spcPts val="300"/>
+              </a:spcAft>
+              <a:buNone/>
+            </a:pPr>
+            <a:r>
+              <a:rPr lang="en-US" sz="1200" dirty="0">
+                <a:solidFill>
+                  <a:srgbClr val="1C2833"/>
+                </a:solidFill>
+                <a:latin typeface="Arial" pitchFamily="34" charset="0"/>
+                <a:ea typeface="Arial" pitchFamily="34" charset="-122"/>
+                <a:cs typeface="Arial" pitchFamily="34" charset="-120"/>
+              </a:rPr>
+              <a:t> (1965), sūtra Nikhilam (#2).</a:t>
+            </a:r>
+            <a:endParaRPr lang="en-US" sz="1200" dirty="0"/>
+          </a:p>
+          <a:p>
+            <a:pPr algn="l" marL="342900" indent="-342900">
+              <a:lnSpc>
+                <a:spcPts val="1620"/>
+              </a:lnSpc>
+              <a:spcAft>
+                <a:spcPts val="300"/>
+              </a:spcAft>
+              <a:buSzPct val="100000"/>
+              <a:buChar char="•"/>
+            </a:pPr>
+            <a:r>
+              <a:rPr lang="en-US" sz="1200" i="1" dirty="0">
+                <a:solidFill>
+                  <a:srgbClr val="1C2833"/>
+                </a:solidFill>
+                <a:latin typeface="Arial" pitchFamily="34" charset="0"/>
+                <a:ea typeface="Arial" pitchFamily="34" charset="-122"/>
+                <a:cs typeface="Arial" pitchFamily="34" charset="-120"/>
+              </a:rPr>
               <a:t>FUNDAMENTAL AND VEDIC MATHEMATICS .pdf</a:t>
             </a:r>
             <a:pPr algn="l" indent="0" marL="0">
@@ -3616,7 +5592,7 @@
       </p:sp>
       <p:sp>
         <p:nvSpPr>
-          <p:cNvPr id="6" name="Text 4"/>
+          <p:cNvPr id="5" name="Text 3"/>
           <p:cNvSpPr/>
           <p:nvPr/>
         </p:nvSpPr>
@@ -3766,7 +5742,7 @@
                 <a:ea typeface="Georgia" pitchFamily="34" charset="-122"/>
                 <a:cs typeface="Georgia" pitchFamily="34" charset="-120"/>
               </a:rPr>
-              <a:t>Materials</a:t>
+              <a:t>Learning objective</a:t>
             </a:r>
             <a:endParaRPr lang="en-US" sz="1800" dirty="0"/>
           </a:p>
@@ -3781,7 +5757,7 @@
         <p:spPr>
           <a:xfrm>
             <a:off x="406301" y="870942"/>
-            <a:ext cx="8498026" cy="213271"/>
+            <a:ext cx="8498026" cy="436066"/>
           </a:xfrm>
           <a:prstGeom prst="rect">
             <a:avLst/>
@@ -3814,7 +5790,53 @@
                 <a:ea typeface="Arial" pitchFamily="34" charset="-122"/>
                 <a:cs typeface="Arial" pitchFamily="34" charset="-120"/>
               </a:rPr>
-              <a:t>– Whiteboard</a:t>
+              <a:t>By the end of this lesson, students will compute subtractions of the form </a:t>
+            </a:r>
+            <a:pPr algn="l" indent="0" marL="0">
+              <a:lnSpc>
+                <a:spcPts val="1680"/>
+              </a:lnSpc>
+              <a:spcBef>
+                <a:spcPts val="300"/>
+              </a:spcBef>
+              <a:spcAft>
+                <a:spcPts val="300"/>
+              </a:spcAft>
+              <a:buNone/>
+            </a:pPr>
+            <a:r>
+              <a:rPr lang="en-US" sz="1200" dirty="0">
+                <a:solidFill>
+                  <a:srgbClr val="1C2833"/>
+                </a:solidFill>
+                <a:latin typeface="Arial" pitchFamily="34" charset="0"/>
+                <a:ea typeface="Arial" pitchFamily="34" charset="-122"/>
+                <a:cs typeface="Arial" pitchFamily="34" charset="-120"/>
+              </a:rPr>
+              <a:t>10ⁿ − A</a:t>
+            </a:r>
+            <a:pPr algn="l" indent="0" marL="0">
+              <a:lnSpc>
+                <a:spcPts val="1680"/>
+              </a:lnSpc>
+              <a:spcBef>
+                <a:spcPts val="300"/>
+              </a:spcBef>
+              <a:spcAft>
+                <a:spcPts val="300"/>
+              </a:spcAft>
+              <a:buNone/>
+            </a:pPr>
+            <a:r>
+              <a:rPr lang="en-US" sz="1200" dirty="0">
+                <a:solidFill>
+                  <a:srgbClr val="1C2833"/>
+                </a:solidFill>
+                <a:latin typeface="Arial" pitchFamily="34" charset="0"/>
+                <a:ea typeface="Arial" pitchFamily="34" charset="-122"/>
+                <a:cs typeface="Arial" pitchFamily="34" charset="-120"/>
+              </a:rPr>
+              <a:t> (e.g. 1000 − 567, 10 000 − 4783) directly by reading off the complement of A, with no written borrow.</a:t>
             </a:r>
             <a:endParaRPr lang="en-US" sz="1200" dirty="0"/>
           </a:p>
@@ -3823,120 +5845,6 @@
       <p:sp>
         <p:nvSpPr>
           <p:cNvPr id="5" name="Text 3"/>
-          <p:cNvSpPr/>
-          <p:nvPr/>
-        </p:nvSpPr>
-        <p:spPr>
-          <a:xfrm>
-            <a:off x="634901" y="1173063"/>
-            <a:ext cx="8102798" cy="300930"/>
-          </a:xfrm>
-          <a:prstGeom prst="rect">
-            <a:avLst/>
-          </a:prstGeom>
-          <a:noFill/>
-          <a:ln/>
-        </p:spPr>
-        <p:txBody>
-          <a:bodyPr wrap="square" lIns="0" tIns="0" rIns="0" bIns="0" rtlCol="0" anchor="t"/>
-          <a:lstStyle/>
-          <a:p>
-            <a:pPr algn="l" marL="342900" indent="-342900">
-              <a:lnSpc>
-                <a:spcPts val="1620"/>
-              </a:lnSpc>
-              <a:spcAft>
-                <a:spcPts val="300"/>
-              </a:spcAft>
-              <a:buSzPct val="100000"/>
-              <a:buChar char="•"/>
-            </a:pPr>
-            <a:r>
-              <a:rPr lang="en-US" sz="1200" dirty="0">
-                <a:solidFill>
-                  <a:srgbClr val="1C2833"/>
-                </a:solidFill>
-                <a:latin typeface="Arial" pitchFamily="34" charset="0"/>
-                <a:ea typeface="Arial" pitchFamily="34" charset="-122"/>
-                <a:cs typeface="Arial" pitchFamily="34" charset="-120"/>
-              </a:rPr>
-              <a:t>activities/activity-01-complement-drill.md</a:t>
-            </a:r>
-            <a:pPr algn="l" indent="0" marL="0">
-              <a:lnSpc>
-                <a:spcPts val="1620"/>
-              </a:lnSpc>
-              <a:spcAft>
-                <a:spcPts val="300"/>
-              </a:spcAft>
-              <a:buNone/>
-            </a:pPr>
-            <a:r>
-              <a:rPr lang="en-US" sz="1200" dirty="0">
-                <a:solidFill>
-                  <a:srgbClr val="1C2833"/>
-                </a:solidFill>
-                <a:latin typeface="Arial" pitchFamily="34" charset="0"/>
-                <a:ea typeface="Arial" pitchFamily="34" charset="-122"/>
-                <a:cs typeface="Arial" pitchFamily="34" charset="-120"/>
-              </a:rPr>
-              <a:t> worksheet (printed)</a:t>
-            </a:r>
-            <a:endParaRPr lang="en-US" sz="1200" dirty="0"/>
-          </a:p>
-        </p:txBody>
-      </p:sp>
-      <p:sp>
-        <p:nvSpPr>
-          <p:cNvPr id="6" name="Text 4"/>
-          <p:cNvSpPr/>
-          <p:nvPr/>
-        </p:nvSpPr>
-        <p:spPr>
-          <a:xfrm>
-            <a:off x="406301" y="1562844"/>
-            <a:ext cx="8498026" cy="213271"/>
-          </a:xfrm>
-          <a:prstGeom prst="rect">
-            <a:avLst/>
-          </a:prstGeom>
-          <a:noFill/>
-          <a:ln/>
-        </p:spPr>
-        <p:txBody>
-          <a:bodyPr wrap="square" lIns="0" tIns="0" rIns="0" bIns="0" rtlCol="0" anchor="t"/>
-          <a:lstStyle/>
-          <a:p>
-            <a:pPr algn="l" indent="0" marL="0">
-              <a:lnSpc>
-                <a:spcPts val="1680"/>
-              </a:lnSpc>
-              <a:spcBef>
-                <a:spcPts val="300"/>
-              </a:spcBef>
-              <a:spcAft>
-                <a:spcPts val="300"/>
-              </a:spcAft>
-              <a:buNone/>
-            </a:pPr>
-            <a:r>
-              <a:rPr lang="en-US" sz="1200" dirty="0">
-                <a:solidFill>
-                  <a:srgbClr val="1C2833"/>
-                </a:solidFill>
-                <a:latin typeface="Arial" pitchFamily="34" charset="0"/>
-                <a:ea typeface="Arial" pitchFamily="34" charset="-122"/>
-                <a:cs typeface="Arial" pitchFamily="34" charset="-120"/>
-              </a:rPr>
-              <a:t>– Stopwatches (one per pair)</a:t>
-            </a:r>
-            <a:endParaRPr lang="en-US" sz="1200" dirty="0"/>
-          </a:p>
-        </p:txBody>
-      </p:sp>
-      <p:sp>
-        <p:nvSpPr>
-          <p:cNvPr id="7" name="Text 5"/>
           <p:cNvSpPr/>
           <p:nvPr/>
         </p:nvSpPr>
@@ -4086,7 +5994,7 @@
                 <a:ea typeface="Georgia" pitchFamily="34" charset="-122"/>
                 <a:cs typeface="Georgia" pitchFamily="34" charset="-120"/>
               </a:rPr>
-              <a:t>Vocabulary</a:t>
+              <a:t>Materials</a:t>
             </a:r>
             <a:endParaRPr lang="en-US" sz="1800" dirty="0"/>
           </a:p>
@@ -4100,8 +6008,8 @@
         </p:nvSpPr>
         <p:spPr>
           <a:xfrm>
-            <a:off x="406301" y="870942"/>
-            <a:ext cx="8498026" cy="213271"/>
+            <a:off x="634901" y="883593"/>
+            <a:ext cx="8102798" cy="788491"/>
           </a:xfrm>
           <a:prstGeom prst="rect">
             <a:avLst/>
@@ -4113,17 +6021,15 @@
           <a:bodyPr wrap="square" lIns="0" tIns="0" rIns="0" bIns="0" rtlCol="0" anchor="t"/>
           <a:lstStyle/>
           <a:p>
-            <a:pPr algn="l" indent="0" marL="0">
-              <a:lnSpc>
-                <a:spcPts val="1680"/>
-              </a:lnSpc>
-              <a:spcBef>
-                <a:spcPts val="300"/>
-              </a:spcBef>
-              <a:spcAft>
-                <a:spcPts val="300"/>
-              </a:spcAft>
-              <a:buNone/>
+            <a:pPr algn="l" marL="342900" indent="-342900">
+              <a:lnSpc>
+                <a:spcPts val="1620"/>
+              </a:lnSpc>
+              <a:spcAft>
+                <a:spcPts val="300"/>
+              </a:spcAft>
+              <a:buSzPct val="100000"/>
+              <a:buChar char="•"/>
             </a:pPr>
             <a:r>
               <a:rPr lang="en-US" sz="1200" dirty="0">
@@ -4134,7 +6040,75 @@
                 <a:ea typeface="Arial" pitchFamily="34" charset="-122"/>
                 <a:cs typeface="Arial" pitchFamily="34" charset="-120"/>
               </a:rPr>
-              <a:t>(All terms reused from Days 1–3.)</a:t>
+              <a:t>Whiteboard</a:t>
+            </a:r>
+            <a:endParaRPr lang="en-US" sz="1200" dirty="0"/>
+          </a:p>
+          <a:p>
+            <a:pPr algn="l" marL="342900" indent="-342900">
+              <a:lnSpc>
+                <a:spcPts val="1620"/>
+              </a:lnSpc>
+              <a:spcAft>
+                <a:spcPts val="300"/>
+              </a:spcAft>
+              <a:buSzPct val="100000"/>
+              <a:buChar char="•"/>
+            </a:pPr>
+            <a:r>
+              <a:rPr lang="en-US" sz="1200" dirty="0">
+                <a:solidFill>
+                  <a:srgbClr val="1C2833"/>
+                </a:solidFill>
+                <a:latin typeface="Arial" pitchFamily="34" charset="0"/>
+                <a:ea typeface="Arial" pitchFamily="34" charset="-122"/>
+                <a:cs typeface="Arial" pitchFamily="34" charset="-120"/>
+              </a:rPr>
+              <a:t>activities/activity-01-complement-drill.md</a:t>
+            </a:r>
+            <a:pPr algn="l" indent="0" marL="0">
+              <a:lnSpc>
+                <a:spcPts val="1620"/>
+              </a:lnSpc>
+              <a:spcAft>
+                <a:spcPts val="300"/>
+              </a:spcAft>
+              <a:buNone/>
+            </a:pPr>
+            <a:r>
+              <a:rPr lang="en-US" sz="1200" dirty="0">
+                <a:solidFill>
+                  <a:srgbClr val="1C2833"/>
+                </a:solidFill>
+                <a:latin typeface="Arial" pitchFamily="34" charset="0"/>
+                <a:ea typeface="Arial" pitchFamily="34" charset="-122"/>
+                <a:cs typeface="Arial" pitchFamily="34" charset="-120"/>
+              </a:rPr>
+              <a:t> worksheet (printed)</a:t>
+            </a:r>
+            <a:endParaRPr lang="en-US" sz="1200" dirty="0"/>
+          </a:p>
+          <a:p>
+            <a:pPr algn="l" marL="342900" indent="-342900">
+              <a:lnSpc>
+                <a:spcPts val="1620"/>
+              </a:lnSpc>
+              <a:spcAft>
+                <a:spcPts val="300"/>
+              </a:spcAft>
+              <a:buSzPct val="100000"/>
+              <a:buChar char="•"/>
+            </a:pPr>
+            <a:r>
+              <a:rPr lang="en-US" sz="1200" dirty="0">
+                <a:solidFill>
+                  <a:srgbClr val="1C2833"/>
+                </a:solidFill>
+                <a:latin typeface="Arial" pitchFamily="34" charset="0"/>
+                <a:ea typeface="Arial" pitchFamily="34" charset="-122"/>
+                <a:cs typeface="Arial" pitchFamily="34" charset="-120"/>
+              </a:rPr>
+              <a:t>Stopwatches (one per pair)</a:t>
             </a:r>
             <a:endParaRPr lang="en-US" sz="1200" dirty="0"/>
           </a:p>
@@ -4292,7 +6266,7 @@
                 <a:ea typeface="Georgia" pitchFamily="34" charset="-122"/>
                 <a:cs typeface="Georgia" pitchFamily="34" charset="-120"/>
               </a:rPr>
-              <a:t>Lesson flow</a:t>
+              <a:t>Vocabulary</a:t>
             </a:r>
             <a:endParaRPr lang="en-US" sz="1800" dirty="0"/>
           </a:p>
@@ -4301,6 +6275,54 @@
       <p:sp>
         <p:nvSpPr>
           <p:cNvPr id="4" name="Text 2"/>
+          <p:cNvSpPr/>
+          <p:nvPr/>
+        </p:nvSpPr>
+        <p:spPr>
+          <a:xfrm>
+            <a:off x="406301" y="870942"/>
+            <a:ext cx="8498026" cy="213271"/>
+          </a:xfrm>
+          <a:prstGeom prst="rect">
+            <a:avLst/>
+          </a:prstGeom>
+          <a:noFill/>
+          <a:ln/>
+        </p:spPr>
+        <p:txBody>
+          <a:bodyPr wrap="square" lIns="0" tIns="0" rIns="0" bIns="0" rtlCol="0" anchor="t"/>
+          <a:lstStyle/>
+          <a:p>
+            <a:pPr algn="l" indent="0" marL="0">
+              <a:lnSpc>
+                <a:spcPts val="1680"/>
+              </a:lnSpc>
+              <a:spcBef>
+                <a:spcPts val="300"/>
+              </a:spcBef>
+              <a:spcAft>
+                <a:spcPts val="300"/>
+              </a:spcAft>
+              <a:buNone/>
+            </a:pPr>
+            <a:r>
+              <a:rPr lang="en-US" sz="1200" dirty="0">
+                <a:solidFill>
+                  <a:srgbClr val="1C2833"/>
+                </a:solidFill>
+                <a:latin typeface="Arial" pitchFamily="34" charset="0"/>
+                <a:ea typeface="Arial" pitchFamily="34" charset="-122"/>
+                <a:cs typeface="Arial" pitchFamily="34" charset="-120"/>
+              </a:rPr>
+              <a:t>(All terms reused from Days 1–3.)</a:t>
+            </a:r>
+            <a:endParaRPr lang="en-US" sz="1200" dirty="0"/>
+          </a:p>
+        </p:txBody>
+      </p:sp>
+      <p:sp>
+        <p:nvSpPr>
+          <p:cNvPr id="5" name="Text 3"/>
           <p:cNvSpPr/>
           <p:nvPr/>
         </p:nvSpPr>
@@ -4450,7 +6472,7 @@
                 <a:ea typeface="Georgia" pitchFamily="34" charset="-122"/>
                 <a:cs typeface="Georgia" pitchFamily="34" charset="-120"/>
               </a:rPr>
-              <a:t>Warm-up (5 min)</a:t>
+              <a:t>Lesson flow</a:t>
             </a:r>
             <a:endParaRPr lang="en-US" sz="1800" dirty="0"/>
           </a:p>
@@ -4459,54 +6481,6 @@
       <p:sp>
         <p:nvSpPr>
           <p:cNvPr id="4" name="Text 2"/>
-          <p:cNvSpPr/>
-          <p:nvPr/>
-        </p:nvSpPr>
-        <p:spPr>
-          <a:xfrm>
-            <a:off x="406301" y="870942"/>
-            <a:ext cx="8498026" cy="213271"/>
-          </a:xfrm>
-          <a:prstGeom prst="rect">
-            <a:avLst/>
-          </a:prstGeom>
-          <a:noFill/>
-          <a:ln/>
-        </p:spPr>
-        <p:txBody>
-          <a:bodyPr wrap="square" lIns="0" tIns="0" rIns="0" bIns="0" rtlCol="0" anchor="t"/>
-          <a:lstStyle/>
-          <a:p>
-            <a:pPr algn="l" indent="0" marL="0">
-              <a:lnSpc>
-                <a:spcPts val="1680"/>
-              </a:lnSpc>
-              <a:spcBef>
-                <a:spcPts val="300"/>
-              </a:spcBef>
-              <a:spcAft>
-                <a:spcPts val="300"/>
-              </a:spcAft>
-              <a:buNone/>
-            </a:pPr>
-            <a:r>
-              <a:rPr lang="en-US" sz="1200" dirty="0">
-                <a:solidFill>
-                  <a:srgbClr val="1C2833"/>
-                </a:solidFill>
-                <a:latin typeface="Arial" pitchFamily="34" charset="0"/>
-                <a:ea typeface="Arial" pitchFamily="34" charset="-122"/>
-                <a:cs typeface="Arial" pitchFamily="34" charset="-120"/>
-              </a:rPr>
-              <a:t>– Sūtra chant. – Quick fire: complements to 100, then complements to 1000. Teacher calls; students chorus.</a:t>
-            </a:r>
-            <a:endParaRPr lang="en-US" sz="1200" dirty="0"/>
-          </a:p>
-        </p:txBody>
-      </p:sp>
-      <p:sp>
-        <p:nvSpPr>
-          <p:cNvPr id="5" name="Text 3"/>
           <p:cNvSpPr/>
           <p:nvPr/>
         </p:nvSpPr>
@@ -4656,7 +6630,7 @@
                 <a:ea typeface="Georgia" pitchFamily="34" charset="-122"/>
                 <a:cs typeface="Georgia" pitchFamily="34" charset="-120"/>
               </a:rPr>
-              <a:t>Core (10 min) — The shift from "complement" to "subtraction"</a:t>
+              <a:t>Warm-up (5 min)</a:t>
             </a:r>
             <a:endParaRPr lang="en-US" sz="1800" dirty="0"/>
           </a:p>
@@ -4671,7 +6645,7 @@
         <p:spPr>
           <a:xfrm>
             <a:off x="634901" y="883593"/>
-            <a:ext cx="8102798" cy="281880"/>
+            <a:ext cx="8102798" cy="525661"/>
           </a:xfrm>
           <a:prstGeom prst="rect">
             <a:avLst/>
@@ -4694,24 +6668,28 @@
               <a:buChar char="•"/>
             </a:pPr>
             <a:r>
-              <a:rPr lang="en-US" sz="1200" b="1" dirty="0">
-                <a:solidFill>
-                  <a:srgbClr val="1C2833"/>
-                </a:solidFill>
-                <a:latin typeface="Arial" pitchFamily="34" charset="0"/>
-                <a:ea typeface="Arial" pitchFamily="34" charset="-122"/>
-                <a:cs typeface="Arial" pitchFamily="34" charset="-120"/>
-              </a:rPr>
-              <a:t>The pivot.</a:t>
-            </a:r>
-            <a:pPr algn="l" indent="0" marL="0">
+              <a:rPr lang="en-US" sz="1200" dirty="0">
+                <a:solidFill>
+                  <a:srgbClr val="1C2833"/>
+                </a:solidFill>
+                <a:latin typeface="Arial" pitchFamily="34" charset="0"/>
+                <a:ea typeface="Arial" pitchFamily="34" charset="-122"/>
+                <a:cs typeface="Arial" pitchFamily="34" charset="-120"/>
+              </a:rPr>
+              <a:t>Sūtra chant.</a:t>
+            </a:r>
+            <a:endParaRPr lang="en-US" sz="1200" dirty="0"/>
+          </a:p>
+          <a:p>
+            <a:pPr algn="l" marL="342900" indent="-342900">
               <a:lnSpc>
                 <a:spcPts val="1620"/>
               </a:lnSpc>
               <a:spcAft>
                 <a:spcPts val="300"/>
               </a:spcAft>
-              <a:buNone/>
+              <a:buSzPct val="100000"/>
+              <a:buChar char="•"/>
             </a:pPr>
             <a:r>
               <a:rPr lang="en-US" sz="1200" dirty="0">
@@ -4722,7 +6700,7 @@
                 <a:ea typeface="Arial" pitchFamily="34" charset="-122"/>
                 <a:cs typeface="Arial" pitchFamily="34" charset="-120"/>
               </a:rPr>
-              <a:t> Write on the board:</a:t>
+              <a:t>Quick fire: complements to 100, then complements to 1000. Teacher calls; students chorus.</a:t>
             </a:r>
             <a:endParaRPr lang="en-US" sz="1200" dirty="0"/>
           </a:p>
@@ -4736,858 +6714,7 @@
         </p:nvSpPr>
         <p:spPr>
           <a:xfrm>
-            <a:off x="406301" y="1266974"/>
-            <a:ext cx="8331398" cy="428476"/>
-          </a:xfrm>
-          <a:prstGeom prst="rect">
-            <a:avLst/>
-          </a:prstGeom>
-          <a:solidFill>
-            <a:srgbClr val="F4F8F9"/>
-          </a:solidFill>
-          <a:ln/>
-        </p:spPr>
-        <p:txBody>
-          <a:bodyPr wrap="square" rtlCol="0" anchor="ctr"/>
-          <a:lstStyle/>
-          <a:p>
-            <a:pPr indent="0" marL="0">
-              <a:buNone/>
-            </a:pPr>
-            <a:endParaRPr lang="en-US" dirty="0"/>
-          </a:p>
-        </p:txBody>
-      </p:sp>
-      <p:sp>
-        <p:nvSpPr>
-          <p:cNvPr id="6" name="Shape 4"/>
-          <p:cNvSpPr/>
-          <p:nvPr/>
-        </p:nvSpPr>
-        <p:spPr>
-          <a:xfrm>
-            <a:off x="430113" y="1266974"/>
-            <a:ext cx="0" cy="428476"/>
-          </a:xfrm>
-          <a:prstGeom prst="line">
-            <a:avLst/>
-          </a:prstGeom>
-          <a:noFill/>
-          <a:ln w="47625">
-            <a:solidFill>
-              <a:srgbClr val="277884"/>
-            </a:solidFill>
-            <a:prstDash val="solid"/>
-          </a:ln>
-        </p:spPr>
-      </p:sp>
-      <p:sp>
-        <p:nvSpPr>
-          <p:cNvPr id="7" name="Text 5"/>
-          <p:cNvSpPr/>
-          <p:nvPr/>
-        </p:nvSpPr>
-        <p:spPr>
-          <a:xfrm>
-            <a:off x="631627" y="1393924"/>
-            <a:ext cx="8086939" cy="174575"/>
-          </a:xfrm>
-          <a:prstGeom prst="rect">
-            <a:avLst/>
-          </a:prstGeom>
-          <a:noFill/>
-          <a:ln/>
-        </p:spPr>
-        <p:txBody>
-          <a:bodyPr wrap="square" lIns="0" tIns="0" rIns="0" bIns="0" rtlCol="0" anchor="t"/>
-          <a:lstStyle/>
-          <a:p>
-            <a:pPr algn="l" indent="0" marL="0">
-              <a:lnSpc>
-                <a:spcPts val="1375"/>
-              </a:lnSpc>
-              <a:buNone/>
-            </a:pPr>
-            <a:r>
-              <a:rPr lang="en-US" sz="1100" dirty="0">
-                <a:solidFill>
-                  <a:srgbClr val="1C2833"/>
-                </a:solidFill>
-                <a:latin typeface="Courier New" pitchFamily="34" charset="0"/>
-                <a:ea typeface="Courier New" pitchFamily="34" charset="-122"/>
-                <a:cs typeface="Courier New" pitchFamily="34" charset="-120"/>
-              </a:rPr>
-              <a:t>1000  −  567  =  ?</a:t>
-            </a:r>
-            <a:endParaRPr lang="en-US" sz="1100" dirty="0"/>
-          </a:p>
-        </p:txBody>
-      </p:sp>
-      <p:sp>
-        <p:nvSpPr>
-          <p:cNvPr id="8" name="Text 6"/>
-          <p:cNvSpPr/>
-          <p:nvPr/>
-        </p:nvSpPr>
-        <p:spPr>
-          <a:xfrm>
-            <a:off x="406301" y="1784300"/>
-            <a:ext cx="8498026" cy="213271"/>
-          </a:xfrm>
-          <a:prstGeom prst="rect">
-            <a:avLst/>
-          </a:prstGeom>
-          <a:noFill/>
-          <a:ln/>
-        </p:spPr>
-        <p:txBody>
-          <a:bodyPr wrap="square" lIns="0" tIns="0" rIns="0" bIns="0" rtlCol="0" anchor="t"/>
-          <a:lstStyle/>
-          <a:p>
-            <a:pPr algn="l" indent="0" marL="0">
-              <a:lnSpc>
-                <a:spcPts val="1680"/>
-              </a:lnSpc>
-              <a:spcBef>
-                <a:spcPts val="300"/>
-              </a:spcBef>
-              <a:spcAft>
-                <a:spcPts val="300"/>
-              </a:spcAft>
-              <a:buNone/>
-            </a:pPr>
-            <a:r>
-              <a:rPr lang="en-US" sz="1200" i="1" dirty="0">
-                <a:solidFill>
-                  <a:srgbClr val="1C2833"/>
-                </a:solidFill>
-                <a:latin typeface="Arial" pitchFamily="34" charset="0"/>
-                <a:ea typeface="Arial" pitchFamily="34" charset="-122"/>
-                <a:cs typeface="Arial" pitchFamily="34" charset="-120"/>
-              </a:rPr>
-              <a:t>"We've spent two days finding the complement. The complement of 567 to 1000 is 433. Notice that's also the answer."</a:t>
-            </a:r>
-            <a:endParaRPr lang="en-US" sz="1200" dirty="0"/>
-          </a:p>
-        </p:txBody>
-      </p:sp>
-      <p:sp>
-        <p:nvSpPr>
-          <p:cNvPr id="9" name="Text 7"/>
-          <p:cNvSpPr/>
-          <p:nvPr/>
-        </p:nvSpPr>
-        <p:spPr>
-          <a:xfrm>
-            <a:off x="634901" y="2086421"/>
-            <a:ext cx="8102798" cy="487561"/>
-          </a:xfrm>
-          <a:prstGeom prst="rect">
-            <a:avLst/>
-          </a:prstGeom>
-          <a:noFill/>
-          <a:ln/>
-        </p:spPr>
-        <p:txBody>
-          <a:bodyPr wrap="square" lIns="0" tIns="0" rIns="0" bIns="0" rtlCol="0" anchor="t"/>
-          <a:lstStyle/>
-          <a:p>
-            <a:pPr algn="l" marL="342900" indent="-342900">
-              <a:lnSpc>
-                <a:spcPts val="1620"/>
-              </a:lnSpc>
-              <a:spcAft>
-                <a:spcPts val="300"/>
-              </a:spcAft>
-              <a:buSzPct val="100000"/>
-              <a:buChar char="•"/>
-            </a:pPr>
-            <a:r>
-              <a:rPr lang="en-US" sz="1200" b="1" dirty="0">
-                <a:solidFill>
-                  <a:srgbClr val="1C2833"/>
-                </a:solidFill>
-                <a:latin typeface="Arial" pitchFamily="34" charset="0"/>
-                <a:ea typeface="Arial" pitchFamily="34" charset="-122"/>
-                <a:cs typeface="Arial" pitchFamily="34" charset="-120"/>
-              </a:rPr>
-              <a:t>Why?</a:t>
-            </a:r>
-            <a:pPr algn="l" indent="0" marL="0">
-              <a:lnSpc>
-                <a:spcPts val="1620"/>
-              </a:lnSpc>
-              <a:spcAft>
-                <a:spcPts val="300"/>
-              </a:spcAft>
-              <a:buNone/>
-            </a:pPr>
-            <a:r>
-              <a:rPr lang="en-US" sz="1200" dirty="0">
-                <a:solidFill>
-                  <a:srgbClr val="1C2833"/>
-                </a:solidFill>
-                <a:latin typeface="Arial" pitchFamily="34" charset="0"/>
-                <a:ea typeface="Arial" pitchFamily="34" charset="-122"/>
-                <a:cs typeface="Arial" pitchFamily="34" charset="-120"/>
-              </a:rPr>
-              <a:t> </a:t>
-            </a:r>
-            <a:pPr algn="l" indent="0" marL="0">
-              <a:lnSpc>
-                <a:spcPts val="1620"/>
-              </a:lnSpc>
-              <a:spcAft>
-                <a:spcPts val="300"/>
-              </a:spcAft>
-              <a:buNone/>
-            </a:pPr>
-            <a:r>
-              <a:rPr lang="en-US" sz="1200" i="1" dirty="0">
-                <a:solidFill>
-                  <a:srgbClr val="1C2833"/>
-                </a:solidFill>
-                <a:latin typeface="Arial" pitchFamily="34" charset="0"/>
-                <a:ea typeface="Arial" pitchFamily="34" charset="-122"/>
-                <a:cs typeface="Arial" pitchFamily="34" charset="-120"/>
-              </a:rPr>
-              <a:t>"If A + B = 1000, then 1000 − A = B and 1000 − B = A. Complement IS the difference, when you're subtracting from the base."</a:t>
-            </a:r>
-            <a:endParaRPr lang="en-US" sz="1200" dirty="0"/>
-          </a:p>
-        </p:txBody>
-      </p:sp>
-      <p:sp>
-        <p:nvSpPr>
-          <p:cNvPr id="10" name="Text 8"/>
-          <p:cNvSpPr/>
-          <p:nvPr/>
-        </p:nvSpPr>
-        <p:spPr>
-          <a:xfrm>
-            <a:off x="634901" y="2675483"/>
-            <a:ext cx="8102798" cy="281880"/>
-          </a:xfrm>
-          <a:prstGeom prst="rect">
-            <a:avLst/>
-          </a:prstGeom>
-          <a:noFill/>
-          <a:ln/>
-        </p:spPr>
-        <p:txBody>
-          <a:bodyPr wrap="square" lIns="0" tIns="0" rIns="0" bIns="0" rtlCol="0" anchor="t"/>
-          <a:lstStyle/>
-          <a:p>
-            <a:pPr algn="l" marL="342900" indent="-342900">
-              <a:lnSpc>
-                <a:spcPts val="1620"/>
-              </a:lnSpc>
-              <a:spcAft>
-                <a:spcPts val="300"/>
-              </a:spcAft>
-              <a:buSzPct val="100000"/>
-              <a:buChar char="•"/>
-            </a:pPr>
-            <a:r>
-              <a:rPr lang="en-US" sz="1200" b="1" dirty="0">
-                <a:solidFill>
-                  <a:srgbClr val="1C2833"/>
-                </a:solidFill>
-                <a:latin typeface="Arial" pitchFamily="34" charset="0"/>
-                <a:ea typeface="Arial" pitchFamily="34" charset="-122"/>
-                <a:cs typeface="Arial" pitchFamily="34" charset="-120"/>
-              </a:rPr>
-              <a:t>Worked examples, with class predicting:</a:t>
-            </a:r>
-            <a:endParaRPr lang="en-US" sz="1200" dirty="0"/>
-          </a:p>
-        </p:txBody>
-      </p:sp>
-      <p:sp>
-        <p:nvSpPr>
-          <p:cNvPr id="11" name="Text 9"/>
-          <p:cNvSpPr/>
-          <p:nvPr/>
-        </p:nvSpPr>
-        <p:spPr>
-          <a:xfrm>
-            <a:off x="406301" y="3046214"/>
-            <a:ext cx="8498026" cy="213271"/>
-          </a:xfrm>
-          <a:prstGeom prst="rect">
-            <a:avLst/>
-          </a:prstGeom>
-          <a:noFill/>
-          <a:ln/>
-        </p:spPr>
-        <p:txBody>
-          <a:bodyPr wrap="square" lIns="0" tIns="0" rIns="0" bIns="0" rtlCol="0" anchor="t"/>
-          <a:lstStyle/>
-          <a:p>
-            <a:pPr algn="l" indent="0" marL="0">
-              <a:lnSpc>
-                <a:spcPts val="1680"/>
-              </a:lnSpc>
-              <a:spcBef>
-                <a:spcPts val="300"/>
-              </a:spcBef>
-              <a:spcAft>
-                <a:spcPts val="300"/>
-              </a:spcAft>
-              <a:buNone/>
-            </a:pPr>
-            <a:r>
-              <a:rPr lang="en-US" sz="1200" i="1" dirty="0">
-                <a:solidFill>
-                  <a:srgbClr val="1C2833"/>
-                </a:solidFill>
-                <a:latin typeface="Arial" pitchFamily="34" charset="0"/>
-                <a:ea typeface="Arial" pitchFamily="34" charset="-122"/>
-                <a:cs typeface="Arial" pitchFamily="34" charset="-120"/>
-              </a:rPr>
-              <a:t>Each row: Problem · Working · Answer.</a:t>
-            </a:r>
-            <a:endParaRPr lang="en-US" sz="1200" dirty="0"/>
-          </a:p>
-        </p:txBody>
-      </p:sp>
-      <p:sp>
-        <p:nvSpPr>
-          <p:cNvPr id="12" name="Text 10"/>
-          <p:cNvSpPr/>
-          <p:nvPr/>
-        </p:nvSpPr>
-        <p:spPr>
-          <a:xfrm>
-            <a:off x="634901" y="3348335"/>
-            <a:ext cx="8102798" cy="1257002"/>
-          </a:xfrm>
-          <a:prstGeom prst="rect">
-            <a:avLst/>
-          </a:prstGeom>
-          <a:noFill/>
-          <a:ln/>
-        </p:spPr>
-        <p:txBody>
-          <a:bodyPr wrap="square" lIns="0" tIns="0" rIns="0" bIns="0" rtlCol="0" anchor="t"/>
-          <a:lstStyle/>
-          <a:p>
-            <a:pPr algn="l" marL="342900" indent="-342900">
-              <a:lnSpc>
-                <a:spcPts val="1620"/>
-              </a:lnSpc>
-              <a:spcAft>
-                <a:spcPts val="300"/>
-              </a:spcAft>
-              <a:buSzPct val="100000"/>
-              <a:buChar char="•"/>
-            </a:pPr>
-            <a:r>
-              <a:rPr lang="en-US" sz="1200" b="1" dirty="0">
-                <a:solidFill>
-                  <a:srgbClr val="1C2833"/>
-                </a:solidFill>
-                <a:latin typeface="Arial" pitchFamily="34" charset="0"/>
-                <a:ea typeface="Arial" pitchFamily="34" charset="-122"/>
-                <a:cs typeface="Arial" pitchFamily="34" charset="-120"/>
-              </a:rPr>
-              <a:t>1000 − 567</a:t>
-            </a:r>
-            <a:pPr algn="l" indent="0" marL="0">
-              <a:lnSpc>
-                <a:spcPts val="1620"/>
-              </a:lnSpc>
-              <a:spcAft>
-                <a:spcPts val="300"/>
-              </a:spcAft>
-              <a:buNone/>
-            </a:pPr>
-            <a:r>
-              <a:rPr lang="en-US" sz="1200" dirty="0">
-                <a:solidFill>
-                  <a:srgbClr val="1C2833"/>
-                </a:solidFill>
-                <a:latin typeface="Arial" pitchFamily="34" charset="0"/>
-                <a:ea typeface="Arial" pitchFamily="34" charset="-122"/>
-                <a:cs typeface="Arial" pitchFamily="34" charset="-120"/>
-              </a:rPr>
-              <a:t> — 9-5, 9-6, 10-7 = 4, 3, 3 · </a:t>
-            </a:r>
-            <a:pPr algn="l" indent="0" marL="0">
-              <a:lnSpc>
-                <a:spcPts val="1620"/>
-              </a:lnSpc>
-              <a:spcAft>
-                <a:spcPts val="300"/>
-              </a:spcAft>
-              <a:buNone/>
-            </a:pPr>
-            <a:r>
-              <a:rPr lang="en-US" sz="1200" b="1" dirty="0">
-                <a:solidFill>
-                  <a:srgbClr val="1C2833"/>
-                </a:solidFill>
-                <a:latin typeface="Arial" pitchFamily="34" charset="0"/>
-                <a:ea typeface="Arial" pitchFamily="34" charset="-122"/>
-                <a:cs typeface="Arial" pitchFamily="34" charset="-120"/>
-              </a:rPr>
-              <a:t>433</a:t>
-            </a:r>
-            <a:endParaRPr lang="en-US" sz="1200" dirty="0"/>
-          </a:p>
-          <a:p>
-            <a:pPr algn="l" marL="342900" indent="-342900">
-              <a:lnSpc>
-                <a:spcPts val="1620"/>
-              </a:lnSpc>
-              <a:spcAft>
-                <a:spcPts val="300"/>
-              </a:spcAft>
-              <a:buSzPct val="100000"/>
-              <a:buChar char="•"/>
-            </a:pPr>
-            <a:r>
-              <a:rPr lang="en-US" sz="1200" b="1" dirty="0">
-                <a:solidFill>
-                  <a:srgbClr val="1C2833"/>
-                </a:solidFill>
-                <a:latin typeface="Arial" pitchFamily="34" charset="0"/>
-                <a:ea typeface="Arial" pitchFamily="34" charset="-122"/>
-                <a:cs typeface="Arial" pitchFamily="34" charset="-120"/>
-              </a:rPr>
-              <a:t>1000 − 248</a:t>
-            </a:r>
-            <a:pPr algn="l" indent="0" marL="0">
-              <a:lnSpc>
-                <a:spcPts val="1620"/>
-              </a:lnSpc>
-              <a:spcAft>
-                <a:spcPts val="300"/>
-              </a:spcAft>
-              <a:buNone/>
-            </a:pPr>
-            <a:r>
-              <a:rPr lang="en-US" sz="1200" dirty="0">
-                <a:solidFill>
-                  <a:srgbClr val="1C2833"/>
-                </a:solidFill>
-                <a:latin typeface="Arial" pitchFamily="34" charset="0"/>
-                <a:ea typeface="Arial" pitchFamily="34" charset="-122"/>
-                <a:cs typeface="Arial" pitchFamily="34" charset="-120"/>
-              </a:rPr>
-              <a:t> — 9-2, 9-4, 10-8 = 7, 5, 2 · </a:t>
-            </a:r>
-            <a:pPr algn="l" indent="0" marL="0">
-              <a:lnSpc>
-                <a:spcPts val="1620"/>
-              </a:lnSpc>
-              <a:spcAft>
-                <a:spcPts val="300"/>
-              </a:spcAft>
-              <a:buNone/>
-            </a:pPr>
-            <a:r>
-              <a:rPr lang="en-US" sz="1200" b="1" dirty="0">
-                <a:solidFill>
-                  <a:srgbClr val="1C2833"/>
-                </a:solidFill>
-                <a:latin typeface="Arial" pitchFamily="34" charset="0"/>
-                <a:ea typeface="Arial" pitchFamily="34" charset="-122"/>
-                <a:cs typeface="Arial" pitchFamily="34" charset="-120"/>
-              </a:rPr>
-              <a:t>752</a:t>
-            </a:r>
-            <a:endParaRPr lang="en-US" sz="1200" dirty="0"/>
-          </a:p>
-          <a:p>
-            <a:pPr algn="l" marL="342900" indent="-342900">
-              <a:lnSpc>
-                <a:spcPts val="1620"/>
-              </a:lnSpc>
-              <a:spcAft>
-                <a:spcPts val="300"/>
-              </a:spcAft>
-              <a:buSzPct val="100000"/>
-              <a:buChar char="•"/>
-            </a:pPr>
-            <a:r>
-              <a:rPr lang="en-US" sz="1200" b="1" dirty="0">
-                <a:solidFill>
-                  <a:srgbClr val="1C2833"/>
-                </a:solidFill>
-                <a:latin typeface="Arial" pitchFamily="34" charset="0"/>
-                <a:ea typeface="Arial" pitchFamily="34" charset="-122"/>
-                <a:cs typeface="Arial" pitchFamily="34" charset="-120"/>
-              </a:rPr>
-              <a:t>10 000 − 4567</a:t>
-            </a:r>
-            <a:pPr algn="l" indent="0" marL="0">
-              <a:lnSpc>
-                <a:spcPts val="1620"/>
-              </a:lnSpc>
-              <a:spcAft>
-                <a:spcPts val="300"/>
-              </a:spcAft>
-              <a:buNone/>
-            </a:pPr>
-            <a:r>
-              <a:rPr lang="en-US" sz="1200" dirty="0">
-                <a:solidFill>
-                  <a:srgbClr val="1C2833"/>
-                </a:solidFill>
-                <a:latin typeface="Arial" pitchFamily="34" charset="0"/>
-                <a:ea typeface="Arial" pitchFamily="34" charset="-122"/>
-                <a:cs typeface="Arial" pitchFamily="34" charset="-120"/>
-              </a:rPr>
-              <a:t> — 9-4, 9-5, 9-6, 10-7 = 5, 4, 3, 3 · </a:t>
-            </a:r>
-            <a:pPr algn="l" indent="0" marL="0">
-              <a:lnSpc>
-                <a:spcPts val="1620"/>
-              </a:lnSpc>
-              <a:spcAft>
-                <a:spcPts val="300"/>
-              </a:spcAft>
-              <a:buNone/>
-            </a:pPr>
-            <a:r>
-              <a:rPr lang="en-US" sz="1200" b="1" dirty="0">
-                <a:solidFill>
-                  <a:srgbClr val="1C2833"/>
-                </a:solidFill>
-                <a:latin typeface="Arial" pitchFamily="34" charset="0"/>
-                <a:ea typeface="Arial" pitchFamily="34" charset="-122"/>
-                <a:cs typeface="Arial" pitchFamily="34" charset="-120"/>
-              </a:rPr>
-              <a:t>5433</a:t>
-            </a:r>
-            <a:endParaRPr lang="en-US" sz="1200" dirty="0"/>
-          </a:p>
-          <a:p>
-            <a:pPr algn="l" marL="342900" indent="-342900">
-              <a:lnSpc>
-                <a:spcPts val="1620"/>
-              </a:lnSpc>
-              <a:spcAft>
-                <a:spcPts val="300"/>
-              </a:spcAft>
-              <a:buSzPct val="100000"/>
-              <a:buChar char="•"/>
-            </a:pPr>
-            <a:r>
-              <a:rPr lang="en-US" sz="1200" b="1" dirty="0">
-                <a:solidFill>
-                  <a:srgbClr val="1C2833"/>
-                </a:solidFill>
-                <a:latin typeface="Arial" pitchFamily="34" charset="0"/>
-                <a:ea typeface="Arial" pitchFamily="34" charset="-122"/>
-                <a:cs typeface="Arial" pitchFamily="34" charset="-120"/>
-              </a:rPr>
-              <a:t>10 000 − 89</a:t>
-            </a:r>
-            <a:pPr algn="l" indent="0" marL="0">
-              <a:lnSpc>
-                <a:spcPts val="1620"/>
-              </a:lnSpc>
-              <a:spcAft>
-                <a:spcPts val="300"/>
-              </a:spcAft>
-              <a:buNone/>
-            </a:pPr>
-            <a:r>
-              <a:rPr lang="en-US" sz="1200" dirty="0">
-                <a:solidFill>
-                  <a:srgbClr val="1C2833"/>
-                </a:solidFill>
-                <a:latin typeface="Arial" pitchFamily="34" charset="0"/>
-                <a:ea typeface="Arial" pitchFamily="34" charset="-122"/>
-                <a:cs typeface="Arial" pitchFamily="34" charset="-120"/>
-              </a:rPr>
-              <a:t> — 9-0, 9-0, 9-8, 10-9 = 9, 9, 1, 1 · </a:t>
-            </a:r>
-            <a:pPr algn="l" indent="0" marL="0">
-              <a:lnSpc>
-                <a:spcPts val="1620"/>
-              </a:lnSpc>
-              <a:spcAft>
-                <a:spcPts val="300"/>
-              </a:spcAft>
-              <a:buNone/>
-            </a:pPr>
-            <a:r>
-              <a:rPr lang="en-US" sz="1200" b="1" dirty="0">
-                <a:solidFill>
-                  <a:srgbClr val="1C2833"/>
-                </a:solidFill>
-                <a:latin typeface="Arial" pitchFamily="34" charset="0"/>
-                <a:ea typeface="Arial" pitchFamily="34" charset="-122"/>
-                <a:cs typeface="Arial" pitchFamily="34" charset="-120"/>
-              </a:rPr>
-              <a:t>9911</a:t>
-            </a:r>
-            <a:pPr algn="l" indent="0" marL="0">
-              <a:lnSpc>
-                <a:spcPts val="1620"/>
-              </a:lnSpc>
-              <a:spcAft>
-                <a:spcPts val="300"/>
-              </a:spcAft>
-              <a:buNone/>
-            </a:pPr>
-            <a:r>
-              <a:rPr lang="en-US" sz="1200" dirty="0">
-                <a:solidFill>
-                  <a:srgbClr val="1C2833"/>
-                </a:solidFill>
-                <a:latin typeface="Arial" pitchFamily="34" charset="0"/>
-                <a:ea typeface="Arial" pitchFamily="34" charset="-122"/>
-                <a:cs typeface="Arial" pitchFamily="34" charset="-120"/>
-              </a:rPr>
-              <a:t> (pad 89 → 0089)</a:t>
-            </a:r>
-            <a:endParaRPr lang="en-US" sz="1200" dirty="0"/>
-          </a:p>
-          <a:p>
-            <a:pPr algn="l" marL="342900" indent="-342900">
-              <a:lnSpc>
-                <a:spcPts val="1620"/>
-              </a:lnSpc>
-              <a:spcAft>
-                <a:spcPts val="300"/>
-              </a:spcAft>
-              <a:buSzPct val="100000"/>
-              <a:buChar char="•"/>
-            </a:pPr>
-            <a:r>
-              <a:rPr lang="en-US" sz="1200" b="1" dirty="0">
-                <a:solidFill>
-                  <a:srgbClr val="1C2833"/>
-                </a:solidFill>
-                <a:latin typeface="Arial" pitchFamily="34" charset="0"/>
-                <a:ea typeface="Arial" pitchFamily="34" charset="-122"/>
-                <a:cs typeface="Arial" pitchFamily="34" charset="-120"/>
-              </a:rPr>
-              <a:t>100 000 − 23 456</a:t>
-            </a:r>
-            <a:pPr algn="l" indent="0" marL="0">
-              <a:lnSpc>
-                <a:spcPts val="1620"/>
-              </a:lnSpc>
-              <a:spcAft>
-                <a:spcPts val="300"/>
-              </a:spcAft>
-              <a:buNone/>
-            </a:pPr>
-            <a:r>
-              <a:rPr lang="en-US" sz="1200" dirty="0">
-                <a:solidFill>
-                  <a:srgbClr val="1C2833"/>
-                </a:solidFill>
-                <a:latin typeface="Arial" pitchFamily="34" charset="0"/>
-                <a:ea typeface="Arial" pitchFamily="34" charset="-122"/>
-                <a:cs typeface="Arial" pitchFamily="34" charset="-120"/>
-              </a:rPr>
-              <a:t> — 9-2, 9-3, 9-4, 9-5, 10-6 = 7, 6, 5, 4, 4 · </a:t>
-            </a:r>
-            <a:pPr algn="l" indent="0" marL="0">
-              <a:lnSpc>
-                <a:spcPts val="1620"/>
-              </a:lnSpc>
-              <a:spcAft>
-                <a:spcPts val="300"/>
-              </a:spcAft>
-              <a:buNone/>
-            </a:pPr>
-            <a:r>
-              <a:rPr lang="en-US" sz="1200" b="1" dirty="0">
-                <a:solidFill>
-                  <a:srgbClr val="1C2833"/>
-                </a:solidFill>
-                <a:latin typeface="Arial" pitchFamily="34" charset="0"/>
-                <a:ea typeface="Arial" pitchFamily="34" charset="-122"/>
-                <a:cs typeface="Arial" pitchFamily="34" charset="-120"/>
-              </a:rPr>
-              <a:t>76 544</a:t>
-            </a:r>
-            <a:endParaRPr lang="en-US" sz="1200" dirty="0"/>
-          </a:p>
-        </p:txBody>
-      </p:sp>
-      <p:sp>
-        <p:nvSpPr>
-          <p:cNvPr id="13" name="Text 11"/>
-          <p:cNvSpPr/>
-          <p:nvPr/>
-        </p:nvSpPr>
-        <p:spPr>
-          <a:xfrm>
-            <a:off x="634901" y="4706838"/>
-            <a:ext cx="8102798" cy="525661"/>
-          </a:xfrm>
-          <a:prstGeom prst="rect">
-            <a:avLst/>
-          </a:prstGeom>
-          <a:noFill/>
-          <a:ln/>
-        </p:spPr>
-        <p:txBody>
-          <a:bodyPr wrap="square" lIns="0" tIns="0" rIns="0" bIns="0" rtlCol="0" anchor="t"/>
-          <a:lstStyle/>
-          <a:p>
-            <a:pPr algn="l" marL="342900" indent="-342900">
-              <a:lnSpc>
-                <a:spcPts val="1620"/>
-              </a:lnSpc>
-              <a:spcAft>
-                <a:spcPts val="300"/>
-              </a:spcAft>
-              <a:buSzPct val="100000"/>
-              <a:buChar char="•"/>
-            </a:pPr>
-            <a:r>
-              <a:rPr lang="en-US" sz="1200" b="1" dirty="0">
-                <a:solidFill>
-                  <a:srgbClr val="1C2833"/>
-                </a:solidFill>
-                <a:latin typeface="Arial" pitchFamily="34" charset="0"/>
-                <a:ea typeface="Arial" pitchFamily="34" charset="-122"/>
-                <a:cs typeface="Arial" pitchFamily="34" charset="-120"/>
-              </a:rPr>
-              <a:t>The padding rule.</a:t>
-            </a:r>
-            <a:pPr algn="l" indent="0" marL="0">
-              <a:lnSpc>
-                <a:spcPts val="1620"/>
-              </a:lnSpc>
-              <a:spcAft>
-                <a:spcPts val="300"/>
-              </a:spcAft>
-              <a:buNone/>
-            </a:pPr>
-            <a:r>
-              <a:rPr lang="en-US" sz="1200" dirty="0">
-                <a:solidFill>
-                  <a:srgbClr val="1C2833"/>
-                </a:solidFill>
-                <a:latin typeface="Arial" pitchFamily="34" charset="0"/>
-                <a:ea typeface="Arial" pitchFamily="34" charset="-122"/>
-                <a:cs typeface="Arial" pitchFamily="34" charset="-120"/>
-              </a:rPr>
-              <a:t> </a:t>
-            </a:r>
-            <a:pPr algn="l" indent="0" marL="0">
-              <a:lnSpc>
-                <a:spcPts val="1620"/>
-              </a:lnSpc>
-              <a:spcAft>
-                <a:spcPts val="300"/>
-              </a:spcAft>
-              <a:buNone/>
-            </a:pPr>
-            <a:r>
-              <a:rPr lang="en-US" sz="1200" i="1" dirty="0">
-                <a:solidFill>
-                  <a:srgbClr val="1C2833"/>
-                </a:solidFill>
-                <a:latin typeface="Arial" pitchFamily="34" charset="0"/>
-                <a:ea typeface="Arial" pitchFamily="34" charset="-122"/>
-                <a:cs typeface="Arial" pitchFamily="34" charset="-120"/>
-              </a:rPr>
-              <a:t>"If A has fewer digits than the base 10ⁿ, pad A with leading zeros. 89 in </a:t>
-            </a:r>
-            <a:pPr algn="l" indent="0" marL="0">
-              <a:lnSpc>
-                <a:spcPts val="1620"/>
-              </a:lnSpc>
-              <a:spcAft>
-                <a:spcPts val="300"/>
-              </a:spcAft>
-              <a:buNone/>
-            </a:pPr>
-            <a:r>
-              <a:rPr lang="en-US" sz="1200" i="1" dirty="0">
-                <a:solidFill>
-                  <a:srgbClr val="1C2833"/>
-                </a:solidFill>
-                <a:latin typeface="Arial" pitchFamily="34" charset="0"/>
-                <a:ea typeface="Arial" pitchFamily="34" charset="-122"/>
-                <a:cs typeface="Arial" pitchFamily="34" charset="-120"/>
-              </a:rPr>
-              <a:t>10000 − 89</a:t>
-            </a:r>
-            <a:pPr algn="l" indent="0" marL="0">
-              <a:lnSpc>
-                <a:spcPts val="1620"/>
-              </a:lnSpc>
-              <a:spcAft>
-                <a:spcPts val="300"/>
-              </a:spcAft>
-              <a:buNone/>
-            </a:pPr>
-            <a:r>
-              <a:rPr lang="en-US" sz="1200" i="1" dirty="0">
-                <a:solidFill>
-                  <a:srgbClr val="1C2833"/>
-                </a:solidFill>
-                <a:latin typeface="Arial" pitchFamily="34" charset="0"/>
-                <a:ea typeface="Arial" pitchFamily="34" charset="-122"/>
-                <a:cs typeface="Arial" pitchFamily="34" charset="-120"/>
-              </a:rPr>
-              <a:t> becomes </a:t>
-            </a:r>
-            <a:pPr algn="l" indent="0" marL="0">
-              <a:lnSpc>
-                <a:spcPts val="1620"/>
-              </a:lnSpc>
-              <a:spcAft>
-                <a:spcPts val="300"/>
-              </a:spcAft>
-              <a:buNone/>
-            </a:pPr>
-            <a:r>
-              <a:rPr lang="en-US" sz="1200" i="1" dirty="0">
-                <a:solidFill>
-                  <a:srgbClr val="1C2833"/>
-                </a:solidFill>
-                <a:latin typeface="Arial" pitchFamily="34" charset="0"/>
-                <a:ea typeface="Arial" pitchFamily="34" charset="-122"/>
-                <a:cs typeface="Arial" pitchFamily="34" charset="-120"/>
-              </a:rPr>
-              <a:t>0089</a:t>
-            </a:r>
-            <a:pPr algn="l" indent="0" marL="0">
-              <a:lnSpc>
-                <a:spcPts val="1620"/>
-              </a:lnSpc>
-              <a:spcAft>
-                <a:spcPts val="300"/>
-              </a:spcAft>
-              <a:buNone/>
-            </a:pPr>
-            <a:r>
-              <a:rPr lang="en-US" sz="1200" i="1" dirty="0">
-                <a:solidFill>
-                  <a:srgbClr val="1C2833"/>
-                </a:solidFill>
-                <a:latin typeface="Arial" pitchFamily="34" charset="0"/>
-                <a:ea typeface="Arial" pitchFamily="34" charset="-122"/>
-                <a:cs typeface="Arial" pitchFamily="34" charset="-120"/>
-              </a:rPr>
-              <a:t>. The Nikhilam rule needs as many digits as the base has zeros."</a:t>
-            </a:r>
-            <a:endParaRPr lang="en-US" sz="1200" dirty="0"/>
-          </a:p>
-        </p:txBody>
-      </p:sp>
-      <p:sp>
-        <p:nvSpPr>
-          <p:cNvPr id="14" name="Text 12"/>
-          <p:cNvSpPr/>
-          <p:nvPr/>
-        </p:nvSpPr>
-        <p:spPr>
-          <a:xfrm>
-            <a:off x="406301" y="5397550"/>
+            <a:off x="406301" y="4434929"/>
             <a:ext cx="8498026" cy="213271"/>
           </a:xfrm>
           <a:prstGeom prst="rect">
@@ -5731,7 +6858,7 @@
                 <a:ea typeface="Georgia" pitchFamily="34" charset="-122"/>
                 <a:cs typeface="Georgia" pitchFamily="34" charset="-120"/>
               </a:rPr>
-              <a:t>Activity (20 min) — Complement Drill (timed pairs)</a:t>
+              <a:t>Core (10 min) — The shift from "complement" to "subtraction"</a:t>
             </a:r>
             <a:endParaRPr lang="en-US" sz="1800" dirty="0"/>
           </a:p>
@@ -5745,8 +6872,8 @@
         </p:nvSpPr>
         <p:spPr>
           <a:xfrm>
-            <a:off x="406301" y="870942"/>
-            <a:ext cx="8498026" cy="222796"/>
+            <a:off x="634901" y="883593"/>
+            <a:ext cx="8102798" cy="281880"/>
           </a:xfrm>
           <a:prstGeom prst="rect">
             <a:avLst/>
@@ -5758,13 +6885,31 @@
           <a:bodyPr wrap="square" lIns="0" tIns="0" rIns="0" bIns="0" rtlCol="0" anchor="t"/>
           <a:lstStyle/>
           <a:p>
-            <a:pPr algn="l" indent="0" marL="0">
-              <a:lnSpc>
-                <a:spcPts val="1680"/>
-              </a:lnSpc>
-              <a:spcBef>
-                <a:spcPts val="300"/>
-              </a:spcBef>
+            <a:pPr algn="l" marL="342900" indent="-342900">
+              <a:lnSpc>
+                <a:spcPts val="1620"/>
+              </a:lnSpc>
+              <a:spcAft>
+                <a:spcPts val="300"/>
+              </a:spcAft>
+              <a:buSzPct val="100000"/>
+              <a:buChar char="•"/>
+            </a:pPr>
+            <a:r>
+              <a:rPr lang="en-US" sz="1200" b="1" dirty="0">
+                <a:solidFill>
+                  <a:srgbClr val="1C2833"/>
+                </a:solidFill>
+                <a:latin typeface="Arial" pitchFamily="34" charset="0"/>
+                <a:ea typeface="Arial" pitchFamily="34" charset="-122"/>
+                <a:cs typeface="Arial" pitchFamily="34" charset="-120"/>
+              </a:rPr>
+              <a:t>The pivot.</a:t>
+            </a:r>
+            <a:pPr algn="l" indent="0" marL="0">
+              <a:lnSpc>
+                <a:spcPts val="1620"/>
+              </a:lnSpc>
               <a:spcAft>
                 <a:spcPts val="300"/>
               </a:spcAft>
@@ -5779,53 +6924,7 @@
                 <a:ea typeface="Arial" pitchFamily="34" charset="-122"/>
                 <a:cs typeface="Arial" pitchFamily="34" charset="-120"/>
               </a:rPr>
-              <a:t>See </a:t>
-            </a:r>
-            <a:pPr algn="l" indent="0" marL="0">
-              <a:lnSpc>
-                <a:spcPts val="1680"/>
-              </a:lnSpc>
-              <a:spcBef>
-                <a:spcPts val="300"/>
-              </a:spcBef>
-              <a:spcAft>
-                <a:spcPts val="300"/>
-              </a:spcAft>
-              <a:buNone/>
-            </a:pPr>
-            <a:r>
-              <a:rPr lang="en-US" sz="1200" dirty="0">
-                <a:solidFill>
-                  <a:srgbClr val="1C2833"/>
-                </a:solidFill>
-                <a:latin typeface="Arial" pitchFamily="34" charset="0"/>
-                <a:ea typeface="Arial" pitchFamily="34" charset="-122"/>
-                <a:cs typeface="Arial" pitchFamily="34" charset="-120"/>
-              </a:rPr>
-              <a:t>activities/activity-01-complement-drill.md</a:t>
-            </a:r>
-            <a:pPr algn="l" indent="0" marL="0">
-              <a:lnSpc>
-                <a:spcPts val="1680"/>
-              </a:lnSpc>
-              <a:spcBef>
-                <a:spcPts val="300"/>
-              </a:spcBef>
-              <a:spcAft>
-                <a:spcPts val="300"/>
-              </a:spcAft>
-              <a:buNone/>
-            </a:pPr>
-            <a:r>
-              <a:rPr lang="en-US" sz="1200" dirty="0">
-                <a:solidFill>
-                  <a:srgbClr val="1C2833"/>
-                </a:solidFill>
-                <a:latin typeface="Arial" pitchFamily="34" charset="0"/>
-                <a:ea typeface="Arial" pitchFamily="34" charset="-122"/>
-                <a:cs typeface="Arial" pitchFamily="34" charset="-120"/>
-              </a:rPr>
-              <a:t>.</a:t>
+              <a:t> Write on the board:</a:t>
             </a:r>
             <a:endParaRPr lang="en-US" sz="1200" dirty="0"/>
           </a:p>
@@ -5839,8 +6938,61 @@
         </p:nvSpPr>
         <p:spPr>
           <a:xfrm>
-            <a:off x="406301" y="1169938"/>
-            <a:ext cx="8498026" cy="436066"/>
+            <a:off x="406301" y="1266974"/>
+            <a:ext cx="8331398" cy="428476"/>
+          </a:xfrm>
+          <a:prstGeom prst="rect">
+            <a:avLst/>
+          </a:prstGeom>
+          <a:solidFill>
+            <a:srgbClr val="F4F8F9"/>
+          </a:solidFill>
+          <a:ln/>
+        </p:spPr>
+        <p:txBody>
+          <a:bodyPr wrap="square" rtlCol="0" anchor="ctr"/>
+          <a:lstStyle/>
+          <a:p>
+            <a:pPr indent="0" marL="0">
+              <a:buNone/>
+            </a:pPr>
+            <a:endParaRPr lang="en-US" dirty="0"/>
+          </a:p>
+        </p:txBody>
+      </p:sp>
+      <p:sp>
+        <p:nvSpPr>
+          <p:cNvPr id="6" name="Shape 4"/>
+          <p:cNvSpPr/>
+          <p:nvPr/>
+        </p:nvSpPr>
+        <p:spPr>
+          <a:xfrm>
+            <a:off x="430113" y="1266974"/>
+            <a:ext cx="0" cy="428476"/>
+          </a:xfrm>
+          <a:prstGeom prst="line">
+            <a:avLst/>
+          </a:prstGeom>
+          <a:noFill/>
+          <a:ln w="47625">
+            <a:solidFill>
+              <a:srgbClr val="277884"/>
+            </a:solidFill>
+            <a:prstDash val="solid"/>
+          </a:ln>
+        </p:spPr>
+      </p:sp>
+      <p:sp>
+        <p:nvSpPr>
+          <p:cNvPr id="7" name="Text 5"/>
+          <p:cNvSpPr/>
+          <p:nvPr/>
+        </p:nvSpPr>
+        <p:spPr>
+          <a:xfrm>
+            <a:off x="631627" y="1393924"/>
+            <a:ext cx="8086939" cy="174575"/>
           </a:xfrm>
           <a:prstGeom prst="rect">
             <a:avLst/>
@@ -5854,6 +7006,48 @@
           <a:p>
             <a:pPr algn="l" indent="0" marL="0">
               <a:lnSpc>
+                <a:spcPts val="1375"/>
+              </a:lnSpc>
+              <a:buNone/>
+            </a:pPr>
+            <a:r>
+              <a:rPr lang="en-US" sz="1100" dirty="0">
+                <a:solidFill>
+                  <a:srgbClr val="1C2833"/>
+                </a:solidFill>
+                <a:latin typeface="Courier New" pitchFamily="34" charset="0"/>
+                <a:ea typeface="Courier New" pitchFamily="34" charset="-122"/>
+                <a:cs typeface="Courier New" pitchFamily="34" charset="-120"/>
+              </a:rPr>
+              <a:t>1000  −  567  =  ?</a:t>
+            </a:r>
+            <a:endParaRPr lang="en-US" sz="1100" dirty="0"/>
+          </a:p>
+        </p:txBody>
+      </p:sp>
+      <p:sp>
+        <p:nvSpPr>
+          <p:cNvPr id="8" name="Text 6"/>
+          <p:cNvSpPr/>
+          <p:nvPr/>
+        </p:nvSpPr>
+        <p:spPr>
+          <a:xfrm>
+            <a:off x="406301" y="1784300"/>
+            <a:ext cx="8498026" cy="213271"/>
+          </a:xfrm>
+          <a:prstGeom prst="rect">
+            <a:avLst/>
+          </a:prstGeom>
+          <a:noFill/>
+          <a:ln/>
+        </p:spPr>
+        <p:txBody>
+          <a:bodyPr wrap="square" lIns="0" tIns="0" rIns="0" bIns="0" rtlCol="0" anchor="t"/>
+          <a:lstStyle/>
+          <a:p>
+            <a:pPr algn="l" indent="0" marL="0">
+              <a:lnSpc>
                 <a:spcPts val="1680"/>
               </a:lnSpc>
               <a:spcBef>
@@ -5865,153 +7059,15 @@
               <a:buNone/>
             </a:pPr>
             <a:r>
-              <a:rPr lang="en-US" sz="1200" dirty="0">
-                <a:solidFill>
-                  <a:srgbClr val="1C2833"/>
-                </a:solidFill>
-                <a:latin typeface="Arial" pitchFamily="34" charset="0"/>
-                <a:ea typeface="Arial" pitchFamily="34" charset="-122"/>
-                <a:cs typeface="Arial" pitchFamily="34" charset="-120"/>
-              </a:rPr>
-              <a:t>– 8 problems on a sheet. Mixed bases: 4 are </a:t>
-            </a:r>
-            <a:pPr algn="l" indent="0" marL="0">
-              <a:lnSpc>
-                <a:spcPts val="1680"/>
-              </a:lnSpc>
-              <a:spcBef>
-                <a:spcPts val="300"/>
-              </a:spcBef>
-              <a:spcAft>
-                <a:spcPts val="300"/>
-              </a:spcAft>
-              <a:buNone/>
-            </a:pPr>
-            <a:r>
-              <a:rPr lang="en-US" sz="1200" dirty="0">
-                <a:solidFill>
-                  <a:srgbClr val="1C2833"/>
-                </a:solidFill>
-                <a:latin typeface="Arial" pitchFamily="34" charset="0"/>
-                <a:ea typeface="Arial" pitchFamily="34" charset="-122"/>
-                <a:cs typeface="Arial" pitchFamily="34" charset="-120"/>
-              </a:rPr>
-              <a:t>1000 − X</a:t>
-            </a:r>
-            <a:pPr algn="l" indent="0" marL="0">
-              <a:lnSpc>
-                <a:spcPts val="1680"/>
-              </a:lnSpc>
-              <a:spcBef>
-                <a:spcPts val="300"/>
-              </a:spcBef>
-              <a:spcAft>
-                <a:spcPts val="300"/>
-              </a:spcAft>
-              <a:buNone/>
-            </a:pPr>
-            <a:r>
-              <a:rPr lang="en-US" sz="1200" dirty="0">
-                <a:solidFill>
-                  <a:srgbClr val="1C2833"/>
-                </a:solidFill>
-                <a:latin typeface="Arial" pitchFamily="34" charset="0"/>
-                <a:ea typeface="Arial" pitchFamily="34" charset="-122"/>
-                <a:cs typeface="Arial" pitchFamily="34" charset="-120"/>
-              </a:rPr>
-              <a:t>, 3 are </a:t>
-            </a:r>
-            <a:pPr algn="l" indent="0" marL="0">
-              <a:lnSpc>
-                <a:spcPts val="1680"/>
-              </a:lnSpc>
-              <a:spcBef>
-                <a:spcPts val="300"/>
-              </a:spcBef>
-              <a:spcAft>
-                <a:spcPts val="300"/>
-              </a:spcAft>
-              <a:buNone/>
-            </a:pPr>
-            <a:r>
-              <a:rPr lang="en-US" sz="1200" dirty="0">
-                <a:solidFill>
-                  <a:srgbClr val="1C2833"/>
-                </a:solidFill>
-                <a:latin typeface="Arial" pitchFamily="34" charset="0"/>
-                <a:ea typeface="Arial" pitchFamily="34" charset="-122"/>
-                <a:cs typeface="Arial" pitchFamily="34" charset="-120"/>
-              </a:rPr>
-              <a:t>10 000 − X</a:t>
-            </a:r>
-            <a:pPr algn="l" indent="0" marL="0">
-              <a:lnSpc>
-                <a:spcPts val="1680"/>
-              </a:lnSpc>
-              <a:spcBef>
-                <a:spcPts val="300"/>
-              </a:spcBef>
-              <a:spcAft>
-                <a:spcPts val="300"/>
-              </a:spcAft>
-              <a:buNone/>
-            </a:pPr>
-            <a:r>
-              <a:rPr lang="en-US" sz="1200" dirty="0">
-                <a:solidFill>
-                  <a:srgbClr val="1C2833"/>
-                </a:solidFill>
-                <a:latin typeface="Arial" pitchFamily="34" charset="0"/>
-                <a:ea typeface="Arial" pitchFamily="34" charset="-122"/>
-                <a:cs typeface="Arial" pitchFamily="34" charset="-120"/>
-              </a:rPr>
-              <a:t>, 1 is </a:t>
-            </a:r>
-            <a:pPr algn="l" indent="0" marL="0">
-              <a:lnSpc>
-                <a:spcPts val="1680"/>
-              </a:lnSpc>
-              <a:spcBef>
-                <a:spcPts val="300"/>
-              </a:spcBef>
-              <a:spcAft>
-                <a:spcPts val="300"/>
-              </a:spcAft>
-              <a:buNone/>
-            </a:pPr>
-            <a:r>
-              <a:rPr lang="en-US" sz="1200" dirty="0">
-                <a:solidFill>
-                  <a:srgbClr val="1C2833"/>
-                </a:solidFill>
-                <a:latin typeface="Arial" pitchFamily="34" charset="0"/>
-                <a:ea typeface="Arial" pitchFamily="34" charset="-122"/>
-                <a:cs typeface="Arial" pitchFamily="34" charset="-120"/>
-              </a:rPr>
-              <a:t>100 000 − X</a:t>
-            </a:r>
-            <a:pPr algn="l" indent="0" marL="0">
-              <a:lnSpc>
-                <a:spcPts val="1680"/>
-              </a:lnSpc>
-              <a:spcBef>
-                <a:spcPts val="300"/>
-              </a:spcBef>
-              <a:spcAft>
-                <a:spcPts val="300"/>
-              </a:spcAft>
-              <a:buNone/>
-            </a:pPr>
-            <a:r>
-              <a:rPr lang="en-US" sz="1200" dirty="0">
-                <a:solidFill>
-                  <a:srgbClr val="1C2833"/>
-                </a:solidFill>
-                <a:latin typeface="Arial" pitchFamily="34" charset="0"/>
-                <a:ea typeface="Arial" pitchFamily="34" charset="-122"/>
-                <a:cs typeface="Arial" pitchFamily="34" charset="-120"/>
-              </a:rPr>
-              <a:t>. – Pair self-correction. Time the pair.</a:t>
+              <a:rPr lang="en-US" sz="1200" i="1" dirty="0">
+                <a:solidFill>
+                  <a:srgbClr val="1C2833"/>
+                </a:solidFill>
+                <a:latin typeface="Arial" pitchFamily="34" charset="0"/>
+                <a:ea typeface="Arial" pitchFamily="34" charset="-122"/>
+                <a:cs typeface="Arial" pitchFamily="34" charset="-120"/>
+              </a:rPr>
+              <a:t>"We've spent two days finding the complement. The complement of 567 to 1000 is 433. Notice that's also the answer."</a:t>
             </a:r>
             <a:endParaRPr lang="en-US" sz="1200" dirty="0"/>
           </a:p>
@@ -6019,7 +7075,7 @@
       </p:sp>
       <p:sp>
         <p:nvSpPr>
-          <p:cNvPr id="6" name="Text 4"/>
+          <p:cNvPr id="9" name="Text 7"/>
           <p:cNvSpPr/>
           <p:nvPr/>
         </p:nvSpPr>
@@ -6169,7 +7225,7 @@
                 <a:ea typeface="Georgia" pitchFamily="34" charset="-122"/>
                 <a:cs typeface="Georgia" pitchFamily="34" charset="-120"/>
               </a:rPr>
-              <a:t>Wrap-up (10 min)</a:t>
+              <a:t>Core (10 min) — The shift from "complement" to "subtraction" (cont.)</a:t>
             </a:r>
             <a:endParaRPr lang="en-US" sz="1800" dirty="0"/>
           </a:p>
@@ -6183,8 +7239,8 @@
         </p:nvSpPr>
         <p:spPr>
           <a:xfrm>
-            <a:off x="406301" y="870942"/>
-            <a:ext cx="8498026" cy="1075879"/>
+            <a:off x="634901" y="883593"/>
+            <a:ext cx="8102798" cy="487561"/>
           </a:xfrm>
           <a:prstGeom prst="rect">
             <a:avLst/>
@@ -6196,6 +7252,138 @@
           <a:bodyPr wrap="square" lIns="0" tIns="0" rIns="0" bIns="0" rtlCol="0" anchor="t"/>
           <a:lstStyle/>
           <a:p>
+            <a:pPr algn="l" marL="342900" indent="-342900">
+              <a:lnSpc>
+                <a:spcPts val="1620"/>
+              </a:lnSpc>
+              <a:spcAft>
+                <a:spcPts val="300"/>
+              </a:spcAft>
+              <a:buSzPct val="100000"/>
+              <a:buChar char="•"/>
+            </a:pPr>
+            <a:r>
+              <a:rPr lang="en-US" sz="1200" b="1" dirty="0">
+                <a:solidFill>
+                  <a:srgbClr val="1C2833"/>
+                </a:solidFill>
+                <a:latin typeface="Arial" pitchFamily="34" charset="0"/>
+                <a:ea typeface="Arial" pitchFamily="34" charset="-122"/>
+                <a:cs typeface="Arial" pitchFamily="34" charset="-120"/>
+              </a:rPr>
+              <a:t>Why?</a:t>
+            </a:r>
+            <a:pPr algn="l" indent="0" marL="0">
+              <a:lnSpc>
+                <a:spcPts val="1620"/>
+              </a:lnSpc>
+              <a:spcAft>
+                <a:spcPts val="300"/>
+              </a:spcAft>
+              <a:buNone/>
+            </a:pPr>
+            <a:r>
+              <a:rPr lang="en-US" sz="1200" dirty="0">
+                <a:solidFill>
+                  <a:srgbClr val="1C2833"/>
+                </a:solidFill>
+                <a:latin typeface="Arial" pitchFamily="34" charset="0"/>
+                <a:ea typeface="Arial" pitchFamily="34" charset="-122"/>
+                <a:cs typeface="Arial" pitchFamily="34" charset="-120"/>
+              </a:rPr>
+              <a:t> </a:t>
+            </a:r>
+            <a:pPr algn="l" indent="0" marL="0">
+              <a:lnSpc>
+                <a:spcPts val="1620"/>
+              </a:lnSpc>
+              <a:spcAft>
+                <a:spcPts val="300"/>
+              </a:spcAft>
+              <a:buNone/>
+            </a:pPr>
+            <a:r>
+              <a:rPr lang="en-US" sz="1200" i="1" dirty="0">
+                <a:solidFill>
+                  <a:srgbClr val="1C2833"/>
+                </a:solidFill>
+                <a:latin typeface="Arial" pitchFamily="34" charset="0"/>
+                <a:ea typeface="Arial" pitchFamily="34" charset="-122"/>
+                <a:cs typeface="Arial" pitchFamily="34" charset="-120"/>
+              </a:rPr>
+              <a:t>"If A + B = 1000, then 1000 − A = B and 1000 − B = A. Complement IS the difference, when you're subtracting from the base."</a:t>
+            </a:r>
+            <a:endParaRPr lang="en-US" sz="1200" dirty="0"/>
+          </a:p>
+        </p:txBody>
+      </p:sp>
+      <p:sp>
+        <p:nvSpPr>
+          <p:cNvPr id="5" name="Text 3"/>
+          <p:cNvSpPr/>
+          <p:nvPr/>
+        </p:nvSpPr>
+        <p:spPr>
+          <a:xfrm>
+            <a:off x="634901" y="1472654"/>
+            <a:ext cx="8102798" cy="281880"/>
+          </a:xfrm>
+          <a:prstGeom prst="rect">
+            <a:avLst/>
+          </a:prstGeom>
+          <a:noFill/>
+          <a:ln/>
+        </p:spPr>
+        <p:txBody>
+          <a:bodyPr wrap="square" lIns="0" tIns="0" rIns="0" bIns="0" rtlCol="0" anchor="t"/>
+          <a:lstStyle/>
+          <a:p>
+            <a:pPr algn="l" marL="342900" indent="-342900">
+              <a:lnSpc>
+                <a:spcPts val="1620"/>
+              </a:lnSpc>
+              <a:spcAft>
+                <a:spcPts val="300"/>
+              </a:spcAft>
+              <a:buSzPct val="100000"/>
+              <a:buChar char="•"/>
+            </a:pPr>
+            <a:r>
+              <a:rPr lang="en-US" sz="1200" b="1" dirty="0">
+                <a:solidFill>
+                  <a:srgbClr val="1C2833"/>
+                </a:solidFill>
+                <a:latin typeface="Arial" pitchFamily="34" charset="0"/>
+                <a:ea typeface="Arial" pitchFamily="34" charset="-122"/>
+                <a:cs typeface="Arial" pitchFamily="34" charset="-120"/>
+              </a:rPr>
+              <a:t>Worked examples, with class predicting:</a:t>
+            </a:r>
+            <a:endParaRPr lang="en-US" sz="1200" dirty="0"/>
+          </a:p>
+        </p:txBody>
+      </p:sp>
+      <p:sp>
+        <p:nvSpPr>
+          <p:cNvPr id="6" name="Text 4"/>
+          <p:cNvSpPr/>
+          <p:nvPr/>
+        </p:nvSpPr>
+        <p:spPr>
+          <a:xfrm>
+            <a:off x="406301" y="1843385"/>
+            <a:ext cx="8498026" cy="213271"/>
+          </a:xfrm>
+          <a:prstGeom prst="rect">
+            <a:avLst/>
+          </a:prstGeom>
+          <a:noFill/>
+          <a:ln/>
+        </p:spPr>
+        <p:txBody>
+          <a:bodyPr wrap="square" lIns="0" tIns="0" rIns="0" bIns="0" rtlCol="0" anchor="t"/>
+          <a:lstStyle/>
+          <a:p>
             <a:pPr algn="l" indent="0" marL="0">
               <a:lnSpc>
                 <a:spcPts val="1680"/>
@@ -6209,75 +7397,6 @@
               <a:buNone/>
             </a:pPr>
             <a:r>
-              <a:rPr lang="en-US" sz="1200" dirty="0">
-                <a:solidFill>
-                  <a:srgbClr val="1C2833"/>
-                </a:solidFill>
-                <a:latin typeface="Arial" pitchFamily="34" charset="0"/>
-                <a:ea typeface="Arial" pitchFamily="34" charset="-122"/>
-                <a:cs typeface="Arial" pitchFamily="34" charset="-120"/>
-              </a:rPr>
-              <a:t>– Compare with standard borrowing: pick one problem (say </a:t>
-            </a:r>
-            <a:pPr algn="l" indent="0" marL="0">
-              <a:lnSpc>
-                <a:spcPts val="1680"/>
-              </a:lnSpc>
-              <a:spcBef>
-                <a:spcPts val="300"/>
-              </a:spcBef>
-              <a:spcAft>
-                <a:spcPts val="300"/>
-              </a:spcAft>
-              <a:buNone/>
-            </a:pPr>
-            <a:r>
-              <a:rPr lang="en-US" sz="1200" dirty="0">
-                <a:solidFill>
-                  <a:srgbClr val="1C2833"/>
-                </a:solidFill>
-                <a:latin typeface="Arial" pitchFamily="34" charset="0"/>
-                <a:ea typeface="Arial" pitchFamily="34" charset="-122"/>
-                <a:cs typeface="Arial" pitchFamily="34" charset="-120"/>
-              </a:rPr>
-              <a:t>10 000 − 4567</a:t>
-            </a:r>
-            <a:pPr algn="l" indent="0" marL="0">
-              <a:lnSpc>
-                <a:spcPts val="1680"/>
-              </a:lnSpc>
-              <a:spcBef>
-                <a:spcPts val="300"/>
-              </a:spcBef>
-              <a:spcAft>
-                <a:spcPts val="300"/>
-              </a:spcAft>
-              <a:buNone/>
-            </a:pPr>
-            <a:r>
-              <a:rPr lang="en-US" sz="1200" dirty="0">
-                <a:solidFill>
-                  <a:srgbClr val="1C2833"/>
-                </a:solidFill>
-                <a:latin typeface="Arial" pitchFamily="34" charset="0"/>
-                <a:ea typeface="Arial" pitchFamily="34" charset="-122"/>
-                <a:cs typeface="Arial" pitchFamily="34" charset="-120"/>
-              </a:rPr>
-              <a:t>) and ask half the class to solve by borrowing, half by Nikhilam. Same time limit. See who finishes first. – Discussion: </a:t>
-            </a:r>
-            <a:pPr algn="l" indent="0" marL="0">
-              <a:lnSpc>
-                <a:spcPts val="1680"/>
-              </a:lnSpc>
-              <a:spcBef>
-                <a:spcPts val="300"/>
-              </a:spcBef>
-              <a:spcAft>
-                <a:spcPts val="300"/>
-              </a:spcAft>
-              <a:buNone/>
-            </a:pPr>
-            <a:r>
               <a:rPr lang="en-US" sz="1200" i="1" dirty="0">
                 <a:solidFill>
                   <a:srgbClr val="1C2833"/>
@@ -6286,53 +7405,7 @@
                 <a:ea typeface="Arial" pitchFamily="34" charset="-122"/>
                 <a:cs typeface="Arial" pitchFamily="34" charset="-120"/>
               </a:rPr>
-              <a:t>"When does Nikhilam beat standard borrowing? When does standard borrowing match it?"</a:t>
-            </a:r>
-            <a:pPr algn="l" indent="0" marL="0">
-              <a:lnSpc>
-                <a:spcPts val="1680"/>
-              </a:lnSpc>
-              <a:spcBef>
-                <a:spcPts val="300"/>
-              </a:spcBef>
-              <a:spcAft>
-                <a:spcPts val="300"/>
-              </a:spcAft>
-              <a:buNone/>
-            </a:pPr>
-            <a:r>
-              <a:rPr lang="en-US" sz="1200" dirty="0">
-                <a:solidFill>
-                  <a:srgbClr val="1C2833"/>
-                </a:solidFill>
-                <a:latin typeface="Arial" pitchFamily="34" charset="0"/>
-                <a:ea typeface="Arial" pitchFamily="34" charset="-122"/>
-                <a:cs typeface="Arial" pitchFamily="34" charset="-120"/>
-              </a:rPr>
-              <a:t> (Answer: Nikhilam dominates when subtracting from a round base; matches roughly when subtracting from a non-round number — that's the Day 8 topic.) – Preview Day 5: </a:t>
-            </a:r>
-            <a:pPr algn="l" indent="0" marL="0">
-              <a:lnSpc>
-                <a:spcPts val="1680"/>
-              </a:lnSpc>
-              <a:spcBef>
-                <a:spcPts val="300"/>
-              </a:spcBef>
-              <a:spcAft>
-                <a:spcPts val="300"/>
-              </a:spcAft>
-              <a:buNone/>
-            </a:pPr>
-            <a:r>
-              <a:rPr lang="en-US" sz="1200" i="1" dirty="0">
-                <a:solidFill>
-                  <a:srgbClr val="1C2833"/>
-                </a:solidFill>
-                <a:latin typeface="Arial" pitchFamily="34" charset="0"/>
-                <a:ea typeface="Arial" pitchFamily="34" charset="-122"/>
-                <a:cs typeface="Arial" pitchFamily="34" charset="-120"/>
-              </a:rPr>
-              <a:t>"Tomorrow — mid-module retest of the Day 1 baseline. Same problem. Different speed."</a:t>
+              <a:t>Each row: Problem · Working · Answer.</a:t>
             </a:r>
             <a:endParaRPr lang="en-US" sz="1200" dirty="0"/>
           </a:p>
@@ -6340,7 +7413,7 @@
       </p:sp>
       <p:sp>
         <p:nvSpPr>
-          <p:cNvPr id="5" name="Text 3"/>
+          <p:cNvPr id="7" name="Text 5"/>
           <p:cNvSpPr/>
           <p:nvPr/>
         </p:nvSpPr>
@@ -6490,7 +7563,7 @@
                 <a:ea typeface="Georgia" pitchFamily="34" charset="-122"/>
                 <a:cs typeface="Georgia" pitchFamily="34" charset="-120"/>
               </a:rPr>
-              <a:t>Student-facing content</a:t>
+              <a:t>Core (10 min) — The shift from "complement" to "subtraction" (cont.)</a:t>
             </a:r>
             <a:endParaRPr lang="en-US" sz="1800" dirty="0"/>
           </a:p>
@@ -6504,61 +7577,8 @@
         </p:nvSpPr>
         <p:spPr>
           <a:xfrm>
-            <a:off x="406301" y="883593"/>
-            <a:ext cx="8331398" cy="1938337"/>
-          </a:xfrm>
-          <a:prstGeom prst="rect">
-            <a:avLst/>
-          </a:prstGeom>
-          <a:solidFill>
-            <a:srgbClr val="F4F8F9"/>
-          </a:solidFill>
-          <a:ln/>
-        </p:spPr>
-        <p:txBody>
-          <a:bodyPr wrap="square" rtlCol="0" anchor="ctr"/>
-          <a:lstStyle/>
-          <a:p>
-            <a:pPr indent="0" marL="0">
-              <a:buNone/>
-            </a:pPr>
-            <a:endParaRPr lang="en-US" dirty="0"/>
-          </a:p>
-        </p:txBody>
-      </p:sp>
-      <p:sp>
-        <p:nvSpPr>
-          <p:cNvPr id="5" name="Shape 3"/>
-          <p:cNvSpPr/>
-          <p:nvPr/>
-        </p:nvSpPr>
-        <p:spPr>
-          <a:xfrm>
-            <a:off x="434876" y="883593"/>
-            <a:ext cx="0" cy="1938337"/>
-          </a:xfrm>
-          <a:prstGeom prst="line">
-            <a:avLst/>
-          </a:prstGeom>
-          <a:noFill/>
-          <a:ln w="57150">
-            <a:solidFill>
-              <a:srgbClr val="FE4447"/>
-            </a:solidFill>
-            <a:prstDash val="solid"/>
-          </a:ln>
-        </p:spPr>
-      </p:sp>
-      <p:sp>
-        <p:nvSpPr>
-          <p:cNvPr id="6" name="Text 4"/>
-          <p:cNvSpPr/>
-          <p:nvPr/>
-        </p:nvSpPr>
-        <p:spPr>
-          <a:xfrm>
-            <a:off x="692051" y="1074093"/>
-            <a:ext cx="7973389" cy="230981"/>
+            <a:off x="634901" y="883593"/>
+            <a:ext cx="8102798" cy="1257002"/>
           </a:xfrm>
           <a:prstGeom prst="rect">
             <a:avLst/>
@@ -6570,320 +7590,350 @@
           <a:bodyPr wrap="square" lIns="0" tIns="0" rIns="0" bIns="0" rtlCol="0" anchor="t"/>
           <a:lstStyle/>
           <a:p>
-            <a:pPr algn="l" indent="0" marL="0">
-              <a:lnSpc>
-                <a:spcPts val="1820"/>
-              </a:lnSpc>
-              <a:spcBef>
-                <a:spcPts val="300"/>
-              </a:spcBef>
-              <a:spcAft>
-                <a:spcPts val="300"/>
-              </a:spcAft>
-              <a:buNone/>
-            </a:pPr>
-            <a:r>
-              <a:rPr lang="en-US" sz="1300" b="1" i="1" dirty="0">
-                <a:solidFill>
-                  <a:srgbClr val="1C2833"/>
-                </a:solidFill>
-                <a:latin typeface="Georgia" pitchFamily="34" charset="0"/>
-                <a:ea typeface="Georgia" pitchFamily="34" charset="-122"/>
-                <a:cs typeface="Georgia" pitchFamily="34" charset="-120"/>
-              </a:rPr>
-              <a:t>Subtracting from a Power of Ten</a:t>
-            </a:r>
-            <a:endParaRPr lang="en-US" sz="1300" dirty="0"/>
-          </a:p>
-        </p:txBody>
-      </p:sp>
-      <p:sp>
-        <p:nvSpPr>
-          <p:cNvPr id="7" name="Text 5"/>
-          <p:cNvSpPr/>
-          <p:nvPr/>
-        </p:nvSpPr>
-        <p:spPr>
-          <a:xfrm>
-            <a:off x="692051" y="1343174"/>
-            <a:ext cx="7973389" cy="250031"/>
-          </a:xfrm>
-          <a:prstGeom prst="rect">
-            <a:avLst/>
-          </a:prstGeom>
-          <a:noFill/>
-          <a:ln/>
-        </p:spPr>
-        <p:txBody>
-          <a:bodyPr wrap="square" lIns="0" tIns="0" rIns="0" bIns="0" rtlCol="0" anchor="t"/>
-          <a:lstStyle/>
-          <a:p>
-            <a:pPr algn="l" indent="0" marL="0">
-              <a:lnSpc>
-                <a:spcPts val="1820"/>
-              </a:lnSpc>
-              <a:spcBef>
-                <a:spcPts val="300"/>
-              </a:spcBef>
-              <a:spcAft>
-                <a:spcPts val="300"/>
-              </a:spcAft>
-              <a:buNone/>
-            </a:pPr>
-            <a:r>
-              <a:rPr lang="en-US" sz="1300" dirty="0">
-                <a:solidFill>
-                  <a:srgbClr val="1C2833"/>
-                </a:solidFill>
-                <a:latin typeface="Georgia" pitchFamily="34" charset="0"/>
-                <a:ea typeface="Georgia" pitchFamily="34" charset="-122"/>
-                <a:cs typeface="Georgia" pitchFamily="34" charset="-120"/>
-              </a:rPr>
-              <a:t>To compute </a:t>
-            </a:r>
-            <a:pPr algn="l" indent="0" marL="0">
-              <a:lnSpc>
-                <a:spcPts val="1820"/>
-              </a:lnSpc>
-              <a:spcBef>
-                <a:spcPts val="300"/>
-              </a:spcBef>
-              <a:spcAft>
-                <a:spcPts val="300"/>
-              </a:spcAft>
-              <a:buNone/>
-            </a:pPr>
-            <a:r>
-              <a:rPr lang="en-US" sz="1300" i="1" dirty="0">
-                <a:solidFill>
-                  <a:srgbClr val="1C2833"/>
-                </a:solidFill>
-                <a:latin typeface="Georgia" pitchFamily="34" charset="0"/>
-                <a:ea typeface="Georgia" pitchFamily="34" charset="-122"/>
-                <a:cs typeface="Georgia" pitchFamily="34" charset="-120"/>
-              </a:rPr>
-              <a:t>10ⁿ − A</a:t>
-            </a:r>
-            <a:pPr algn="l" indent="0" marL="0">
-              <a:lnSpc>
-                <a:spcPts val="1820"/>
-              </a:lnSpc>
-              <a:spcBef>
-                <a:spcPts val="300"/>
-              </a:spcBef>
-              <a:spcAft>
-                <a:spcPts val="300"/>
-              </a:spcAft>
-              <a:buNone/>
-            </a:pPr>
-            <a:r>
-              <a:rPr lang="en-US" sz="1300" dirty="0">
-                <a:solidFill>
-                  <a:srgbClr val="1C2833"/>
-                </a:solidFill>
-                <a:latin typeface="Georgia" pitchFamily="34" charset="0"/>
-                <a:ea typeface="Georgia" pitchFamily="34" charset="-122"/>
-                <a:cs typeface="Georgia" pitchFamily="34" charset="-120"/>
-              </a:rPr>
-              <a:t>:</a:t>
-            </a:r>
-            <a:endParaRPr lang="en-US" sz="1300" dirty="0"/>
-          </a:p>
-        </p:txBody>
-      </p:sp>
-      <p:sp>
-        <p:nvSpPr>
-          <p:cNvPr id="8" name="Text 6"/>
-          <p:cNvSpPr/>
-          <p:nvPr/>
-        </p:nvSpPr>
-        <p:spPr>
-          <a:xfrm>
-            <a:off x="692051" y="1631305"/>
-            <a:ext cx="7973389" cy="461963"/>
-          </a:xfrm>
-          <a:prstGeom prst="rect">
-            <a:avLst/>
-          </a:prstGeom>
-          <a:noFill/>
-          <a:ln/>
-        </p:spPr>
-        <p:txBody>
-          <a:bodyPr wrap="square" lIns="0" tIns="0" rIns="0" bIns="0" rtlCol="0" anchor="t"/>
-          <a:lstStyle/>
-          <a:p>
-            <a:pPr algn="l" indent="0" marL="0">
-              <a:lnSpc>
-                <a:spcPts val="1820"/>
-              </a:lnSpc>
-              <a:spcBef>
-                <a:spcPts val="300"/>
-              </a:spcBef>
-              <a:spcAft>
-                <a:spcPts val="300"/>
-              </a:spcAft>
-              <a:buNone/>
-            </a:pPr>
-            <a:r>
-              <a:rPr lang="en-US" sz="1300" i="1" dirty="0">
-                <a:solidFill>
-                  <a:srgbClr val="1C2833"/>
-                </a:solidFill>
-                <a:latin typeface="Georgia" pitchFamily="34" charset="0"/>
-                <a:ea typeface="Georgia" pitchFamily="34" charset="-122"/>
-                <a:cs typeface="Georgia" pitchFamily="34" charset="-120"/>
-              </a:rPr>
-              <a:t>1. Make sure A has exactly n digits (pad with leading zeros if needed). 2. Apply the Nikhilam rule digit-by-digit: each digit "from 9," last digit "from 10." 3. Read off the answer.</a:t>
-            </a:r>
-            <a:endParaRPr lang="en-US" sz="1300" dirty="0"/>
-          </a:p>
-        </p:txBody>
-      </p:sp>
-      <p:sp>
-        <p:nvSpPr>
-          <p:cNvPr id="9" name="Text 7"/>
-          <p:cNvSpPr/>
-          <p:nvPr/>
-        </p:nvSpPr>
-        <p:spPr>
-          <a:xfrm>
-            <a:off x="692051" y="2131368"/>
-            <a:ext cx="7973389" cy="230981"/>
-          </a:xfrm>
-          <a:prstGeom prst="rect">
-            <a:avLst/>
-          </a:prstGeom>
-          <a:noFill/>
-          <a:ln/>
-        </p:spPr>
-        <p:txBody>
-          <a:bodyPr wrap="square" lIns="0" tIns="0" rIns="0" bIns="0" rtlCol="0" anchor="t"/>
-          <a:lstStyle/>
-          <a:p>
-            <a:pPr algn="l" indent="0" marL="0">
-              <a:lnSpc>
-                <a:spcPts val="1820"/>
-              </a:lnSpc>
-              <a:spcBef>
-                <a:spcPts val="300"/>
-              </a:spcBef>
-              <a:spcAft>
-                <a:spcPts val="300"/>
-              </a:spcAft>
-              <a:buNone/>
-            </a:pPr>
-            <a:r>
-              <a:rPr lang="en-US" sz="1300" i="1" dirty="0">
-                <a:solidFill>
-                  <a:srgbClr val="1C2833"/>
-                </a:solidFill>
-                <a:latin typeface="Georgia" pitchFamily="34" charset="0"/>
-                <a:ea typeface="Georgia" pitchFamily="34" charset="-122"/>
-                <a:cs typeface="Georgia" pitchFamily="34" charset="-120"/>
-              </a:rPr>
-              <a:t>No borrowing required. Verify by adding: original + answer = base.</a:t>
-            </a:r>
-            <a:endParaRPr lang="en-US" sz="1300" dirty="0"/>
-          </a:p>
-        </p:txBody>
-      </p:sp>
-      <p:sp>
-        <p:nvSpPr>
-          <p:cNvPr id="10" name="Text 8"/>
-          <p:cNvSpPr/>
-          <p:nvPr/>
-        </p:nvSpPr>
-        <p:spPr>
-          <a:xfrm>
-            <a:off x="692051" y="2400449"/>
-            <a:ext cx="7973389" cy="230981"/>
-          </a:xfrm>
-          <a:prstGeom prst="rect">
-            <a:avLst/>
-          </a:prstGeom>
-          <a:noFill/>
-          <a:ln/>
-        </p:spPr>
-        <p:txBody>
-          <a:bodyPr wrap="square" lIns="0" tIns="0" rIns="0" bIns="0" rtlCol="0" anchor="t"/>
-          <a:lstStyle/>
-          <a:p>
-            <a:pPr algn="l" indent="0" marL="0">
-              <a:lnSpc>
-                <a:spcPts val="1820"/>
-              </a:lnSpc>
-              <a:spcBef>
-                <a:spcPts val="300"/>
-              </a:spcBef>
-              <a:spcAft>
-                <a:spcPts val="300"/>
-              </a:spcAft>
-              <a:buNone/>
-            </a:pPr>
-            <a:r>
-              <a:rPr lang="en-US" sz="1300" dirty="0">
-                <a:solidFill>
-                  <a:srgbClr val="1C2833"/>
-                </a:solidFill>
-                <a:latin typeface="Georgia" pitchFamily="34" charset="0"/>
-                <a:ea typeface="Georgia" pitchFamily="34" charset="-122"/>
-                <a:cs typeface="Georgia" pitchFamily="34" charset="-120"/>
-              </a:rPr>
-              <a:t>&gt; Tirthaji's sūtra (1965): </a:t>
-            </a:r>
-            <a:pPr algn="l" indent="0" marL="0">
-              <a:lnSpc>
-                <a:spcPts val="1820"/>
-              </a:lnSpc>
-              <a:spcBef>
-                <a:spcPts val="300"/>
-              </a:spcBef>
-              <a:spcAft>
-                <a:spcPts val="300"/>
-              </a:spcAft>
-              <a:buNone/>
-            </a:pPr>
-            <a:r>
-              <a:rPr lang="en-US" sz="1300" i="1" dirty="0">
-                <a:solidFill>
-                  <a:srgbClr val="1C2833"/>
-                </a:solidFill>
-                <a:latin typeface="Georgia" pitchFamily="34" charset="0"/>
-                <a:ea typeface="Georgia" pitchFamily="34" charset="-122"/>
-                <a:cs typeface="Georgia" pitchFamily="34" charset="-120"/>
-              </a:rPr>
-              <a:t>Nikhilaṁ Navataścaramaṁ Daśataḥ.</a:t>
-            </a:r>
-            <a:pPr algn="l" indent="0" marL="0">
-              <a:lnSpc>
-                <a:spcPts val="1820"/>
-              </a:lnSpc>
-              <a:spcBef>
-                <a:spcPts val="300"/>
-              </a:spcBef>
-              <a:spcAft>
-                <a:spcPts val="300"/>
-              </a:spcAft>
-              <a:buNone/>
-            </a:pPr>
-            <a:r>
-              <a:rPr lang="en-US" sz="1300" dirty="0">
-                <a:solidFill>
-                  <a:srgbClr val="1C2833"/>
-                </a:solidFill>
-                <a:latin typeface="Georgia" pitchFamily="34" charset="0"/>
-                <a:ea typeface="Georgia" pitchFamily="34" charset="-122"/>
-                <a:cs typeface="Georgia" pitchFamily="34" charset="-120"/>
-              </a:rPr>
-              <a:t> Six words; an entire subtraction shortcut.</a:t>
-            </a:r>
-            <a:endParaRPr lang="en-US" sz="1300" dirty="0"/>
-          </a:p>
-        </p:txBody>
-      </p:sp>
-      <p:sp>
-        <p:nvSpPr>
-          <p:cNvPr id="11" name="Text 9"/>
+            <a:pPr algn="l" marL="342900" indent="-342900">
+              <a:lnSpc>
+                <a:spcPts val="1620"/>
+              </a:lnSpc>
+              <a:spcAft>
+                <a:spcPts val="300"/>
+              </a:spcAft>
+              <a:buSzPct val="100000"/>
+              <a:buChar char="•"/>
+            </a:pPr>
+            <a:r>
+              <a:rPr lang="en-US" sz="1200" b="1" dirty="0">
+                <a:solidFill>
+                  <a:srgbClr val="1C2833"/>
+                </a:solidFill>
+                <a:latin typeface="Arial" pitchFamily="34" charset="0"/>
+                <a:ea typeface="Arial" pitchFamily="34" charset="-122"/>
+                <a:cs typeface="Arial" pitchFamily="34" charset="-120"/>
+              </a:rPr>
+              <a:t>1000 − 567</a:t>
+            </a:r>
+            <a:pPr algn="l" indent="0" marL="0">
+              <a:lnSpc>
+                <a:spcPts val="1620"/>
+              </a:lnSpc>
+              <a:spcAft>
+                <a:spcPts val="300"/>
+              </a:spcAft>
+              <a:buNone/>
+            </a:pPr>
+            <a:r>
+              <a:rPr lang="en-US" sz="1200" dirty="0">
+                <a:solidFill>
+                  <a:srgbClr val="1C2833"/>
+                </a:solidFill>
+                <a:latin typeface="Arial" pitchFamily="34" charset="0"/>
+                <a:ea typeface="Arial" pitchFamily="34" charset="-122"/>
+                <a:cs typeface="Arial" pitchFamily="34" charset="-120"/>
+              </a:rPr>
+              <a:t> — 9-5, 9-6, 10-7 = 4, 3, 3 · </a:t>
+            </a:r>
+            <a:pPr algn="l" indent="0" marL="0">
+              <a:lnSpc>
+                <a:spcPts val="1620"/>
+              </a:lnSpc>
+              <a:spcAft>
+                <a:spcPts val="300"/>
+              </a:spcAft>
+              <a:buNone/>
+            </a:pPr>
+            <a:r>
+              <a:rPr lang="en-US" sz="1200" b="1" dirty="0">
+                <a:solidFill>
+                  <a:srgbClr val="1C2833"/>
+                </a:solidFill>
+                <a:latin typeface="Arial" pitchFamily="34" charset="0"/>
+                <a:ea typeface="Arial" pitchFamily="34" charset="-122"/>
+                <a:cs typeface="Arial" pitchFamily="34" charset="-120"/>
+              </a:rPr>
+              <a:t>433</a:t>
+            </a:r>
+            <a:endParaRPr lang="en-US" sz="1200" dirty="0"/>
+          </a:p>
+          <a:p>
+            <a:pPr algn="l" marL="342900" indent="-342900">
+              <a:lnSpc>
+                <a:spcPts val="1620"/>
+              </a:lnSpc>
+              <a:spcAft>
+                <a:spcPts val="300"/>
+              </a:spcAft>
+              <a:buSzPct val="100000"/>
+              <a:buChar char="•"/>
+            </a:pPr>
+            <a:r>
+              <a:rPr lang="en-US" sz="1200" b="1" dirty="0">
+                <a:solidFill>
+                  <a:srgbClr val="1C2833"/>
+                </a:solidFill>
+                <a:latin typeface="Arial" pitchFamily="34" charset="0"/>
+                <a:ea typeface="Arial" pitchFamily="34" charset="-122"/>
+                <a:cs typeface="Arial" pitchFamily="34" charset="-120"/>
+              </a:rPr>
+              <a:t>1000 − 248</a:t>
+            </a:r>
+            <a:pPr algn="l" indent="0" marL="0">
+              <a:lnSpc>
+                <a:spcPts val="1620"/>
+              </a:lnSpc>
+              <a:spcAft>
+                <a:spcPts val="300"/>
+              </a:spcAft>
+              <a:buNone/>
+            </a:pPr>
+            <a:r>
+              <a:rPr lang="en-US" sz="1200" dirty="0">
+                <a:solidFill>
+                  <a:srgbClr val="1C2833"/>
+                </a:solidFill>
+                <a:latin typeface="Arial" pitchFamily="34" charset="0"/>
+                <a:ea typeface="Arial" pitchFamily="34" charset="-122"/>
+                <a:cs typeface="Arial" pitchFamily="34" charset="-120"/>
+              </a:rPr>
+              <a:t> — 9-2, 9-4, 10-8 = 7, 5, 2 · </a:t>
+            </a:r>
+            <a:pPr algn="l" indent="0" marL="0">
+              <a:lnSpc>
+                <a:spcPts val="1620"/>
+              </a:lnSpc>
+              <a:spcAft>
+                <a:spcPts val="300"/>
+              </a:spcAft>
+              <a:buNone/>
+            </a:pPr>
+            <a:r>
+              <a:rPr lang="en-US" sz="1200" b="1" dirty="0">
+                <a:solidFill>
+                  <a:srgbClr val="1C2833"/>
+                </a:solidFill>
+                <a:latin typeface="Arial" pitchFamily="34" charset="0"/>
+                <a:ea typeface="Arial" pitchFamily="34" charset="-122"/>
+                <a:cs typeface="Arial" pitchFamily="34" charset="-120"/>
+              </a:rPr>
+              <a:t>752</a:t>
+            </a:r>
+            <a:endParaRPr lang="en-US" sz="1200" dirty="0"/>
+          </a:p>
+          <a:p>
+            <a:pPr algn="l" marL="342900" indent="-342900">
+              <a:lnSpc>
+                <a:spcPts val="1620"/>
+              </a:lnSpc>
+              <a:spcAft>
+                <a:spcPts val="300"/>
+              </a:spcAft>
+              <a:buSzPct val="100000"/>
+              <a:buChar char="•"/>
+            </a:pPr>
+            <a:r>
+              <a:rPr lang="en-US" sz="1200" b="1" dirty="0">
+                <a:solidFill>
+                  <a:srgbClr val="1C2833"/>
+                </a:solidFill>
+                <a:latin typeface="Arial" pitchFamily="34" charset="0"/>
+                <a:ea typeface="Arial" pitchFamily="34" charset="-122"/>
+                <a:cs typeface="Arial" pitchFamily="34" charset="-120"/>
+              </a:rPr>
+              <a:t>10 000 − 4567</a:t>
+            </a:r>
+            <a:pPr algn="l" indent="0" marL="0">
+              <a:lnSpc>
+                <a:spcPts val="1620"/>
+              </a:lnSpc>
+              <a:spcAft>
+                <a:spcPts val="300"/>
+              </a:spcAft>
+              <a:buNone/>
+            </a:pPr>
+            <a:r>
+              <a:rPr lang="en-US" sz="1200" dirty="0">
+                <a:solidFill>
+                  <a:srgbClr val="1C2833"/>
+                </a:solidFill>
+                <a:latin typeface="Arial" pitchFamily="34" charset="0"/>
+                <a:ea typeface="Arial" pitchFamily="34" charset="-122"/>
+                <a:cs typeface="Arial" pitchFamily="34" charset="-120"/>
+              </a:rPr>
+              <a:t> — 9-4, 9-5, 9-6, 10-7 = 5, 4, 3, 3 · </a:t>
+            </a:r>
+            <a:pPr algn="l" indent="0" marL="0">
+              <a:lnSpc>
+                <a:spcPts val="1620"/>
+              </a:lnSpc>
+              <a:spcAft>
+                <a:spcPts val="300"/>
+              </a:spcAft>
+              <a:buNone/>
+            </a:pPr>
+            <a:r>
+              <a:rPr lang="en-US" sz="1200" b="1" dirty="0">
+                <a:solidFill>
+                  <a:srgbClr val="1C2833"/>
+                </a:solidFill>
+                <a:latin typeface="Arial" pitchFamily="34" charset="0"/>
+                <a:ea typeface="Arial" pitchFamily="34" charset="-122"/>
+                <a:cs typeface="Arial" pitchFamily="34" charset="-120"/>
+              </a:rPr>
+              <a:t>5433</a:t>
+            </a:r>
+            <a:endParaRPr lang="en-US" sz="1200" dirty="0"/>
+          </a:p>
+          <a:p>
+            <a:pPr algn="l" marL="342900" indent="-342900">
+              <a:lnSpc>
+                <a:spcPts val="1620"/>
+              </a:lnSpc>
+              <a:spcAft>
+                <a:spcPts val="300"/>
+              </a:spcAft>
+              <a:buSzPct val="100000"/>
+              <a:buChar char="•"/>
+            </a:pPr>
+            <a:r>
+              <a:rPr lang="en-US" sz="1200" b="1" dirty="0">
+                <a:solidFill>
+                  <a:srgbClr val="1C2833"/>
+                </a:solidFill>
+                <a:latin typeface="Arial" pitchFamily="34" charset="0"/>
+                <a:ea typeface="Arial" pitchFamily="34" charset="-122"/>
+                <a:cs typeface="Arial" pitchFamily="34" charset="-120"/>
+              </a:rPr>
+              <a:t>10 000 − 89</a:t>
+            </a:r>
+            <a:pPr algn="l" indent="0" marL="0">
+              <a:lnSpc>
+                <a:spcPts val="1620"/>
+              </a:lnSpc>
+              <a:spcAft>
+                <a:spcPts val="300"/>
+              </a:spcAft>
+              <a:buNone/>
+            </a:pPr>
+            <a:r>
+              <a:rPr lang="en-US" sz="1200" dirty="0">
+                <a:solidFill>
+                  <a:srgbClr val="1C2833"/>
+                </a:solidFill>
+                <a:latin typeface="Arial" pitchFamily="34" charset="0"/>
+                <a:ea typeface="Arial" pitchFamily="34" charset="-122"/>
+                <a:cs typeface="Arial" pitchFamily="34" charset="-120"/>
+              </a:rPr>
+              <a:t> — 9-0, 9-0, 9-8, 10-9 = 9, 9, 1, 1 · </a:t>
+            </a:r>
+            <a:pPr algn="l" indent="0" marL="0">
+              <a:lnSpc>
+                <a:spcPts val="1620"/>
+              </a:lnSpc>
+              <a:spcAft>
+                <a:spcPts val="300"/>
+              </a:spcAft>
+              <a:buNone/>
+            </a:pPr>
+            <a:r>
+              <a:rPr lang="en-US" sz="1200" b="1" dirty="0">
+                <a:solidFill>
+                  <a:srgbClr val="1C2833"/>
+                </a:solidFill>
+                <a:latin typeface="Arial" pitchFamily="34" charset="0"/>
+                <a:ea typeface="Arial" pitchFamily="34" charset="-122"/>
+                <a:cs typeface="Arial" pitchFamily="34" charset="-120"/>
+              </a:rPr>
+              <a:t>9911</a:t>
+            </a:r>
+            <a:pPr algn="l" indent="0" marL="0">
+              <a:lnSpc>
+                <a:spcPts val="1620"/>
+              </a:lnSpc>
+              <a:spcAft>
+                <a:spcPts val="300"/>
+              </a:spcAft>
+              <a:buNone/>
+            </a:pPr>
+            <a:r>
+              <a:rPr lang="en-US" sz="1200" dirty="0">
+                <a:solidFill>
+                  <a:srgbClr val="1C2833"/>
+                </a:solidFill>
+                <a:latin typeface="Arial" pitchFamily="34" charset="0"/>
+                <a:ea typeface="Arial" pitchFamily="34" charset="-122"/>
+                <a:cs typeface="Arial" pitchFamily="34" charset="-120"/>
+              </a:rPr>
+              <a:t> (pad 89 → 0089)</a:t>
+            </a:r>
+            <a:endParaRPr lang="en-US" sz="1200" dirty="0"/>
+          </a:p>
+          <a:p>
+            <a:pPr algn="l" marL="342900" indent="-342900">
+              <a:lnSpc>
+                <a:spcPts val="1620"/>
+              </a:lnSpc>
+              <a:spcAft>
+                <a:spcPts val="300"/>
+              </a:spcAft>
+              <a:buSzPct val="100000"/>
+              <a:buChar char="•"/>
+            </a:pPr>
+            <a:r>
+              <a:rPr lang="en-US" sz="1200" b="1" dirty="0">
+                <a:solidFill>
+                  <a:srgbClr val="1C2833"/>
+                </a:solidFill>
+                <a:latin typeface="Arial" pitchFamily="34" charset="0"/>
+                <a:ea typeface="Arial" pitchFamily="34" charset="-122"/>
+                <a:cs typeface="Arial" pitchFamily="34" charset="-120"/>
+              </a:rPr>
+              <a:t>100 000 − 23 456</a:t>
+            </a:r>
+            <a:pPr algn="l" indent="0" marL="0">
+              <a:lnSpc>
+                <a:spcPts val="1620"/>
+              </a:lnSpc>
+              <a:spcAft>
+                <a:spcPts val="300"/>
+              </a:spcAft>
+              <a:buNone/>
+            </a:pPr>
+            <a:r>
+              <a:rPr lang="en-US" sz="1200" dirty="0">
+                <a:solidFill>
+                  <a:srgbClr val="1C2833"/>
+                </a:solidFill>
+                <a:latin typeface="Arial" pitchFamily="34" charset="0"/>
+                <a:ea typeface="Arial" pitchFamily="34" charset="-122"/>
+                <a:cs typeface="Arial" pitchFamily="34" charset="-120"/>
+              </a:rPr>
+              <a:t> — 9-2, 9-3, 9-4, 9-5, 10-6 = 7, 6, 5, 4, 4 · </a:t>
+            </a:r>
+            <a:pPr algn="l" indent="0" marL="0">
+              <a:lnSpc>
+                <a:spcPts val="1620"/>
+              </a:lnSpc>
+              <a:spcAft>
+                <a:spcPts val="300"/>
+              </a:spcAft>
+              <a:buNone/>
+            </a:pPr>
+            <a:r>
+              <a:rPr lang="en-US" sz="1200" b="1" dirty="0">
+                <a:solidFill>
+                  <a:srgbClr val="1C2833"/>
+                </a:solidFill>
+                <a:latin typeface="Arial" pitchFamily="34" charset="0"/>
+                <a:ea typeface="Arial" pitchFamily="34" charset="-122"/>
+                <a:cs typeface="Arial" pitchFamily="34" charset="-120"/>
+              </a:rPr>
+              <a:t>76 544</a:t>
+            </a:r>
+            <a:endParaRPr lang="en-US" sz="1200" dirty="0"/>
+          </a:p>
+        </p:txBody>
+      </p:sp>
+      <p:sp>
+        <p:nvSpPr>
+          <p:cNvPr id="5" name="Text 3"/>
           <p:cNvSpPr/>
           <p:nvPr/>
         </p:nvSpPr>
